--- a/decks/builder/builder.pptx
+++ b/decks/builder/builder.pptx
@@ -4081,7 +4081,8 @@
           <a:p>
             <a:r>
               <a:rPr lang="en-US" dirty="0"/>
-              <a:t>Bypass all permissions by default. You’re not removing safety, you’re moving it. GCP CLI not logged into prod. AWS credentials scoped to dev. The agent physically cannot touch production. Trust the gated workflow, not per-command prompts.</a:t>
+              <a:t>Bypass all permissions by default for general coding. You’re not removing safety, you’re moving it. GCP CLI not logged into prod. AWS credentials scoped to dev. The agent physically cannot touch production. Trust the gated workflow, not per-command prompts.
+The exception: PII sessions. When touching production data, you do NOT bypass — these are careful, involved sessions with managed tool calls where you verify each step. The interaction mode changes with the data.</a:t>
             </a:r>
             <a:endParaRPr lang="en-US" dirty="0"/>
           </a:p>
@@ -4521,7 +4522,7 @@
           <a:p>
             <a:r>
               <a:rPr lang="en-US" dirty="0"/>
-              <a:t>You can’t get Builder-level speed while also having access to PII through the default path. The split is deliberate: default for general coding, PII path through GCP with EU region models. The decision is per-task, not per-project.</a:t>
+              <a:t>You can’t get Builder-level speed while also having access to PII through the default path. The split is deliberate: default path uses bypass permissions for fast, full-featured general coding. PII path routes through GCP with EU region models — and critically, no bypass permissions. These are careful, involved sessions where you manage each tool call because the data is sensitive. The interaction mode changes with the data. The decision is per-task, not per-project.</a:t>
             </a:r>
             <a:endParaRPr lang="en-US" dirty="0"/>
           </a:p>
@@ -16687,6 +16688,23 @@
                 <a:ea typeface="Calibri" pitchFamily="34" charset="-122"/>
                 <a:cs typeface="Calibri" pitchFamily="34" charset="-120"/>
               </a:rPr>
+              <a:t>Managed tool calls</a:t>
+            </a:r>
+            <a:endParaRPr lang="en-US" sz="2200" dirty="0"/>
+          </a:p>
+          <a:p>
+            <a:pPr algn="ctr" indent="0" marL="0">
+              <a:buNone/>
+            </a:pPr>
+            <a:r>
+              <a:rPr lang="en-US" sz="2200" dirty="0">
+                <a:solidFill>
+                  <a:srgbClr val="1E293B"/>
+                </a:solidFill>
+                <a:latin typeface="Calibri" pitchFamily="34" charset="0"/>
+                <a:ea typeface="Calibri" pitchFamily="34" charset="-122"/>
+                <a:cs typeface="Calibri" pitchFamily="34" charset="-120"/>
+              </a:rPr>
               <a:t>Production logs, user data</a:t>
             </a:r>
             <a:endParaRPr lang="en-US" sz="2200" dirty="0"/>

--- a/decks/builder/builder.pptx
+++ b/decks/builder/builder.pptx
@@ -5669,7 +5669,7 @@
     <p:bg>
       <p:bgPr>
         <a:solidFill>
-          <a:srgbClr val="0F0F1A"/>
+          <a:srgbClr val="0A2540"/>
         </a:solidFill>
       </p:bgPr>
     </p:bg>
@@ -5702,7 +5702,7 @@
             <a:avLst/>
           </a:prstGeom>
           <a:solidFill>
-            <a:srgbClr val="00B4D8">
+            <a:srgbClr val="635BFF">
               <a:alpha val="4000"/>
             </a:srgbClr>
           </a:solidFill>
@@ -5775,11 +5775,11 @@
             <a:r>
               <a:rPr lang="en-US" sz="2200" i="1" dirty="0">
                 <a:solidFill>
-                  <a:srgbClr val="94A3B8"/>
-                </a:solidFill>
-                <a:latin typeface="Calibri" pitchFamily="34" charset="0"/>
-                <a:ea typeface="Calibri" pitchFamily="34" charset="-122"/>
-                <a:cs typeface="Calibri" pitchFamily="34" charset="-120"/>
+                  <a:srgbClr val="8B95A5"/>
+                </a:solidFill>
+                <a:latin typeface="Verdana" pitchFamily="34" charset="0"/>
+                <a:ea typeface="Verdana" pitchFamily="34" charset="-122"/>
+                <a:cs typeface="Verdana" pitchFamily="34" charset="-120"/>
               </a:rPr>
               <a:t>How to ship production systems with AI coding agents</a:t>
             </a:r>
@@ -5801,7 +5801,7 @@
     <p:bg>
       <p:bgPr>
         <a:solidFill>
-          <a:srgbClr val="0F0F1A"/>
+          <a:srgbClr val="0A2540"/>
         </a:solidFill>
       </p:bgPr>
     </p:bg>
@@ -5834,7 +5834,7 @@
             <a:avLst/>
           </a:prstGeom>
           <a:solidFill>
-            <a:srgbClr val="00B4D8">
+            <a:srgbClr val="635BFF">
               <a:alpha val="4000"/>
             </a:srgbClr>
           </a:solidFill>
@@ -5907,11 +5907,11 @@
             <a:r>
               <a:rPr lang="en-US" sz="2800" dirty="0">
                 <a:solidFill>
-                  <a:srgbClr val="94A3B8"/>
-                </a:solidFill>
-                <a:latin typeface="Calibri" pitchFamily="34" charset="0"/>
-                <a:ea typeface="Calibri" pitchFamily="34" charset="-122"/>
-                <a:cs typeface="Calibri" pitchFamily="34" charset="-120"/>
+                  <a:srgbClr val="8B95A5"/>
+                </a:solidFill>
+                <a:latin typeface="Verdana" pitchFamily="34" charset="0"/>
+                <a:ea typeface="Verdana" pitchFamily="34" charset="-122"/>
+                <a:cs typeface="Verdana" pitchFamily="34" charset="-120"/>
               </a:rPr>
               <a:t>AI code follows anti-patterns at scale.</a:t>
             </a:r>
@@ -5946,11 +5946,11 @@
             <a:r>
               <a:rPr lang="en-US" sz="1100" u="sng" dirty="0">
                 <a:solidFill>
-                  <a:srgbClr val="94A3B8"/>
-                </a:solidFill>
-                <a:latin typeface="Calibri" pitchFamily="34" charset="0"/>
-                <a:ea typeface="Calibri" pitchFamily="34" charset="-122"/>
-                <a:cs typeface="Calibri" pitchFamily="34" charset="-120"/>
+                  <a:srgbClr val="8B95A5"/>
+                </a:solidFill>
+                <a:latin typeface="Verdana" pitchFamily="34" charset="0"/>
+                <a:ea typeface="Verdana" pitchFamily="34" charset="-122"/>
+                <a:cs typeface="Verdana" pitchFamily="34" charset="-120"/>
                 <a:hlinkClick r:id="rId1" invalidUrl="" action="" tgtFrame="" tooltip="" history="1" highlightClick="0" endSnd="0">
                   <a:extLst>
                     <a:ext uri="{A12FA001-AC4F-418D-AE19-62706E023703}">
@@ -5979,7 +5979,7 @@
     <p:bg>
       <p:bgPr>
         <a:solidFill>
-          <a:srgbClr val="0F0F1A"/>
+          <a:srgbClr val="0A2540"/>
         </a:solidFill>
       </p:bgPr>
     </p:bg>
@@ -6012,7 +6012,7 @@
             <a:avLst/>
           </a:prstGeom>
           <a:solidFill>
-            <a:srgbClr val="00B4D8">
+            <a:srgbClr val="635BFF">
               <a:alpha val="4000"/>
             </a:srgbClr>
           </a:solidFill>
@@ -6106,7 +6106,7 @@
     <p:bg>
       <p:bgPr>
         <a:solidFill>
-          <a:srgbClr val="0F0F1A"/>
+          <a:srgbClr val="0A2540"/>
         </a:solidFill>
       </p:bgPr>
     </p:bg>
@@ -6139,7 +6139,7 @@
             <a:avLst/>
           </a:prstGeom>
           <a:solidFill>
-            <a:srgbClr val="00B4D8">
+            <a:srgbClr val="635BFF">
               <a:alpha val="4000"/>
             </a:srgbClr>
           </a:solidFill>
@@ -6229,11 +6229,11 @@
             <a:r>
               <a:rPr lang="en-US" sz="2200" i="1" dirty="0">
                 <a:solidFill>
-                  <a:srgbClr val="94A3B8"/>
-                </a:solidFill>
-                <a:latin typeface="Calibri" pitchFamily="34" charset="0"/>
-                <a:ea typeface="Calibri" pitchFamily="34" charset="-122"/>
-                <a:cs typeface="Calibri" pitchFamily="34" charset="-120"/>
+                  <a:srgbClr val="8B95A5"/>
+                </a:solidFill>
+                <a:latin typeface="Verdana" pitchFamily="34" charset="0"/>
+                <a:ea typeface="Verdana" pitchFamily="34" charset="-122"/>
+                <a:cs typeface="Verdana" pitchFamily="34" charset="-120"/>
               </a:rPr>
               <a:t>— Replit AI agent, July 2025</a:t>
             </a:r>
@@ -6268,11 +6268,11 @@
             <a:r>
               <a:rPr lang="en-US" sz="1100" u="sng" dirty="0">
                 <a:solidFill>
-                  <a:srgbClr val="94A3B8"/>
-                </a:solidFill>
-                <a:latin typeface="Calibri" pitchFamily="34" charset="0"/>
-                <a:ea typeface="Calibri" pitchFamily="34" charset="-122"/>
-                <a:cs typeface="Calibri" pitchFamily="34" charset="-120"/>
+                  <a:srgbClr val="8B95A5"/>
+                </a:solidFill>
+                <a:latin typeface="Verdana" pitchFamily="34" charset="0"/>
+                <a:ea typeface="Verdana" pitchFamily="34" charset="-122"/>
+                <a:cs typeface="Verdana" pitchFamily="34" charset="-120"/>
                 <a:hlinkClick r:id="rId1" invalidUrl="" action="" tgtFrame="" tooltip="" history="1" highlightClick="0" endSnd="0">
                   <a:extLst>
                     <a:ext uri="{A12FA001-AC4F-418D-AE19-62706E023703}">
@@ -6289,11 +6289,11 @@
             <a:r>
               <a:rPr lang="en-US" sz="1100" dirty="0">
                 <a:solidFill>
-                  <a:srgbClr val="94A3B8"/>
-                </a:solidFill>
-                <a:latin typeface="Calibri" pitchFamily="34" charset="0"/>
-                <a:ea typeface="Calibri" pitchFamily="34" charset="-122"/>
-                <a:cs typeface="Calibri" pitchFamily="34" charset="-120"/>
+                  <a:srgbClr val="8B95A5"/>
+                </a:solidFill>
+                <a:latin typeface="Verdana" pitchFamily="34" charset="0"/>
+                <a:ea typeface="Verdana" pitchFamily="34" charset="-122"/>
+                <a:cs typeface="Verdana" pitchFamily="34" charset="-120"/>
               </a:rPr>
               <a:t>, </a:t>
             </a:r>
@@ -6303,11 +6303,11 @@
             <a:r>
               <a:rPr lang="en-US" sz="1100" u="sng" dirty="0">
                 <a:solidFill>
-                  <a:srgbClr val="94A3B8"/>
-                </a:solidFill>
-                <a:latin typeface="Calibri" pitchFamily="34" charset="0"/>
-                <a:ea typeface="Calibri" pitchFamily="34" charset="-122"/>
-                <a:cs typeface="Calibri" pitchFamily="34" charset="-120"/>
+                  <a:srgbClr val="8B95A5"/>
+                </a:solidFill>
+                <a:latin typeface="Verdana" pitchFamily="34" charset="0"/>
+                <a:ea typeface="Verdana" pitchFamily="34" charset="-122"/>
+                <a:cs typeface="Verdana" pitchFamily="34" charset="-120"/>
                 <a:hlinkClick r:id="rId2" invalidUrl="" action="" tgtFrame="" tooltip="" history="1" highlightClick="0" endSnd="0">
                   <a:extLst>
                     <a:ext uri="{A12FA001-AC4F-418D-AE19-62706E023703}">
@@ -6336,7 +6336,7 @@
     <p:bg>
       <p:bgPr>
         <a:solidFill>
-          <a:srgbClr val="0F0F1A"/>
+          <a:srgbClr val="0A2540"/>
         </a:solidFill>
       </p:bgPr>
     </p:bg>
@@ -6369,7 +6369,7 @@
             <a:avLst/>
           </a:prstGeom>
           <a:solidFill>
-            <a:srgbClr val="00B4D8">
+            <a:srgbClr val="635BFF">
               <a:alpha val="4000"/>
             </a:srgbClr>
           </a:solidFill>
@@ -6403,7 +6403,7 @@
             <a:r>
               <a:rPr lang="en-US" sz="4400" b="1" dirty="0">
                 <a:solidFill>
-                  <a:srgbClr val="00B4D8"/>
+                  <a:srgbClr val="635BFF"/>
                 </a:solidFill>
                 <a:latin typeface="Georgia" pitchFamily="34" charset="0"/>
                 <a:ea typeface="Georgia" pitchFamily="34" charset="-122"/>
@@ -6420,7 +6420,7 @@
             <a:r>
               <a:rPr lang="en-US" sz="4400" b="1" dirty="0">
                 <a:solidFill>
-                  <a:srgbClr val="00B4D8"/>
+                  <a:srgbClr val="635BFF"/>
                 </a:solidFill>
                 <a:latin typeface="Georgia" pitchFamily="34" charset="0"/>
                 <a:ea typeface="Georgia" pitchFamily="34" charset="-122"/>
@@ -6459,11 +6459,11 @@
             <a:r>
               <a:rPr lang="en-US" sz="1100" u="sng" dirty="0">
                 <a:solidFill>
-                  <a:srgbClr val="94A3B8"/>
-                </a:solidFill>
-                <a:latin typeface="Calibri" pitchFamily="34" charset="0"/>
-                <a:ea typeface="Calibri" pitchFamily="34" charset="-122"/>
-                <a:cs typeface="Calibri" pitchFamily="34" charset="-120"/>
+                  <a:srgbClr val="8B95A5"/>
+                </a:solidFill>
+                <a:latin typeface="Verdana" pitchFamily="34" charset="0"/>
+                <a:ea typeface="Verdana" pitchFamily="34" charset="-122"/>
+                <a:cs typeface="Verdana" pitchFamily="34" charset="-120"/>
                 <a:hlinkClick r:id="rId1" invalidUrl="" action="" tgtFrame="" tooltip="" history="1" highlightClick="0" endSnd="0">
                   <a:extLst>
                     <a:ext uri="{A12FA001-AC4F-418D-AE19-62706E023703}">
@@ -6492,7 +6492,7 @@
     <p:bg>
       <p:bgPr>
         <a:solidFill>
-          <a:srgbClr val="F8F9FA"/>
+          <a:srgbClr val="FFFFFF"/>
         </a:solidFill>
       </p:bgPr>
     </p:bg>
@@ -6537,7 +6537,7 @@
             <a:r>
               <a:rPr lang="en-US" sz="4000" b="1" dirty="0">
                 <a:solidFill>
-                  <a:srgbClr val="1E293B"/>
+                  <a:srgbClr val="1A1F36"/>
                 </a:solidFill>
                 <a:latin typeface="Georgia" pitchFamily="34" charset="0"/>
                 <a:ea typeface="Georgia" pitchFamily="34" charset="-122"/>
@@ -6554,7 +6554,7 @@
             <a:r>
               <a:rPr lang="en-US" sz="4000" b="1" dirty="0">
                 <a:solidFill>
-                  <a:srgbClr val="1E293B"/>
+                  <a:srgbClr val="1A1F36"/>
                 </a:solidFill>
                 <a:latin typeface="Georgia" pitchFamily="34" charset="0"/>
                 <a:ea typeface="Georgia" pitchFamily="34" charset="-122"/>
@@ -6607,16 +6607,16 @@
                           <a:solidFill>
                             <a:srgbClr val="FFFFFF"/>
                           </a:solidFill>
-                          <a:latin typeface="Calibri" pitchFamily="34" charset="0"/>
-                          <a:ea typeface="Calibri" pitchFamily="34" charset="-122"/>
-                          <a:cs typeface="Calibri" pitchFamily="34" charset="-120"/>
+                          <a:latin typeface="Verdana" pitchFamily="34" charset="0"/>
+                          <a:ea typeface="Verdana" pitchFamily="34" charset="-122"/>
+                          <a:cs typeface="Verdana" pitchFamily="34" charset="-120"/>
                         </a:rPr>
                         <a:t>Level</a:t>
                       </a:r>
                       <a:endParaRPr lang="en-US" sz="1800" dirty="0">
-                        <a:latin typeface="Calibri" charset="0"/>
-                        <a:ea typeface="Calibri" charset="0"/>
-                        <a:cs typeface="Calibri" charset="0"/>
+                        <a:latin typeface="Verdana" charset="0"/>
+                        <a:ea typeface="Verdana" charset="0"/>
+                        <a:cs typeface="Verdana" charset="0"/>
                       </a:endParaRPr>
                     </a:p>
                   </a:txBody>
@@ -6658,7 +6658,7 @@
                       <a:tailEnd type="none" w="med" len="med"/>
                     </a:lnB>
                     <a:solidFill>
-                      <a:srgbClr val="1E293B"/>
+                      <a:srgbClr val="1A1F36"/>
                     </a:solidFill>
                   </a:tcPr>
                 </a:tc>
@@ -6675,16 +6675,16 @@
                           <a:solidFill>
                             <a:srgbClr val="FFFFFF"/>
                           </a:solidFill>
-                          <a:latin typeface="Calibri" pitchFamily="34" charset="0"/>
-                          <a:ea typeface="Calibri" pitchFamily="34" charset="-122"/>
-                          <a:cs typeface="Calibri" pitchFamily="34" charset="-120"/>
+                          <a:latin typeface="Verdana" pitchFamily="34" charset="0"/>
+                          <a:ea typeface="Verdana" pitchFamily="34" charset="-122"/>
+                          <a:cs typeface="Verdana" pitchFamily="34" charset="-120"/>
                         </a:rPr>
                         <a:t>What you ship</a:t>
                       </a:r>
                       <a:endParaRPr lang="en-US" sz="1800" dirty="0">
-                        <a:latin typeface="Calibri" charset="0"/>
-                        <a:ea typeface="Calibri" charset="0"/>
-                        <a:cs typeface="Calibri" charset="0"/>
+                        <a:latin typeface="Verdana" charset="0"/>
+                        <a:ea typeface="Verdana" charset="0"/>
+                        <a:cs typeface="Verdana" charset="0"/>
                       </a:endParaRPr>
                     </a:p>
                   </a:txBody>
@@ -6726,7 +6726,7 @@
                       <a:tailEnd type="none" w="med" len="med"/>
                     </a:lnB>
                     <a:solidFill>
-                      <a:srgbClr val="1E293B"/>
+                      <a:srgbClr val="1A1F36"/>
                     </a:solidFill>
                   </a:tcPr>
                 </a:tc>
@@ -6743,16 +6743,16 @@
                           <a:solidFill>
                             <a:srgbClr val="FFFFFF"/>
                           </a:solidFill>
-                          <a:latin typeface="Calibri" pitchFamily="34" charset="0"/>
-                          <a:ea typeface="Calibri" pitchFamily="34" charset="-122"/>
-                          <a:cs typeface="Calibri" pitchFamily="34" charset="-120"/>
+                          <a:latin typeface="Verdana" pitchFamily="34" charset="0"/>
+                          <a:ea typeface="Verdana" pitchFamily="34" charset="-122"/>
+                          <a:cs typeface="Verdana" pitchFamily="34" charset="-120"/>
                         </a:rPr>
                         <a:t>Why</a:t>
                       </a:r>
                       <a:endParaRPr lang="en-US" sz="1800" dirty="0">
-                        <a:latin typeface="Calibri" charset="0"/>
-                        <a:ea typeface="Calibri" charset="0"/>
-                        <a:cs typeface="Calibri" charset="0"/>
+                        <a:latin typeface="Verdana" charset="0"/>
+                        <a:ea typeface="Verdana" charset="0"/>
+                        <a:cs typeface="Verdana" charset="0"/>
                       </a:endParaRPr>
                     </a:p>
                   </a:txBody>
@@ -6794,7 +6794,7 @@
                       <a:tailEnd type="none" w="med" len="med"/>
                     </a:lnB>
                     <a:solidFill>
-                      <a:srgbClr val="1E293B"/>
+                      <a:srgbClr val="1A1F36"/>
                     </a:solidFill>
                   </a:tcPr>
                 </a:tc>
@@ -6811,18 +6811,18 @@
                       <a:r>
                         <a:rPr lang="en-US" sz="2000" b="1" dirty="0">
                           <a:solidFill>
-                            <a:srgbClr val="E63946"/>
+                            <a:srgbClr val="FF6B8A"/>
                           </a:solidFill>
-                          <a:latin typeface="Calibri" pitchFamily="34" charset="0"/>
-                          <a:ea typeface="Calibri" pitchFamily="34" charset="-122"/>
-                          <a:cs typeface="Calibri" pitchFamily="34" charset="-120"/>
+                          <a:latin typeface="Verdana" pitchFamily="34" charset="0"/>
+                          <a:ea typeface="Verdana" pitchFamily="34" charset="-122"/>
+                          <a:cs typeface="Verdana" pitchFamily="34" charset="-120"/>
                         </a:rPr>
                         <a:t>Vibe coder</a:t>
                       </a:r>
                       <a:endParaRPr lang="en-US" sz="2000" dirty="0">
-                        <a:latin typeface="Calibri" charset="0"/>
-                        <a:ea typeface="Calibri" charset="0"/>
-                        <a:cs typeface="Calibri" charset="0"/>
+                        <a:latin typeface="Verdana" charset="0"/>
+                        <a:ea typeface="Verdana" charset="0"/>
+                        <a:cs typeface="Verdana" charset="0"/>
                       </a:endParaRPr>
                     </a:p>
                   </a:txBody>
@@ -6876,18 +6876,18 @@
                       <a:r>
                         <a:rPr lang="en-US" sz="2000" dirty="0">
                           <a:solidFill>
-                            <a:srgbClr val="1E293B"/>
+                            <a:srgbClr val="1A1F36"/>
                           </a:solidFill>
-                          <a:latin typeface="Calibri" pitchFamily="34" charset="0"/>
-                          <a:ea typeface="Calibri" pitchFamily="34" charset="-122"/>
-                          <a:cs typeface="Calibri" pitchFamily="34" charset="-120"/>
+                          <a:latin typeface="Verdana" pitchFamily="34" charset="0"/>
+                          <a:ea typeface="Verdana" pitchFamily="34" charset="-122"/>
+                          <a:cs typeface="Verdana" pitchFamily="34" charset="-120"/>
                         </a:rPr>
                         <a:t>Prototypes, demos</a:t>
                       </a:r>
                       <a:endParaRPr lang="en-US" sz="2000" dirty="0">
-                        <a:latin typeface="Calibri" charset="0"/>
-                        <a:ea typeface="Calibri" charset="0"/>
-                        <a:cs typeface="Calibri" charset="0"/>
+                        <a:latin typeface="Verdana" charset="0"/>
+                        <a:ea typeface="Verdana" charset="0"/>
+                        <a:cs typeface="Verdana" charset="0"/>
                       </a:endParaRPr>
                     </a:p>
                   </a:txBody>
@@ -6941,18 +6941,18 @@
                       <a:r>
                         <a:rPr lang="en-US" sz="2000" dirty="0">
                           <a:solidFill>
-                            <a:srgbClr val="1E293B"/>
+                            <a:srgbClr val="1A1F36"/>
                           </a:solidFill>
-                          <a:latin typeface="Calibri" pitchFamily="34" charset="0"/>
-                          <a:ea typeface="Calibri" pitchFamily="34" charset="-122"/>
-                          <a:cs typeface="Calibri" pitchFamily="34" charset="-120"/>
+                          <a:latin typeface="Verdana" pitchFamily="34" charset="0"/>
+                          <a:ea typeface="Verdana" pitchFamily="34" charset="-122"/>
+                          <a:cs typeface="Verdana" pitchFamily="34" charset="-120"/>
                         </a:rPr>
                         <a:t>Can’t review output</a:t>
                       </a:r>
                       <a:endParaRPr lang="en-US" sz="2000" dirty="0">
-                        <a:latin typeface="Calibri" charset="0"/>
-                        <a:ea typeface="Calibri" charset="0"/>
-                        <a:cs typeface="Calibri" charset="0"/>
+                        <a:latin typeface="Verdana" charset="0"/>
+                        <a:ea typeface="Verdana" charset="0"/>
+                        <a:cs typeface="Verdana" charset="0"/>
                       </a:endParaRPr>
                     </a:p>
                   </a:txBody>
@@ -7008,18 +7008,18 @@
                       <a:r>
                         <a:rPr lang="en-US" sz="2000" b="1" dirty="0">
                           <a:solidFill>
-                            <a:srgbClr val="94A3B8"/>
+                            <a:srgbClr val="8B95A5"/>
                           </a:solidFill>
-                          <a:latin typeface="Calibri" pitchFamily="34" charset="0"/>
-                          <a:ea typeface="Calibri" pitchFamily="34" charset="-122"/>
-                          <a:cs typeface="Calibri" pitchFamily="34" charset="-120"/>
+                          <a:latin typeface="Verdana" pitchFamily="34" charset="0"/>
+                          <a:ea typeface="Verdana" pitchFamily="34" charset="-122"/>
+                          <a:cs typeface="Verdana" pitchFamily="34" charset="-120"/>
                         </a:rPr>
                         <a:t>Developer + AI</a:t>
                       </a:r>
                       <a:endParaRPr lang="en-US" sz="2000" dirty="0">
-                        <a:latin typeface="Calibri" charset="0"/>
-                        <a:ea typeface="Calibri" charset="0"/>
-                        <a:cs typeface="Calibri" charset="0"/>
+                        <a:latin typeface="Verdana" charset="0"/>
+                        <a:ea typeface="Verdana" charset="0"/>
+                        <a:cs typeface="Verdana" charset="0"/>
                       </a:endParaRPr>
                     </a:p>
                   </a:txBody>
@@ -7073,18 +7073,18 @@
                       <a:r>
                         <a:rPr lang="en-US" sz="2000" dirty="0">
                           <a:solidFill>
-                            <a:srgbClr val="1E293B"/>
+                            <a:srgbClr val="1A1F36"/>
                           </a:solidFill>
-                          <a:latin typeface="Calibri" pitchFamily="34" charset="0"/>
-                          <a:ea typeface="Calibri" pitchFamily="34" charset="-122"/>
-                          <a:cs typeface="Calibri" pitchFamily="34" charset="-120"/>
+                          <a:latin typeface="Verdana" pitchFamily="34" charset="0"/>
+                          <a:ea typeface="Verdana" pitchFamily="34" charset="-122"/>
+                          <a:cs typeface="Verdana" pitchFamily="34" charset="-120"/>
                         </a:rPr>
                         <a:t>POCs, internal tools</a:t>
                       </a:r>
                       <a:endParaRPr lang="en-US" sz="2000" dirty="0">
-                        <a:latin typeface="Calibri" charset="0"/>
-                        <a:ea typeface="Calibri" charset="0"/>
-                        <a:cs typeface="Calibri" charset="0"/>
+                        <a:latin typeface="Verdana" charset="0"/>
+                        <a:ea typeface="Verdana" charset="0"/>
+                        <a:cs typeface="Verdana" charset="0"/>
                       </a:endParaRPr>
                     </a:p>
                   </a:txBody>
@@ -7138,18 +7138,18 @@
                       <a:r>
                         <a:rPr lang="en-US" sz="2000" dirty="0">
                           <a:solidFill>
-                            <a:srgbClr val="1E293B"/>
+                            <a:srgbClr val="1A1F36"/>
                           </a:solidFill>
-                          <a:latin typeface="Calibri" pitchFamily="34" charset="0"/>
-                          <a:ea typeface="Calibri" pitchFamily="34" charset="-122"/>
-                          <a:cs typeface="Calibri" pitchFamily="34" charset="-120"/>
+                          <a:latin typeface="Verdana" pitchFamily="34" charset="0"/>
+                          <a:ea typeface="Verdana" pitchFamily="34" charset="-122"/>
+                          <a:cs typeface="Verdana" pitchFamily="34" charset="-120"/>
                         </a:rPr>
                         <a:t>Catches obvious issues</a:t>
                       </a:r>
                       <a:endParaRPr lang="en-US" sz="2000" dirty="0">
-                        <a:latin typeface="Calibri" charset="0"/>
-                        <a:ea typeface="Calibri" charset="0"/>
-                        <a:cs typeface="Calibri" charset="0"/>
+                        <a:latin typeface="Verdana" charset="0"/>
+                        <a:ea typeface="Verdana" charset="0"/>
+                        <a:cs typeface="Verdana" charset="0"/>
                       </a:endParaRPr>
                     </a:p>
                   </a:txBody>
@@ -7205,18 +7205,18 @@
                       <a:r>
                         <a:rPr lang="en-US" sz="2000" b="1" dirty="0">
                           <a:solidFill>
-                            <a:srgbClr val="2D936C"/>
+                            <a:srgbClr val="09825D"/>
                           </a:solidFill>
-                          <a:latin typeface="Calibri" pitchFamily="34" charset="0"/>
-                          <a:ea typeface="Calibri" pitchFamily="34" charset="-122"/>
-                          <a:cs typeface="Calibri" pitchFamily="34" charset="-120"/>
+                          <a:latin typeface="Verdana" pitchFamily="34" charset="0"/>
+                          <a:ea typeface="Verdana" pitchFamily="34" charset="-122"/>
+                          <a:cs typeface="Verdana" pitchFamily="34" charset="-120"/>
                         </a:rPr>
                         <a:t>Engineer + AI</a:t>
                       </a:r>
                       <a:endParaRPr lang="en-US" sz="2000" dirty="0">
-                        <a:latin typeface="Calibri" charset="0"/>
-                        <a:ea typeface="Calibri" charset="0"/>
-                        <a:cs typeface="Calibri" charset="0"/>
+                        <a:latin typeface="Verdana" charset="0"/>
+                        <a:ea typeface="Verdana" charset="0"/>
+                        <a:cs typeface="Verdana" charset="0"/>
                       </a:endParaRPr>
                     </a:p>
                   </a:txBody>
@@ -7270,18 +7270,18 @@
                       <a:r>
                         <a:rPr lang="en-US" sz="2000" dirty="0">
                           <a:solidFill>
-                            <a:srgbClr val="1E293B"/>
+                            <a:srgbClr val="1A1F36"/>
                           </a:solidFill>
-                          <a:latin typeface="Calibri" pitchFamily="34" charset="0"/>
-                          <a:ea typeface="Calibri" pitchFamily="34" charset="-122"/>
-                          <a:cs typeface="Calibri" pitchFamily="34" charset="-120"/>
+                          <a:latin typeface="Verdana" pitchFamily="34" charset="0"/>
+                          <a:ea typeface="Verdana" pitchFamily="34" charset="-122"/>
+                          <a:cs typeface="Verdana" pitchFamily="34" charset="-120"/>
                         </a:rPr>
                         <a:t>Production systems</a:t>
                       </a:r>
                       <a:endParaRPr lang="en-US" sz="2000" dirty="0">
-                        <a:latin typeface="Calibri" charset="0"/>
-                        <a:ea typeface="Calibri" charset="0"/>
-                        <a:cs typeface="Calibri" charset="0"/>
+                        <a:latin typeface="Verdana" charset="0"/>
+                        <a:ea typeface="Verdana" charset="0"/>
+                        <a:cs typeface="Verdana" charset="0"/>
                       </a:endParaRPr>
                     </a:p>
                   </a:txBody>
@@ -7335,18 +7335,18 @@
                       <a:r>
                         <a:rPr lang="en-US" sz="2000" dirty="0">
                           <a:solidFill>
-                            <a:srgbClr val="1E293B"/>
+                            <a:srgbClr val="1A1F36"/>
                           </a:solidFill>
-                          <a:latin typeface="Calibri" pitchFamily="34" charset="0"/>
-                          <a:ea typeface="Calibri" pitchFamily="34" charset="-122"/>
-                          <a:cs typeface="Calibri" pitchFamily="34" charset="-120"/>
+                          <a:latin typeface="Verdana" pitchFamily="34" charset="0"/>
+                          <a:ea typeface="Verdana" pitchFamily="34" charset="-122"/>
+                          <a:cs typeface="Verdana" pitchFamily="34" charset="-120"/>
                         </a:rPr>
                         <a:t>Verifies every stage</a:t>
                       </a:r>
                       <a:endParaRPr lang="en-US" sz="2000" dirty="0">
-                        <a:latin typeface="Calibri" charset="0"/>
-                        <a:ea typeface="Calibri" charset="0"/>
-                        <a:cs typeface="Calibri" charset="0"/>
+                        <a:latin typeface="Verdana" charset="0"/>
+                        <a:ea typeface="Verdana" charset="0"/>
+                        <a:cs typeface="Verdana" charset="0"/>
                       </a:endParaRPr>
                     </a:p>
                   </a:txBody>
@@ -7408,7 +7408,7 @@
     <p:bg>
       <p:bgPr>
         <a:solidFill>
-          <a:srgbClr val="0F0F1A"/>
+          <a:srgbClr val="0A2540"/>
         </a:solidFill>
       </p:bgPr>
     </p:bg>
@@ -7441,7 +7441,7 @@
             <a:avLst/>
           </a:prstGeom>
           <a:solidFill>
-            <a:srgbClr val="00B4D8">
+            <a:srgbClr val="635BFF">
               <a:alpha val="4000"/>
             </a:srgbClr>
           </a:solidFill>
@@ -7535,7 +7535,7 @@
     <p:bg>
       <p:bgPr>
         <a:solidFill>
-          <a:srgbClr val="0F0F1A"/>
+          <a:srgbClr val="0A2540"/>
         </a:solidFill>
       </p:bgPr>
     </p:bg>
@@ -7568,7 +7568,7 @@
             <a:avLst/>
           </a:prstGeom>
           <a:solidFill>
-            <a:srgbClr val="00B4D8">
+            <a:srgbClr val="635BFF">
               <a:alpha val="4000"/>
             </a:srgbClr>
           </a:solidFill>
@@ -7602,7 +7602,7 @@
             <a:r>
               <a:rPr lang="en-US" sz="2800" i="1" dirty="0">
                 <a:solidFill>
-                  <a:srgbClr val="00B4D8"/>
+                  <a:srgbClr val="635BFF"/>
                 </a:solidFill>
                 <a:latin typeface="Georgia" pitchFamily="34" charset="0"/>
                 <a:ea typeface="Georgia" pitchFamily="34" charset="-122"/>
@@ -7619,7 +7619,7 @@
             <a:r>
               <a:rPr lang="en-US" sz="2800" i="1" dirty="0">
                 <a:solidFill>
-                  <a:srgbClr val="00B4D8"/>
+                  <a:srgbClr val="635BFF"/>
                 </a:solidFill>
                 <a:latin typeface="Georgia" pitchFamily="34" charset="0"/>
                 <a:ea typeface="Georgia" pitchFamily="34" charset="-122"/>
@@ -7645,7 +7645,7 @@
     <p:bg>
       <p:bgPr>
         <a:solidFill>
-          <a:srgbClr val="0F0F1A"/>
+          <a:srgbClr val="0A2540"/>
         </a:solidFill>
       </p:bgPr>
     </p:bg>
@@ -7678,7 +7678,7 @@
             <a:avLst/>
           </a:prstGeom>
           <a:solidFill>
-            <a:srgbClr val="00B4D8">
+            <a:srgbClr val="635BFF">
               <a:alpha val="4000"/>
             </a:srgbClr>
           </a:solidFill>
@@ -7755,7 +7755,7 @@
     <p:bg>
       <p:bgPr>
         <a:solidFill>
-          <a:srgbClr val="0F0F1A"/>
+          <a:srgbClr val="0A2540"/>
         </a:solidFill>
       </p:bgPr>
     </p:bg>
@@ -7788,7 +7788,7 @@
             <a:avLst/>
           </a:prstGeom>
           <a:solidFill>
-            <a:srgbClr val="00B4D8">
+            <a:srgbClr val="635BFF">
               <a:alpha val="4000"/>
             </a:srgbClr>
           </a:solidFill>
@@ -7822,7 +7822,7 @@
             <a:r>
               <a:rPr lang="en-US" sz="3600" b="1" dirty="0">
                 <a:solidFill>
-                  <a:srgbClr val="00B4D8"/>
+                  <a:srgbClr val="635BFF"/>
                 </a:solidFill>
                 <a:latin typeface="Georgia" pitchFamily="34" charset="0"/>
                 <a:ea typeface="Georgia" pitchFamily="34" charset="-122"/>
@@ -7861,11 +7861,11 @@
             <a:r>
               <a:rPr lang="en-US" sz="2200" dirty="0">
                 <a:solidFill>
-                  <a:srgbClr val="94A3B8"/>
-                </a:solidFill>
-                <a:latin typeface="Calibri" pitchFamily="34" charset="0"/>
-                <a:ea typeface="Calibri" pitchFamily="34" charset="-122"/>
-                <a:cs typeface="Calibri" pitchFamily="34" charset="-120"/>
+                  <a:srgbClr val="8B95A5"/>
+                </a:solidFill>
+                <a:latin typeface="Verdana" pitchFamily="34" charset="0"/>
+                <a:ea typeface="Verdana" pitchFamily="34" charset="-122"/>
+                <a:cs typeface="Verdana" pitchFamily="34" charset="-120"/>
               </a:rPr>
               <a:t>Improve the process</a:t>
             </a:r>
@@ -7878,11 +7878,11 @@
             <a:r>
               <a:rPr lang="en-US" sz="2200" dirty="0">
                 <a:solidFill>
-                  <a:srgbClr val="94A3B8"/>
-                </a:solidFill>
-                <a:latin typeface="Calibri" pitchFamily="34" charset="0"/>
-                <a:ea typeface="Calibri" pitchFamily="34" charset="-122"/>
-                <a:cs typeface="Calibri" pitchFamily="34" charset="-120"/>
+                  <a:srgbClr val="8B95A5"/>
+                </a:solidFill>
+                <a:latin typeface="Verdana" pitchFamily="34" charset="0"/>
+                <a:ea typeface="Verdana" pitchFamily="34" charset="-122"/>
+                <a:cs typeface="Verdana" pitchFamily="34" charset="-120"/>
               </a:rPr>
               <a:t>Build skills &amp; workflows</a:t>
             </a:r>
@@ -7895,11 +7895,11 @@
             <a:r>
               <a:rPr lang="en-US" sz="2200" dirty="0">
                 <a:solidFill>
-                  <a:srgbClr val="94A3B8"/>
-                </a:solidFill>
-                <a:latin typeface="Calibri" pitchFamily="34" charset="0"/>
-                <a:ea typeface="Calibri" pitchFamily="34" charset="-122"/>
-                <a:cs typeface="Calibri" pitchFamily="34" charset="-120"/>
+                  <a:srgbClr val="8B95A5"/>
+                </a:solidFill>
+                <a:latin typeface="Verdana" pitchFamily="34" charset="0"/>
+                <a:ea typeface="Verdana" pitchFamily="34" charset="-122"/>
+                <a:cs typeface="Verdana" pitchFamily="34" charset="-120"/>
               </a:rPr>
               <a:t>Invest in infrastructure</a:t>
             </a:r>
@@ -7924,7 +7924,7 @@
           <a:noFill/>
           <a:ln w="12700">
             <a:solidFill>
-              <a:srgbClr val="00B4D8"/>
+              <a:srgbClr val="635BFF"/>
             </a:solidFill>
             <a:prstDash val="solid"/>
           </a:ln>
@@ -7996,11 +7996,11 @@
             <a:r>
               <a:rPr lang="en-US" sz="2200" dirty="0">
                 <a:solidFill>
-                  <a:srgbClr val="94A3B8"/>
-                </a:solidFill>
-                <a:latin typeface="Calibri" pitchFamily="34" charset="0"/>
-                <a:ea typeface="Calibri" pitchFamily="34" charset="-122"/>
-                <a:cs typeface="Calibri" pitchFamily="34" charset="-120"/>
+                  <a:srgbClr val="8B95A5"/>
+                </a:solidFill>
+                <a:latin typeface="Verdana" pitchFamily="34" charset="0"/>
+                <a:ea typeface="Verdana" pitchFamily="34" charset="-122"/>
+                <a:cs typeface="Verdana" pitchFamily="34" charset="-120"/>
               </a:rPr>
               <a:t>Verify each stage</a:t>
             </a:r>
@@ -8013,11 +8013,11 @@
             <a:r>
               <a:rPr lang="en-US" sz="2200" dirty="0">
                 <a:solidFill>
-                  <a:srgbClr val="94A3B8"/>
-                </a:solidFill>
-                <a:latin typeface="Calibri" pitchFamily="34" charset="0"/>
-                <a:ea typeface="Calibri" pitchFamily="34" charset="-122"/>
-                <a:cs typeface="Calibri" pitchFamily="34" charset="-120"/>
+                  <a:srgbClr val="8B95A5"/>
+                </a:solidFill>
+                <a:latin typeface="Verdana" pitchFamily="34" charset="0"/>
+                <a:ea typeface="Verdana" pitchFamily="34" charset="-122"/>
+                <a:cs typeface="Verdana" pitchFamily="34" charset="-120"/>
               </a:rPr>
               <a:t>Review architecture</a:t>
             </a:r>
@@ -8030,11 +8030,11 @@
             <a:r>
               <a:rPr lang="en-US" sz="2200" dirty="0">
                 <a:solidFill>
-                  <a:srgbClr val="94A3B8"/>
-                </a:solidFill>
-                <a:latin typeface="Calibri" pitchFamily="34" charset="0"/>
-                <a:ea typeface="Calibri" pitchFamily="34" charset="-122"/>
-                <a:cs typeface="Calibri" pitchFamily="34" charset="-120"/>
+                  <a:srgbClr val="8B95A5"/>
+                </a:solidFill>
+                <a:latin typeface="Verdana" pitchFamily="34" charset="0"/>
+                <a:ea typeface="Verdana" pitchFamily="34" charset="-122"/>
+                <a:cs typeface="Verdana" pitchFamily="34" charset="-120"/>
               </a:rPr>
               <a:t>Catch what agents miss</a:t>
             </a:r>
@@ -8056,7 +8056,7 @@
     <p:bg>
       <p:bgPr>
         <a:solidFill>
-          <a:srgbClr val="0F0F1A"/>
+          <a:srgbClr val="0A2540"/>
         </a:solidFill>
       </p:bgPr>
     </p:bg>
@@ -8089,7 +8089,7 @@
             <a:avLst/>
           </a:prstGeom>
           <a:solidFill>
-            <a:srgbClr val="00B4D8">
+            <a:srgbClr val="635BFF">
               <a:alpha val="4000"/>
             </a:srgbClr>
           </a:solidFill>
@@ -8196,11 +8196,11 @@
             <a:r>
               <a:rPr lang="en-US" sz="2200" i="1" dirty="0">
                 <a:solidFill>
-                  <a:srgbClr val="94A3B8"/>
-                </a:solidFill>
-                <a:latin typeface="Calibri" pitchFamily="34" charset="0"/>
-                <a:ea typeface="Calibri" pitchFamily="34" charset="-122"/>
-                <a:cs typeface="Calibri" pitchFamily="34" charset="-120"/>
+                  <a:srgbClr val="8B95A5"/>
+                </a:solidFill>
+                <a:latin typeface="Verdana" pitchFamily="34" charset="0"/>
+                <a:ea typeface="Verdana" pitchFamily="34" charset="-122"/>
+                <a:cs typeface="Verdana" pitchFamily="34" charset="-120"/>
               </a:rPr>
               <a:t>— Forbes Tech Council, Feb 2026</a:t>
             </a:r>
@@ -8222,7 +8222,7 @@
     <p:bg>
       <p:bgPr>
         <a:solidFill>
-          <a:srgbClr val="0F0F1A"/>
+          <a:srgbClr val="0A2540"/>
         </a:solidFill>
       </p:bgPr>
     </p:bg>
@@ -8255,7 +8255,7 @@
             <a:avLst/>
           </a:prstGeom>
           <a:solidFill>
-            <a:srgbClr val="00B4D8">
+            <a:srgbClr val="635BFF">
               <a:alpha val="4000"/>
             </a:srgbClr>
           </a:solidFill>
@@ -8279,13 +8279,13 @@
             </a:avLst>
           </a:prstGeom>
           <a:solidFill>
-            <a:srgbClr val="0F0F1A">
+            <a:srgbClr val="0A2540">
               <a:alpha val="50000"/>
             </a:srgbClr>
           </a:solidFill>
           <a:ln w="12700">
             <a:solidFill>
-              <a:srgbClr val="94A3B8"/>
+              <a:srgbClr val="8B95A5"/>
             </a:solidFill>
             <a:prstDash val="solid"/>
           </a:ln>
@@ -8316,17 +8316,17 @@
               <a:buNone/>
             </a:pPr>
             <a:r>
-              <a:rPr lang="en-US" sz="1500" b="1" dirty="0">
-                <a:solidFill>
-                  <a:srgbClr val="94A3B8"/>
-                </a:solidFill>
-                <a:latin typeface="Calibri" pitchFamily="34" charset="0"/>
-                <a:ea typeface="Calibri" pitchFamily="34" charset="-122"/>
-                <a:cs typeface="Calibri" pitchFamily="34" charset="-120"/>
+              <a:rPr lang="en-US" sz="1200" b="1" dirty="0">
+                <a:solidFill>
+                  <a:srgbClr val="8B95A5"/>
+                </a:solidFill>
+                <a:latin typeface="Verdana" pitchFamily="34" charset="0"/>
+                <a:ea typeface="Verdana" pitchFamily="34" charset="-122"/>
+                <a:cs typeface="Verdana" pitchFamily="34" charset="-120"/>
               </a:rPr>
               <a:t>Skeptic</a:t>
             </a:r>
-            <a:endParaRPr lang="en-US" sz="1500" dirty="0"/>
+            <a:endParaRPr lang="en-US" sz="1200" dirty="0"/>
           </a:p>
         </p:txBody>
       </p:sp>
@@ -8355,17 +8355,17 @@
               <a:buNone/>
             </a:pPr>
             <a:r>
-              <a:rPr lang="en-US" sz="1400" dirty="0">
-                <a:solidFill>
-                  <a:srgbClr val="94A3B8"/>
-                </a:solidFill>
-                <a:latin typeface="Calibri" pitchFamily="34" charset="0"/>
-                <a:ea typeface="Calibri" pitchFamily="34" charset="-122"/>
-                <a:cs typeface="Calibri" pitchFamily="34" charset="-120"/>
+              <a:rPr lang="en-US" sz="1100" dirty="0">
+                <a:solidFill>
+                  <a:srgbClr val="8B95A5"/>
+                </a:solidFill>
+                <a:latin typeface="Verdana" pitchFamily="34" charset="0"/>
+                <a:ea typeface="Verdana" pitchFamily="34" charset="-122"/>
+                <a:cs typeface="Verdana" pitchFamily="34" charset="-120"/>
               </a:rPr>
               <a:t>→</a:t>
             </a:r>
-            <a:endParaRPr lang="en-US" sz="1400" dirty="0"/>
+            <a:endParaRPr lang="en-US" sz="1100" dirty="0"/>
           </a:p>
         </p:txBody>
       </p:sp>
@@ -8386,13 +8386,13 @@
             </a:avLst>
           </a:prstGeom>
           <a:solidFill>
-            <a:srgbClr val="0F0F1A">
+            <a:srgbClr val="0A2540">
               <a:alpha val="50000"/>
             </a:srgbClr>
           </a:solidFill>
           <a:ln w="12700">
             <a:solidFill>
-              <a:srgbClr val="94A3B8"/>
+              <a:srgbClr val="8B95A5"/>
             </a:solidFill>
             <a:prstDash val="solid"/>
           </a:ln>
@@ -8423,17 +8423,17 @@
               <a:buNone/>
             </a:pPr>
             <a:r>
-              <a:rPr lang="en-US" sz="1500" b="1" dirty="0">
-                <a:solidFill>
-                  <a:srgbClr val="94A3B8"/>
-                </a:solidFill>
-                <a:latin typeface="Calibri" pitchFamily="34" charset="0"/>
-                <a:ea typeface="Calibri" pitchFamily="34" charset="-122"/>
-                <a:cs typeface="Calibri" pitchFamily="34" charset="-120"/>
+              <a:rPr lang="en-US" sz="1200" b="1" dirty="0">
+                <a:solidFill>
+                  <a:srgbClr val="8B95A5"/>
+                </a:solidFill>
+                <a:latin typeface="Verdana" pitchFamily="34" charset="0"/>
+                <a:ea typeface="Verdana" pitchFamily="34" charset="-122"/>
+                <a:cs typeface="Verdana" pitchFamily="34" charset="-120"/>
               </a:rPr>
               <a:t>Explorer</a:t>
             </a:r>
-            <a:endParaRPr lang="en-US" sz="1500" dirty="0"/>
+            <a:endParaRPr lang="en-US" sz="1200" dirty="0"/>
           </a:p>
         </p:txBody>
       </p:sp>
@@ -8462,17 +8462,17 @@
               <a:buNone/>
             </a:pPr>
             <a:r>
-              <a:rPr lang="en-US" sz="1400" dirty="0">
-                <a:solidFill>
-                  <a:srgbClr val="94A3B8"/>
-                </a:solidFill>
-                <a:latin typeface="Calibri" pitchFamily="34" charset="0"/>
-                <a:ea typeface="Calibri" pitchFamily="34" charset="-122"/>
-                <a:cs typeface="Calibri" pitchFamily="34" charset="-120"/>
+              <a:rPr lang="en-US" sz="1100" dirty="0">
+                <a:solidFill>
+                  <a:srgbClr val="8B95A5"/>
+                </a:solidFill>
+                <a:latin typeface="Verdana" pitchFamily="34" charset="0"/>
+                <a:ea typeface="Verdana" pitchFamily="34" charset="-122"/>
+                <a:cs typeface="Verdana" pitchFamily="34" charset="-120"/>
               </a:rPr>
               <a:t>→</a:t>
             </a:r>
-            <a:endParaRPr lang="en-US" sz="1400" dirty="0"/>
+            <a:endParaRPr lang="en-US" sz="1100" dirty="0"/>
           </a:p>
         </p:txBody>
       </p:sp>
@@ -8493,13 +8493,13 @@
             </a:avLst>
           </a:prstGeom>
           <a:solidFill>
-            <a:srgbClr val="0F0F1A">
+            <a:srgbClr val="0A2540">
               <a:alpha val="50000"/>
             </a:srgbClr>
           </a:solidFill>
           <a:ln w="12700">
             <a:solidFill>
-              <a:srgbClr val="94A3B8"/>
+              <a:srgbClr val="8B95A5"/>
             </a:solidFill>
             <a:prstDash val="solid"/>
           </a:ln>
@@ -8530,17 +8530,17 @@
               <a:buNone/>
             </a:pPr>
             <a:r>
-              <a:rPr lang="en-US" sz="1500" b="1" dirty="0">
-                <a:solidFill>
-                  <a:srgbClr val="94A3B8"/>
-                </a:solidFill>
-                <a:latin typeface="Calibri" pitchFamily="34" charset="0"/>
-                <a:ea typeface="Calibri" pitchFamily="34" charset="-122"/>
-                <a:cs typeface="Calibri" pitchFamily="34" charset="-120"/>
+              <a:rPr lang="en-US" sz="1200" b="1" dirty="0">
+                <a:solidFill>
+                  <a:srgbClr val="8B95A5"/>
+                </a:solidFill>
+                <a:latin typeface="Verdana" pitchFamily="34" charset="0"/>
+                <a:ea typeface="Verdana" pitchFamily="34" charset="-122"/>
+                <a:cs typeface="Verdana" pitchFamily="34" charset="-120"/>
               </a:rPr>
               <a:t>Whisperer</a:t>
             </a:r>
-            <a:endParaRPr lang="en-US" sz="1500" dirty="0"/>
+            <a:endParaRPr lang="en-US" sz="1200" dirty="0"/>
           </a:p>
         </p:txBody>
       </p:sp>
@@ -8569,17 +8569,17 @@
               <a:buNone/>
             </a:pPr>
             <a:r>
-              <a:rPr lang="en-US" sz="1400" dirty="0">
-                <a:solidFill>
-                  <a:srgbClr val="94A3B8"/>
-                </a:solidFill>
-                <a:latin typeface="Calibri" pitchFamily="34" charset="0"/>
-                <a:ea typeface="Calibri" pitchFamily="34" charset="-122"/>
-                <a:cs typeface="Calibri" pitchFamily="34" charset="-120"/>
+              <a:rPr lang="en-US" sz="1100" dirty="0">
+                <a:solidFill>
+                  <a:srgbClr val="8B95A5"/>
+                </a:solidFill>
+                <a:latin typeface="Verdana" pitchFamily="34" charset="0"/>
+                <a:ea typeface="Verdana" pitchFamily="34" charset="-122"/>
+                <a:cs typeface="Verdana" pitchFamily="34" charset="-120"/>
               </a:rPr>
               <a:t>→</a:t>
             </a:r>
-            <a:endParaRPr lang="en-US" sz="1400" dirty="0"/>
+            <a:endParaRPr lang="en-US" sz="1100" dirty="0"/>
           </a:p>
         </p:txBody>
       </p:sp>
@@ -8600,13 +8600,13 @@
             </a:avLst>
           </a:prstGeom>
           <a:solidFill>
-            <a:srgbClr val="0F0F1A">
+            <a:srgbClr val="0A2540">
               <a:alpha val="50000"/>
             </a:srgbClr>
           </a:solidFill>
           <a:ln w="12700">
             <a:solidFill>
-              <a:srgbClr val="94A3B8"/>
+              <a:srgbClr val="8B95A5"/>
             </a:solidFill>
             <a:prstDash val="solid"/>
           </a:ln>
@@ -8637,17 +8637,17 @@
               <a:buNone/>
             </a:pPr>
             <a:r>
-              <a:rPr lang="en-US" sz="1500" b="1" dirty="0">
-                <a:solidFill>
-                  <a:srgbClr val="94A3B8"/>
-                </a:solidFill>
-                <a:latin typeface="Calibri" pitchFamily="34" charset="0"/>
-                <a:ea typeface="Calibri" pitchFamily="34" charset="-122"/>
-                <a:cs typeface="Calibri" pitchFamily="34" charset="-120"/>
+              <a:rPr lang="en-US" sz="1200" b="1" dirty="0">
+                <a:solidFill>
+                  <a:srgbClr val="8B95A5"/>
+                </a:solidFill>
+                <a:latin typeface="Verdana" pitchFamily="34" charset="0"/>
+                <a:ea typeface="Verdana" pitchFamily="34" charset="-122"/>
+                <a:cs typeface="Verdana" pitchFamily="34" charset="-120"/>
               </a:rPr>
               <a:t>Strategist</a:t>
             </a:r>
-            <a:endParaRPr lang="en-US" sz="1500" dirty="0"/>
+            <a:endParaRPr lang="en-US" sz="1200" dirty="0"/>
           </a:p>
         </p:txBody>
       </p:sp>
@@ -8676,17 +8676,17 @@
               <a:buNone/>
             </a:pPr>
             <a:r>
-              <a:rPr lang="en-US" sz="1400" dirty="0">
-                <a:solidFill>
-                  <a:srgbClr val="94A3B8"/>
-                </a:solidFill>
-                <a:latin typeface="Calibri" pitchFamily="34" charset="0"/>
-                <a:ea typeface="Calibri" pitchFamily="34" charset="-122"/>
-                <a:cs typeface="Calibri" pitchFamily="34" charset="-120"/>
+              <a:rPr lang="en-US" sz="1100" dirty="0">
+                <a:solidFill>
+                  <a:srgbClr val="8B95A5"/>
+                </a:solidFill>
+                <a:latin typeface="Verdana" pitchFamily="34" charset="0"/>
+                <a:ea typeface="Verdana" pitchFamily="34" charset="-122"/>
+                <a:cs typeface="Verdana" pitchFamily="34" charset="-120"/>
               </a:rPr>
               <a:t>→</a:t>
             </a:r>
-            <a:endParaRPr lang="en-US" sz="1400" dirty="0"/>
+            <a:endParaRPr lang="en-US" sz="1100" dirty="0"/>
           </a:p>
         </p:txBody>
       </p:sp>
@@ -8707,13 +8707,13 @@
             </a:avLst>
           </a:prstGeom>
           <a:solidFill>
-            <a:srgbClr val="0F0F1A">
+            <a:srgbClr val="0A2540">
               <a:alpha val="50000"/>
             </a:srgbClr>
           </a:solidFill>
           <a:ln w="12700">
             <a:solidFill>
-              <a:srgbClr val="94A3B8"/>
+              <a:srgbClr val="8B95A5"/>
             </a:solidFill>
             <a:prstDash val="solid"/>
           </a:ln>
@@ -8744,17 +8744,17 @@
               <a:buNone/>
             </a:pPr>
             <a:r>
-              <a:rPr lang="en-US" sz="1500" b="1" dirty="0">
-                <a:solidFill>
-                  <a:srgbClr val="94A3B8"/>
-                </a:solidFill>
-                <a:latin typeface="Calibri" pitchFamily="34" charset="0"/>
-                <a:ea typeface="Calibri" pitchFamily="34" charset="-122"/>
-                <a:cs typeface="Calibri" pitchFamily="34" charset="-120"/>
+              <a:rPr lang="en-US" sz="1200" b="1" dirty="0">
+                <a:solidFill>
+                  <a:srgbClr val="8B95A5"/>
+                </a:solidFill>
+                <a:latin typeface="Verdana" pitchFamily="34" charset="0"/>
+                <a:ea typeface="Verdana" pitchFamily="34" charset="-122"/>
+                <a:cs typeface="Verdana" pitchFamily="34" charset="-120"/>
               </a:rPr>
               <a:t>Operator</a:t>
             </a:r>
-            <a:endParaRPr lang="en-US" sz="1500" dirty="0"/>
+            <a:endParaRPr lang="en-US" sz="1200" dirty="0"/>
           </a:p>
         </p:txBody>
       </p:sp>
@@ -8783,17 +8783,17 @@
               <a:buNone/>
             </a:pPr>
             <a:r>
-              <a:rPr lang="en-US" sz="1400" dirty="0">
-                <a:solidFill>
-                  <a:srgbClr val="94A3B8"/>
-                </a:solidFill>
-                <a:latin typeface="Calibri" pitchFamily="34" charset="0"/>
-                <a:ea typeface="Calibri" pitchFamily="34" charset="-122"/>
-                <a:cs typeface="Calibri" pitchFamily="34" charset="-120"/>
+              <a:rPr lang="en-US" sz="1100" dirty="0">
+                <a:solidFill>
+                  <a:srgbClr val="8B95A5"/>
+                </a:solidFill>
+                <a:latin typeface="Verdana" pitchFamily="34" charset="0"/>
+                <a:ea typeface="Verdana" pitchFamily="34" charset="-122"/>
+                <a:cs typeface="Verdana" pitchFamily="34" charset="-120"/>
               </a:rPr>
               <a:t>→</a:t>
             </a:r>
-            <a:endParaRPr lang="en-US" sz="1400" dirty="0"/>
+            <a:endParaRPr lang="en-US" sz="1100" dirty="0"/>
           </a:p>
         </p:txBody>
       </p:sp>
@@ -8814,13 +8814,13 @@
             </a:avLst>
           </a:prstGeom>
           <a:solidFill>
-            <a:srgbClr val="0F0F1A">
+            <a:srgbClr val="0A2540">
               <a:alpha val="50000"/>
             </a:srgbClr>
           </a:solidFill>
           <a:ln w="12700">
             <a:solidFill>
-              <a:srgbClr val="00B4D8"/>
+              <a:srgbClr val="635BFF"/>
             </a:solidFill>
             <a:prstDash val="solid"/>
           </a:ln>
@@ -8851,17 +8851,17 @@
               <a:buNone/>
             </a:pPr>
             <a:r>
-              <a:rPr lang="en-US" sz="1500" b="1" dirty="0">
-                <a:solidFill>
-                  <a:srgbClr val="94A3B8"/>
-                </a:solidFill>
-                <a:latin typeface="Calibri" pitchFamily="34" charset="0"/>
-                <a:ea typeface="Calibri" pitchFamily="34" charset="-122"/>
-                <a:cs typeface="Calibri" pitchFamily="34" charset="-120"/>
+              <a:rPr lang="en-US" sz="1200" b="1" dirty="0">
+                <a:solidFill>
+                  <a:srgbClr val="8B95A5"/>
+                </a:solidFill>
+                <a:latin typeface="Verdana" pitchFamily="34" charset="0"/>
+                <a:ea typeface="Verdana" pitchFamily="34" charset="-122"/>
+                <a:cs typeface="Verdana" pitchFamily="34" charset="-120"/>
               </a:rPr>
               <a:t>Orchestrator</a:t>
             </a:r>
-            <a:endParaRPr lang="en-US" sz="1500" dirty="0"/>
+            <a:endParaRPr lang="en-US" sz="1200" dirty="0"/>
           </a:p>
         </p:txBody>
       </p:sp>
@@ -8890,17 +8890,17 @@
               <a:buNone/>
             </a:pPr>
             <a:r>
-              <a:rPr lang="en-US" sz="1400" dirty="0">
-                <a:solidFill>
-                  <a:srgbClr val="94A3B8"/>
-                </a:solidFill>
-                <a:latin typeface="Calibri" pitchFamily="34" charset="0"/>
-                <a:ea typeface="Calibri" pitchFamily="34" charset="-122"/>
-                <a:cs typeface="Calibri" pitchFamily="34" charset="-120"/>
+              <a:rPr lang="en-US" sz="1100" dirty="0">
+                <a:solidFill>
+                  <a:srgbClr val="8B95A5"/>
+                </a:solidFill>
+                <a:latin typeface="Verdana" pitchFamily="34" charset="0"/>
+                <a:ea typeface="Verdana" pitchFamily="34" charset="-122"/>
+                <a:cs typeface="Verdana" pitchFamily="34" charset="-120"/>
               </a:rPr>
               <a:t>→</a:t>
             </a:r>
-            <a:endParaRPr lang="en-US" sz="1400" dirty="0"/>
+            <a:endParaRPr lang="en-US" sz="1100" dirty="0"/>
           </a:p>
         </p:txBody>
       </p:sp>
@@ -8921,11 +8921,11 @@
             </a:avLst>
           </a:prstGeom>
           <a:solidFill>
-            <a:srgbClr val="00B4D8"/>
+            <a:srgbClr val="635BFF"/>
           </a:solidFill>
           <a:ln w="25400">
             <a:solidFill>
-              <a:srgbClr val="00B4D8"/>
+              <a:srgbClr val="635BFF"/>
             </a:solidFill>
             <a:prstDash val="solid"/>
           </a:ln>
@@ -8956,17 +8956,17 @@
               <a:buNone/>
             </a:pPr>
             <a:r>
-              <a:rPr lang="en-US" sz="1500" b="1" dirty="0">
+              <a:rPr lang="en-US" sz="1200" b="1" dirty="0">
                 <a:solidFill>
                   <a:srgbClr val="FFFFFF"/>
                 </a:solidFill>
-                <a:latin typeface="Calibri" pitchFamily="34" charset="0"/>
-                <a:ea typeface="Calibri" pitchFamily="34" charset="-122"/>
-                <a:cs typeface="Calibri" pitchFamily="34" charset="-120"/>
+                <a:latin typeface="Verdana" pitchFamily="34" charset="0"/>
+                <a:ea typeface="Verdana" pitchFamily="34" charset="-122"/>
+                <a:cs typeface="Verdana" pitchFamily="34" charset="-120"/>
               </a:rPr>
               <a:t>Builder</a:t>
             </a:r>
-            <a:endParaRPr lang="en-US" sz="1500" dirty="0"/>
+            <a:endParaRPr lang="en-US" sz="1200" dirty="0"/>
           </a:p>
         </p:txBody>
       </p:sp>
@@ -8997,7 +8997,7 @@
             <a:r>
               <a:rPr lang="en-US" sz="2400" dirty="0">
                 <a:solidFill>
-                  <a:srgbClr val="94A3B8"/>
+                  <a:srgbClr val="8B95A5"/>
                 </a:solidFill>
                 <a:latin typeface="Georgia" pitchFamily="34" charset="0"/>
                 <a:ea typeface="Georgia" pitchFamily="34" charset="-122"/>
@@ -9036,7 +9036,7 @@
             <a:r>
               <a:rPr lang="en-US" sz="2400" b="1" dirty="0">
                 <a:solidFill>
-                  <a:srgbClr val="00B4D8"/>
+                  <a:srgbClr val="635BFF"/>
                 </a:solidFill>
                 <a:latin typeface="Georgia" pitchFamily="34" charset="0"/>
                 <a:ea typeface="Georgia" pitchFamily="34" charset="-122"/>
@@ -9062,7 +9062,7 @@
     <p:bg>
       <p:bgPr>
         <a:solidFill>
-          <a:srgbClr val="0F0F1A"/>
+          <a:srgbClr val="0A2540"/>
         </a:solidFill>
       </p:bgPr>
     </p:bg>
@@ -9095,7 +9095,7 @@
             <a:avLst/>
           </a:prstGeom>
           <a:solidFill>
-            <a:srgbClr val="00B4D8">
+            <a:srgbClr val="635BFF">
               <a:alpha val="4000"/>
             </a:srgbClr>
           </a:solidFill>
@@ -9185,11 +9185,11 @@
             <a:r>
               <a:rPr lang="en-US" sz="2800" dirty="0">
                 <a:solidFill>
-                  <a:srgbClr val="94A3B8"/>
-                </a:solidFill>
-                <a:latin typeface="Calibri" pitchFamily="34" charset="0"/>
-                <a:ea typeface="Calibri" pitchFamily="34" charset="-122"/>
-                <a:cs typeface="Calibri" pitchFamily="34" charset="-120"/>
+                  <a:srgbClr val="8B95A5"/>
+                </a:solidFill>
+                <a:latin typeface="Verdana" pitchFamily="34" charset="0"/>
+                <a:ea typeface="Verdana" pitchFamily="34" charset="-122"/>
+                <a:cs typeface="Verdana" pitchFamily="34" charset="-120"/>
               </a:rPr>
               <a:t>This forces the investment.</a:t>
             </a:r>
@@ -9211,7 +9211,7 @@
     <p:bg>
       <p:bgPr>
         <a:solidFill>
-          <a:srgbClr val="F8F9FA"/>
+          <a:srgbClr val="FFFFFF"/>
         </a:solidFill>
       </p:bgPr>
     </p:bg>
@@ -9256,7 +9256,7 @@
             <a:r>
               <a:rPr lang="en-US" sz="4400" b="1" dirty="0">
                 <a:solidFill>
-                  <a:srgbClr val="1E293B"/>
+                  <a:srgbClr val="1A1F36"/>
                 </a:solidFill>
                 <a:latin typeface="Georgia" pitchFamily="34" charset="0"/>
                 <a:ea typeface="Georgia" pitchFamily="34" charset="-122"/>
@@ -9283,7 +9283,7 @@
             <a:avLst/>
           </a:prstGeom>
           <a:solidFill>
-            <a:srgbClr val="FEE2E2"/>
+            <a:srgbClr val="FEE2E8"/>
           </a:solidFill>
           <a:ln/>
         </p:spPr>
@@ -9303,7 +9303,7 @@
             <a:avLst/>
           </a:prstGeom>
           <a:solidFill>
-            <a:srgbClr val="E63946"/>
+            <a:srgbClr val="FF6B8A"/>
           </a:solidFill>
           <a:ln/>
         </p:spPr>
@@ -9335,11 +9335,11 @@
             <a:r>
               <a:rPr lang="en-US" sz="2200" dirty="0">
                 <a:solidFill>
-                  <a:srgbClr val="1E293B"/>
-                </a:solidFill>
-                <a:latin typeface="Calibri" pitchFamily="34" charset="0"/>
-                <a:ea typeface="Calibri" pitchFamily="34" charset="-122"/>
-                <a:cs typeface="Calibri" pitchFamily="34" charset="-120"/>
+                  <a:srgbClr val="1A1F36"/>
+                </a:solidFill>
+                <a:latin typeface="Verdana" pitchFamily="34" charset="0"/>
+                <a:ea typeface="Verdana" pitchFamily="34" charset="-122"/>
+                <a:cs typeface="Verdana" pitchFamily="34" charset="-120"/>
               </a:rPr>
               <a:t>Quality OR speed</a:t>
             </a:r>
@@ -9358,11 +9358,11 @@
             <a:r>
               <a:rPr lang="en-US" sz="2200" dirty="0">
                 <a:solidFill>
-                  <a:srgbClr val="1E293B"/>
-                </a:solidFill>
-                <a:latin typeface="Calibri" pitchFamily="34" charset="0"/>
-                <a:ea typeface="Calibri" pitchFamily="34" charset="-122"/>
-                <a:cs typeface="Calibri" pitchFamily="34" charset="-120"/>
+                  <a:srgbClr val="1A1F36"/>
+                </a:solidFill>
+                <a:latin typeface="Verdana" pitchFamily="34" charset="0"/>
+                <a:ea typeface="Verdana" pitchFamily="34" charset="-122"/>
+                <a:cs typeface="Verdana" pitchFamily="34" charset="-120"/>
               </a:rPr>
               <a:t>Pick one.</a:t>
             </a:r>
@@ -9381,11 +9381,11 @@
             <a:r>
               <a:rPr lang="en-US" sz="2200" dirty="0">
                 <a:solidFill>
-                  <a:srgbClr val="1E293B"/>
-                </a:solidFill>
-                <a:latin typeface="Calibri" pitchFamily="34" charset="0"/>
-                <a:ea typeface="Calibri" pitchFamily="34" charset="-122"/>
-                <a:cs typeface="Calibri" pitchFamily="34" charset="-120"/>
+                  <a:srgbClr val="1A1F36"/>
+                </a:solidFill>
+                <a:latin typeface="Verdana" pitchFamily="34" charset="0"/>
+                <a:ea typeface="Verdana" pitchFamily="34" charset="-122"/>
+                <a:cs typeface="Verdana" pitchFamily="34" charset="-120"/>
               </a:rPr>
               <a:t>Every engineering decision</a:t>
             </a:r>
@@ -9398,11 +9398,11 @@
             <a:r>
               <a:rPr lang="en-US" sz="2200" dirty="0">
                 <a:solidFill>
-                  <a:srgbClr val="1E293B"/>
-                </a:solidFill>
-                <a:latin typeface="Calibri" pitchFamily="34" charset="0"/>
-                <a:ea typeface="Calibri" pitchFamily="34" charset="-122"/>
-                <a:cs typeface="Calibri" pitchFamily="34" charset="-120"/>
+                  <a:srgbClr val="1A1F36"/>
+                </a:solidFill>
+                <a:latin typeface="Verdana" pitchFamily="34" charset="0"/>
+                <a:ea typeface="Verdana" pitchFamily="34" charset="-122"/>
+                <a:cs typeface="Verdana" pitchFamily="34" charset="-120"/>
               </a:rPr>
               <a:t>was a compromise.</a:t>
             </a:r>
@@ -9445,7 +9445,7 @@
             <a:avLst/>
           </a:prstGeom>
           <a:solidFill>
-            <a:srgbClr val="2D936C"/>
+            <a:srgbClr val="09825D"/>
           </a:solidFill>
           <a:ln/>
         </p:spPr>
@@ -9477,11 +9477,11 @@
             <a:r>
               <a:rPr lang="en-US" sz="2200" dirty="0">
                 <a:solidFill>
-                  <a:srgbClr val="1E293B"/>
-                </a:solidFill>
-                <a:latin typeface="Calibri" pitchFamily="34" charset="0"/>
-                <a:ea typeface="Calibri" pitchFamily="34" charset="-122"/>
-                <a:cs typeface="Calibri" pitchFamily="34" charset="-120"/>
+                  <a:srgbClr val="1A1F36"/>
+                </a:solidFill>
+                <a:latin typeface="Verdana" pitchFamily="34" charset="0"/>
+                <a:ea typeface="Verdana" pitchFamily="34" charset="-122"/>
+                <a:cs typeface="Verdana" pitchFamily="34" charset="-120"/>
               </a:rPr>
               <a:t>?</a:t>
             </a:r>
@@ -9512,11 +9512,11 @@
             <a:r>
               <a:rPr lang="en-US" sz="2200" dirty="0">
                 <a:solidFill>
-                  <a:srgbClr val="1E293B"/>
-                </a:solidFill>
-                <a:latin typeface="Calibri" pitchFamily="34" charset="0"/>
-                <a:ea typeface="Calibri" pitchFamily="34" charset="-122"/>
-                <a:cs typeface="Calibri" pitchFamily="34" charset="-120"/>
+                  <a:srgbClr val="1A1F36"/>
+                </a:solidFill>
+                <a:latin typeface="Verdana" pitchFamily="34" charset="0"/>
+                <a:ea typeface="Verdana" pitchFamily="34" charset="-122"/>
+                <a:cs typeface="Verdana" pitchFamily="34" charset="-120"/>
               </a:rPr>
               <a:t>The answer was always</a:t>
             </a:r>
@@ -9529,11 +9529,11 @@
             <a:r>
               <a:rPr lang="en-US" sz="2200" dirty="0">
                 <a:solidFill>
-                  <a:srgbClr val="1E293B"/>
-                </a:solidFill>
-                <a:latin typeface="Calibri" pitchFamily="34" charset="0"/>
-                <a:ea typeface="Calibri" pitchFamily="34" charset="-122"/>
-                <a:cs typeface="Calibri" pitchFamily="34" charset="-120"/>
+                  <a:srgbClr val="1A1F36"/>
+                </a:solidFill>
+                <a:latin typeface="Verdana" pitchFamily="34" charset="0"/>
+                <a:ea typeface="Verdana" pitchFamily="34" charset="-122"/>
+                <a:cs typeface="Verdana" pitchFamily="34" charset="-120"/>
               </a:rPr>
               <a:t>‘it depends.’</a:t>
             </a:r>
@@ -9555,7 +9555,7 @@
     <p:bg>
       <p:bgPr>
         <a:solidFill>
-          <a:srgbClr val="F8F9FA"/>
+          <a:srgbClr val="FFFFFF"/>
         </a:solidFill>
       </p:bgPr>
     </p:bg>
@@ -9600,7 +9600,7 @@
             <a:r>
               <a:rPr lang="en-US" sz="4400" b="1" dirty="0">
                 <a:solidFill>
-                  <a:srgbClr val="1E293B"/>
+                  <a:srgbClr val="1A1F36"/>
                 </a:solidFill>
                 <a:latin typeface="Georgia" pitchFamily="34" charset="0"/>
                 <a:ea typeface="Georgia" pitchFamily="34" charset="-122"/>
@@ -9627,7 +9627,7 @@
             <a:avLst/>
           </a:prstGeom>
           <a:solidFill>
-            <a:srgbClr val="FEE2E2"/>
+            <a:srgbClr val="FEE2E8"/>
           </a:solidFill>
           <a:ln/>
         </p:spPr>
@@ -9647,7 +9647,7 @@
             <a:avLst/>
           </a:prstGeom>
           <a:solidFill>
-            <a:srgbClr val="E63946"/>
+            <a:srgbClr val="FF6B8A"/>
           </a:solidFill>
           <a:ln/>
         </p:spPr>
@@ -9679,11 +9679,11 @@
             <a:r>
               <a:rPr lang="en-US" sz="2200" dirty="0">
                 <a:solidFill>
-                  <a:srgbClr val="1E293B"/>
-                </a:solidFill>
-                <a:latin typeface="Calibri" pitchFamily="34" charset="0"/>
-                <a:ea typeface="Calibri" pitchFamily="34" charset="-122"/>
-                <a:cs typeface="Calibri" pitchFamily="34" charset="-120"/>
+                  <a:srgbClr val="1A1F36"/>
+                </a:solidFill>
+                <a:latin typeface="Verdana" pitchFamily="34" charset="0"/>
+                <a:ea typeface="Verdana" pitchFamily="34" charset="-122"/>
+                <a:cs typeface="Verdana" pitchFamily="34" charset="-120"/>
               </a:rPr>
               <a:t>Speed alone</a:t>
             </a:r>
@@ -9702,11 +9702,11 @@
             <a:r>
               <a:rPr lang="en-US" sz="2200" dirty="0">
                 <a:solidFill>
-                  <a:srgbClr val="1E293B"/>
-                </a:solidFill>
-                <a:latin typeface="Calibri" pitchFamily="34" charset="0"/>
-                <a:ea typeface="Calibri" pitchFamily="34" charset="-122"/>
-                <a:cs typeface="Calibri" pitchFamily="34" charset="-120"/>
+                  <a:srgbClr val="1A1F36"/>
+                </a:solidFill>
+                <a:latin typeface="Verdana" pitchFamily="34" charset="0"/>
+                <a:ea typeface="Verdana" pitchFamily="34" charset="-122"/>
+                <a:cs typeface="Verdana" pitchFamily="34" charset="-120"/>
               </a:rPr>
               <a:t>= catastrophic</a:t>
             </a:r>
@@ -9719,11 +9719,11 @@
             <a:r>
               <a:rPr lang="en-US" sz="2200" dirty="0">
                 <a:solidFill>
-                  <a:srgbClr val="1E293B"/>
-                </a:solidFill>
-                <a:latin typeface="Calibri" pitchFamily="34" charset="0"/>
-                <a:ea typeface="Calibri" pitchFamily="34" charset="-122"/>
-                <a:cs typeface="Calibri" pitchFamily="34" charset="-120"/>
+                  <a:srgbClr val="1A1F36"/>
+                </a:solidFill>
+                <a:latin typeface="Verdana" pitchFamily="34" charset="0"/>
+                <a:ea typeface="Verdana" pitchFamily="34" charset="-122"/>
+                <a:cs typeface="Verdana" pitchFamily="34" charset="-120"/>
               </a:rPr>
               <a:t>quality drop</a:t>
             </a:r>
@@ -9742,11 +9742,11 @@
             <a:r>
               <a:rPr lang="en-US" sz="2200" dirty="0">
                 <a:solidFill>
-                  <a:srgbClr val="1E293B"/>
-                </a:solidFill>
-                <a:latin typeface="Calibri" pitchFamily="34" charset="0"/>
-                <a:ea typeface="Calibri" pitchFamily="34" charset="-122"/>
-                <a:cs typeface="Calibri" pitchFamily="34" charset="-120"/>
+                  <a:srgbClr val="1A1F36"/>
+                </a:solidFill>
+                <a:latin typeface="Verdana" pitchFamily="34" charset="0"/>
+                <a:ea typeface="Verdana" pitchFamily="34" charset="-122"/>
+                <a:cs typeface="Verdana" pitchFamily="34" charset="-120"/>
               </a:rPr>
               <a:t>19% slower. 1.7× issues.</a:t>
             </a:r>
@@ -9759,11 +9759,11 @@
             <a:r>
               <a:rPr lang="en-US" sz="2200" dirty="0">
                 <a:solidFill>
-                  <a:srgbClr val="1E293B"/>
-                </a:solidFill>
-                <a:latin typeface="Calibri" pitchFamily="34" charset="0"/>
-                <a:ea typeface="Calibri" pitchFamily="34" charset="-122"/>
-                <a:cs typeface="Calibri" pitchFamily="34" charset="-120"/>
+                  <a:srgbClr val="1A1F36"/>
+                </a:solidFill>
+                <a:latin typeface="Verdana" pitchFamily="34" charset="0"/>
+                <a:ea typeface="Verdana" pitchFamily="34" charset="-122"/>
+                <a:cs typeface="Verdana" pitchFamily="34" charset="-120"/>
               </a:rPr>
               <a:t>45% fail security.</a:t>
             </a:r>
@@ -9806,7 +9806,7 @@
             <a:avLst/>
           </a:prstGeom>
           <a:solidFill>
-            <a:srgbClr val="2D936C"/>
+            <a:srgbClr val="09825D"/>
           </a:solidFill>
           <a:ln/>
         </p:spPr>
@@ -9838,11 +9838,11 @@
             <a:r>
               <a:rPr lang="en-US" sz="2200" dirty="0">
                 <a:solidFill>
-                  <a:srgbClr val="1E293B"/>
-                </a:solidFill>
-                <a:latin typeface="Calibri" pitchFamily="34" charset="0"/>
-                <a:ea typeface="Calibri" pitchFamily="34" charset="-122"/>
-                <a:cs typeface="Calibri" pitchFamily="34" charset="-120"/>
+                  <a:srgbClr val="1A1F36"/>
+                </a:solidFill>
+                <a:latin typeface="Verdana" pitchFamily="34" charset="0"/>
+                <a:ea typeface="Verdana" pitchFamily="34" charset="-122"/>
+                <a:cs typeface="Verdana" pitchFamily="34" charset="-120"/>
               </a:rPr>
               <a:t>Quality AND speed</a:t>
             </a:r>
@@ -9861,11 +9861,11 @@
             <a:r>
               <a:rPr lang="en-US" sz="2200" dirty="0">
                 <a:solidFill>
-                  <a:srgbClr val="1E293B"/>
-                </a:solidFill>
-                <a:latin typeface="Calibri" pitchFamily="34" charset="0"/>
-                <a:ea typeface="Calibri" pitchFamily="34" charset="-122"/>
-                <a:cs typeface="Calibri" pitchFamily="34" charset="-120"/>
+                  <a:srgbClr val="1A1F36"/>
+                </a:solidFill>
+                <a:latin typeface="Verdana" pitchFamily="34" charset="0"/>
+                <a:ea typeface="Verdana" pitchFamily="34" charset="-122"/>
+                <a:cs typeface="Verdana" pitchFamily="34" charset="-120"/>
               </a:rPr>
               <a:t>CI/CD, linting, tests,</a:t>
             </a:r>
@@ -9878,11 +9878,11 @@
             <a:r>
               <a:rPr lang="en-US" sz="2200" dirty="0">
                 <a:solidFill>
-                  <a:srgbClr val="1E293B"/>
-                </a:solidFill>
-                <a:latin typeface="Calibri" pitchFamily="34" charset="0"/>
-                <a:ea typeface="Calibri" pitchFamily="34" charset="-122"/>
-                <a:cs typeface="Calibri" pitchFamily="34" charset="-120"/>
+                  <a:srgbClr val="1A1F36"/>
+                </a:solidFill>
+                <a:latin typeface="Verdana" pitchFamily="34" charset="0"/>
+                <a:ea typeface="Verdana" pitchFamily="34" charset="-122"/>
+                <a:cs typeface="Verdana" pitchFamily="34" charset="-120"/>
               </a:rPr>
               <a:t>PR gates</a:t>
             </a:r>
@@ -9901,11 +9901,11 @@
             <a:r>
               <a:rPr lang="en-US" sz="2200" dirty="0">
                 <a:solidFill>
-                  <a:srgbClr val="1E293B"/>
-                </a:solidFill>
-                <a:latin typeface="Calibri" pitchFamily="34" charset="0"/>
-                <a:ea typeface="Calibri" pitchFamily="34" charset="-122"/>
-                <a:cs typeface="Calibri" pitchFamily="34" charset="-120"/>
+                  <a:srgbClr val="1A1F36"/>
+                </a:solidFill>
+                <a:latin typeface="Verdana" pitchFamily="34" charset="0"/>
+                <a:ea typeface="Verdana" pitchFamily="34" charset="-122"/>
+                <a:cs typeface="Verdana" pitchFamily="34" charset="-120"/>
               </a:rPr>
               <a:t>The same best practices</a:t>
             </a:r>
@@ -9918,11 +9918,11 @@
             <a:r>
               <a:rPr lang="en-US" sz="2200" dirty="0">
                 <a:solidFill>
-                  <a:srgbClr val="1E293B"/>
-                </a:solidFill>
-                <a:latin typeface="Calibri" pitchFamily="34" charset="0"/>
-                <a:ea typeface="Calibri" pitchFamily="34" charset="-122"/>
-                <a:cs typeface="Calibri" pitchFamily="34" charset="-120"/>
+                  <a:srgbClr val="1A1F36"/>
+                </a:solidFill>
+                <a:latin typeface="Verdana" pitchFamily="34" charset="0"/>
+                <a:ea typeface="Verdana" pitchFamily="34" charset="-122"/>
+                <a:cs typeface="Verdana" pitchFamily="34" charset="-120"/>
               </a:rPr>
               <a:t>— enforced.</a:t>
             </a:r>
@@ -9944,7 +9944,7 @@
     <p:bg>
       <p:bgPr>
         <a:solidFill>
-          <a:srgbClr val="0F0F1A"/>
+          <a:srgbClr val="0A2540"/>
         </a:solidFill>
       </p:bgPr>
     </p:bg>
@@ -9977,7 +9977,7 @@
             <a:avLst/>
           </a:prstGeom>
           <a:solidFill>
-            <a:srgbClr val="00B4D8">
+            <a:srgbClr val="635BFF">
               <a:alpha val="4000"/>
             </a:srgbClr>
           </a:solidFill>
@@ -10011,7 +10011,7 @@
             <a:r>
               <a:rPr lang="en-US" sz="2800" b="1" dirty="0">
                 <a:solidFill>
-                  <a:srgbClr val="00B4D8"/>
+                  <a:srgbClr val="635BFF"/>
                 </a:solidFill>
                 <a:latin typeface="Georgia" pitchFamily="34" charset="0"/>
                 <a:ea typeface="Georgia" pitchFamily="34" charset="-122"/>
@@ -10050,11 +10050,11 @@
             <a:r>
               <a:rPr lang="en-US" sz="2200" dirty="0">
                 <a:solidFill>
-                  <a:srgbClr val="94A3B8"/>
-                </a:solidFill>
-                <a:latin typeface="Calibri" pitchFamily="34" charset="0"/>
-                <a:ea typeface="Calibri" pitchFamily="34" charset="-122"/>
-                <a:cs typeface="Calibri" pitchFamily="34" charset="-120"/>
+                  <a:srgbClr val="8B95A5"/>
+                </a:solidFill>
+                <a:latin typeface="Verdana" pitchFamily="34" charset="0"/>
+                <a:ea typeface="Verdana" pitchFamily="34" charset="-122"/>
+                <a:cs typeface="Verdana" pitchFamily="34" charset="-120"/>
               </a:rPr>
               <a:t>Not too little.</a:t>
             </a:r>
@@ -10067,11 +10067,11 @@
             <a:r>
               <a:rPr lang="en-US" sz="2200" dirty="0">
                 <a:solidFill>
-                  <a:srgbClr val="94A3B8"/>
-                </a:solidFill>
-                <a:latin typeface="Calibri" pitchFamily="34" charset="0"/>
-                <a:ea typeface="Calibri" pitchFamily="34" charset="-122"/>
-                <a:cs typeface="Calibri" pitchFamily="34" charset="-120"/>
+                  <a:srgbClr val="8B95A5"/>
+                </a:solidFill>
+                <a:latin typeface="Verdana" pitchFamily="34" charset="0"/>
+                <a:ea typeface="Verdana" pitchFamily="34" charset="-122"/>
+                <a:cs typeface="Verdana" pitchFamily="34" charset="-120"/>
               </a:rPr>
               <a:t>Not too much.</a:t>
             </a:r>
@@ -10106,7 +10106,7 @@
             <a:r>
               <a:rPr lang="en-US" sz="2800" b="1" dirty="0">
                 <a:solidFill>
-                  <a:srgbClr val="00B4D8"/>
+                  <a:srgbClr val="635BFF"/>
                 </a:solidFill>
                 <a:latin typeface="Georgia" pitchFamily="34" charset="0"/>
                 <a:ea typeface="Georgia" pitchFamily="34" charset="-122"/>
@@ -10145,11 +10145,11 @@
             <a:r>
               <a:rPr lang="en-US" sz="2200" dirty="0">
                 <a:solidFill>
-                  <a:srgbClr val="94A3B8"/>
-                </a:solidFill>
-                <a:latin typeface="Calibri" pitchFamily="34" charset="0"/>
-                <a:ea typeface="Calibri" pitchFamily="34" charset="-122"/>
-                <a:cs typeface="Calibri" pitchFamily="34" charset="-120"/>
+                  <a:srgbClr val="8B95A5"/>
+                </a:solidFill>
+                <a:latin typeface="Verdana" pitchFamily="34" charset="0"/>
+                <a:ea typeface="Verdana" pitchFamily="34" charset="-122"/>
+                <a:cs typeface="Verdana" pitchFamily="34" charset="-120"/>
               </a:rPr>
               <a:t>Every failure</a:t>
             </a:r>
@@ -10162,11 +10162,11 @@
             <a:r>
               <a:rPr lang="en-US" sz="2200" dirty="0">
                 <a:solidFill>
-                  <a:srgbClr val="94A3B8"/>
-                </a:solidFill>
-                <a:latin typeface="Calibri" pitchFamily="34" charset="0"/>
-                <a:ea typeface="Calibri" pitchFamily="34" charset="-122"/>
-                <a:cs typeface="Calibri" pitchFamily="34" charset="-120"/>
+                  <a:srgbClr val="8B95A5"/>
+                </a:solidFill>
+                <a:latin typeface="Verdana" pitchFamily="34" charset="0"/>
+                <a:ea typeface="Verdana" pitchFamily="34" charset="-122"/>
+                <a:cs typeface="Verdana" pitchFamily="34" charset="-120"/>
               </a:rPr>
               <a:t>must be visible.</a:t>
             </a:r>
@@ -10201,7 +10201,7 @@
             <a:r>
               <a:rPr lang="en-US" sz="2800" b="1" dirty="0">
                 <a:solidFill>
-                  <a:srgbClr val="00B4D8"/>
+                  <a:srgbClr val="635BFF"/>
                 </a:solidFill>
                 <a:latin typeface="Georgia" pitchFamily="34" charset="0"/>
                 <a:ea typeface="Georgia" pitchFamily="34" charset="-122"/>
@@ -10240,11 +10240,11 @@
             <a:r>
               <a:rPr lang="en-US" sz="2200" dirty="0">
                 <a:solidFill>
-                  <a:srgbClr val="94A3B8"/>
-                </a:solidFill>
-                <a:latin typeface="Calibri" pitchFamily="34" charset="0"/>
-                <a:ea typeface="Calibri" pitchFamily="34" charset="-122"/>
-                <a:cs typeface="Calibri" pitchFamily="34" charset="-120"/>
+                  <a:srgbClr val="8B95A5"/>
+                </a:solidFill>
+                <a:latin typeface="Verdana" pitchFamily="34" charset="0"/>
+                <a:ea typeface="Verdana" pitchFamily="34" charset="-122"/>
+                <a:cs typeface="Verdana" pitchFamily="34" charset="-120"/>
               </a:rPr>
               <a:t>Agent verifies.</a:t>
             </a:r>
@@ -10257,11 +10257,11 @@
             <a:r>
               <a:rPr lang="en-US" sz="2200" dirty="0">
                 <a:solidFill>
-                  <a:srgbClr val="94A3B8"/>
-                </a:solidFill>
-                <a:latin typeface="Calibri" pitchFamily="34" charset="0"/>
-                <a:ea typeface="Calibri" pitchFamily="34" charset="-122"/>
-                <a:cs typeface="Calibri" pitchFamily="34" charset="-120"/>
+                  <a:srgbClr val="8B95A5"/>
+                </a:solidFill>
+                <a:latin typeface="Verdana" pitchFamily="34" charset="0"/>
+                <a:ea typeface="Verdana" pitchFamily="34" charset="-122"/>
+                <a:cs typeface="Verdana" pitchFamily="34" charset="-120"/>
               </a:rPr>
               <a:t>Then you verify.</a:t>
             </a:r>
@@ -10283,7 +10283,7 @@
     <p:bg>
       <p:bgPr>
         <a:solidFill>
-          <a:srgbClr val="0F0F1A"/>
+          <a:srgbClr val="0A2540"/>
         </a:solidFill>
       </p:bgPr>
     </p:bg>
@@ -10316,7 +10316,7 @@
             <a:avLst/>
           </a:prstGeom>
           <a:solidFill>
-            <a:srgbClr val="00B4D8">
+            <a:srgbClr val="635BFF">
               <a:alpha val="4000"/>
             </a:srgbClr>
           </a:solidFill>
@@ -10340,11 +10340,11 @@
             </a:avLst>
           </a:prstGeom>
           <a:solidFill>
-            <a:srgbClr val="0F0F1A"/>
+            <a:srgbClr val="0A2540"/>
           </a:solidFill>
           <a:ln w="25400">
             <a:solidFill>
-              <a:srgbClr val="00B4D8"/>
+              <a:srgbClr val="635BFF"/>
             </a:solidFill>
             <a:prstDash val="solid"/>
           </a:ln>
@@ -10379,9 +10379,9 @@
                 <a:solidFill>
                   <a:srgbClr val="FFFFFF"/>
                 </a:solidFill>
-                <a:latin typeface="Calibri" pitchFamily="34" charset="0"/>
-                <a:ea typeface="Calibri" pitchFamily="34" charset="-122"/>
-                <a:cs typeface="Calibri" pitchFamily="34" charset="-120"/>
+                <a:latin typeface="Verdana" pitchFamily="34" charset="0"/>
+                <a:ea typeface="Verdana" pitchFamily="34" charset="-122"/>
+                <a:cs typeface="Verdana" pitchFamily="34" charset="-120"/>
               </a:rPr>
               <a:t>Brainstorm</a:t>
             </a:r>
@@ -10416,11 +10416,11 @@
             <a:r>
               <a:rPr lang="en-US" sz="2800" b="1" dirty="0">
                 <a:solidFill>
-                  <a:srgbClr val="00B4D8"/>
-                </a:solidFill>
-                <a:latin typeface="Calibri" pitchFamily="34" charset="0"/>
-                <a:ea typeface="Calibri" pitchFamily="34" charset="-122"/>
-                <a:cs typeface="Calibri" pitchFamily="34" charset="-120"/>
+                  <a:srgbClr val="635BFF"/>
+                </a:solidFill>
+                <a:latin typeface="Verdana" pitchFamily="34" charset="0"/>
+                <a:ea typeface="Verdana" pitchFamily="34" charset="-122"/>
+                <a:cs typeface="Verdana" pitchFamily="34" charset="-120"/>
               </a:rPr>
               <a:t>→</a:t>
             </a:r>
@@ -10445,11 +10445,11 @@
             </a:avLst>
           </a:prstGeom>
           <a:solidFill>
-            <a:srgbClr val="0F0F1A"/>
+            <a:srgbClr val="0A2540"/>
           </a:solidFill>
           <a:ln w="25400">
             <a:solidFill>
-              <a:srgbClr val="00B4D8"/>
+              <a:srgbClr val="635BFF"/>
             </a:solidFill>
             <a:prstDash val="solid"/>
           </a:ln>
@@ -10484,9 +10484,9 @@
                 <a:solidFill>
                   <a:srgbClr val="FFFFFF"/>
                 </a:solidFill>
-                <a:latin typeface="Calibri" pitchFamily="34" charset="0"/>
-                <a:ea typeface="Calibri" pitchFamily="34" charset="-122"/>
-                <a:cs typeface="Calibri" pitchFamily="34" charset="-120"/>
+                <a:latin typeface="Verdana" pitchFamily="34" charset="0"/>
+                <a:ea typeface="Verdana" pitchFamily="34" charset="-122"/>
+                <a:cs typeface="Verdana" pitchFamily="34" charset="-120"/>
               </a:rPr>
               <a:t>Plan</a:t>
             </a:r>
@@ -10521,11 +10521,11 @@
             <a:r>
               <a:rPr lang="en-US" sz="2800" b="1" dirty="0">
                 <a:solidFill>
-                  <a:srgbClr val="00B4D8"/>
-                </a:solidFill>
-                <a:latin typeface="Calibri" pitchFamily="34" charset="0"/>
-                <a:ea typeface="Calibri" pitchFamily="34" charset="-122"/>
-                <a:cs typeface="Calibri" pitchFamily="34" charset="-120"/>
+                  <a:srgbClr val="635BFF"/>
+                </a:solidFill>
+                <a:latin typeface="Verdana" pitchFamily="34" charset="0"/>
+                <a:ea typeface="Verdana" pitchFamily="34" charset="-122"/>
+                <a:cs typeface="Verdana" pitchFamily="34" charset="-120"/>
               </a:rPr>
               <a:t>→</a:t>
             </a:r>
@@ -10550,11 +10550,11 @@
             </a:avLst>
           </a:prstGeom>
           <a:solidFill>
-            <a:srgbClr val="0F0F1A"/>
+            <a:srgbClr val="0A2540"/>
           </a:solidFill>
           <a:ln w="25400">
             <a:solidFill>
-              <a:srgbClr val="00B4D8"/>
+              <a:srgbClr val="635BFF"/>
             </a:solidFill>
             <a:prstDash val="solid"/>
           </a:ln>
@@ -10589,9 +10589,9 @@
                 <a:solidFill>
                   <a:srgbClr val="FFFFFF"/>
                 </a:solidFill>
-                <a:latin typeface="Calibri" pitchFamily="34" charset="0"/>
-                <a:ea typeface="Calibri" pitchFamily="34" charset="-122"/>
-                <a:cs typeface="Calibri" pitchFamily="34" charset="-120"/>
+                <a:latin typeface="Verdana" pitchFamily="34" charset="0"/>
+                <a:ea typeface="Verdana" pitchFamily="34" charset="-122"/>
+                <a:cs typeface="Verdana" pitchFamily="34" charset="-120"/>
               </a:rPr>
               <a:t>Implement</a:t>
             </a:r>
@@ -10626,11 +10626,11 @@
             <a:r>
               <a:rPr lang="en-US" sz="2800" b="1" dirty="0">
                 <a:solidFill>
-                  <a:srgbClr val="00B4D8"/>
-                </a:solidFill>
-                <a:latin typeface="Calibri" pitchFamily="34" charset="0"/>
-                <a:ea typeface="Calibri" pitchFamily="34" charset="-122"/>
-                <a:cs typeface="Calibri" pitchFamily="34" charset="-120"/>
+                  <a:srgbClr val="635BFF"/>
+                </a:solidFill>
+                <a:latin typeface="Verdana" pitchFamily="34" charset="0"/>
+                <a:ea typeface="Verdana" pitchFamily="34" charset="-122"/>
+                <a:cs typeface="Verdana" pitchFamily="34" charset="-120"/>
               </a:rPr>
               <a:t>→</a:t>
             </a:r>
@@ -10655,11 +10655,11 @@
             </a:avLst>
           </a:prstGeom>
           <a:solidFill>
-            <a:srgbClr val="0F0F1A"/>
+            <a:srgbClr val="0A2540"/>
           </a:solidFill>
           <a:ln w="25400">
             <a:solidFill>
-              <a:srgbClr val="00B4D8"/>
+              <a:srgbClr val="635BFF"/>
             </a:solidFill>
             <a:prstDash val="solid"/>
           </a:ln>
@@ -10694,9 +10694,9 @@
                 <a:solidFill>
                   <a:srgbClr val="FFFFFF"/>
                 </a:solidFill>
-                <a:latin typeface="Calibri" pitchFamily="34" charset="0"/>
-                <a:ea typeface="Calibri" pitchFamily="34" charset="-122"/>
-                <a:cs typeface="Calibri" pitchFamily="34" charset="-120"/>
+                <a:latin typeface="Verdana" pitchFamily="34" charset="0"/>
+                <a:ea typeface="Verdana" pitchFamily="34" charset="-122"/>
+                <a:cs typeface="Verdana" pitchFamily="34" charset="-120"/>
               </a:rPr>
               <a:t>Review</a:t>
             </a:r>
@@ -10731,11 +10731,11 @@
             <a:r>
               <a:rPr lang="en-US" sz="2400" dirty="0">
                 <a:solidFill>
-                  <a:srgbClr val="94A3B8"/>
-                </a:solidFill>
-                <a:latin typeface="Calibri" pitchFamily="34" charset="0"/>
-                <a:ea typeface="Calibri" pitchFamily="34" charset="-122"/>
-                <a:cs typeface="Calibri" pitchFamily="34" charset="-120"/>
+                  <a:srgbClr val="8B95A5"/>
+                </a:solidFill>
+                <a:latin typeface="Verdana" pitchFamily="34" charset="0"/>
+                <a:ea typeface="Verdana" pitchFamily="34" charset="-122"/>
+                <a:cs typeface="Verdana" pitchFamily="34" charset="-120"/>
               </a:rPr>
               <a:t>Each stage produces an artifact.</a:t>
             </a:r>
@@ -10748,11 +10748,11 @@
             <a:r>
               <a:rPr lang="en-US" sz="2400" dirty="0">
                 <a:solidFill>
-                  <a:srgbClr val="94A3B8"/>
-                </a:solidFill>
-                <a:latin typeface="Calibri" pitchFamily="34" charset="0"/>
-                <a:ea typeface="Calibri" pitchFamily="34" charset="-122"/>
-                <a:cs typeface="Calibri" pitchFamily="34" charset="-120"/>
+                  <a:srgbClr val="8B95A5"/>
+                </a:solidFill>
+                <a:latin typeface="Verdana" pitchFamily="34" charset="0"/>
+                <a:ea typeface="Verdana" pitchFamily="34" charset="-122"/>
+                <a:cs typeface="Verdana" pitchFamily="34" charset="-120"/>
               </a:rPr>
               <a:t>Each artifact gets validated.</a:t>
             </a:r>
@@ -10774,7 +10774,7 @@
     <p:bg>
       <p:bgPr>
         <a:solidFill>
-          <a:srgbClr val="0F0F1A"/>
+          <a:srgbClr val="0A2540"/>
         </a:solidFill>
       </p:bgPr>
     </p:bg>
@@ -10807,7 +10807,7 @@
             <a:avLst/>
           </a:prstGeom>
           <a:solidFill>
-            <a:srgbClr val="00B4D8">
+            <a:srgbClr val="635BFF">
               <a:alpha val="4000"/>
             </a:srgbClr>
           </a:solidFill>
@@ -10841,7 +10841,7 @@
             <a:r>
               <a:rPr lang="en-US" sz="3600" b="1" dirty="0">
                 <a:solidFill>
-                  <a:srgbClr val="00B4D8"/>
+                  <a:srgbClr val="635BFF"/>
                 </a:solidFill>
                 <a:latin typeface="Georgia" pitchFamily="34" charset="0"/>
                 <a:ea typeface="Georgia" pitchFamily="34" charset="-122"/>
@@ -10880,11 +10880,11 @@
             <a:r>
               <a:rPr lang="en-US" sz="2200" dirty="0">
                 <a:solidFill>
-                  <a:srgbClr val="94A3B8"/>
-                </a:solidFill>
-                <a:latin typeface="Calibri" pitchFamily="34" charset="0"/>
-                <a:ea typeface="Calibri" pitchFamily="34" charset="-122"/>
-                <a:cs typeface="Calibri" pitchFamily="34" charset="-120"/>
+                  <a:srgbClr val="8B95A5"/>
+                </a:solidFill>
+                <a:latin typeface="Verdana" pitchFamily="34" charset="0"/>
+                <a:ea typeface="Verdana" pitchFamily="34" charset="-122"/>
+                <a:cs typeface="Verdana" pitchFamily="34" charset="-120"/>
               </a:rPr>
               <a:t>Runs tests</a:t>
             </a:r>
@@ -10897,11 +10897,11 @@
             <a:r>
               <a:rPr lang="en-US" sz="2200" dirty="0">
                 <a:solidFill>
-                  <a:srgbClr val="94A3B8"/>
-                </a:solidFill>
-                <a:latin typeface="Calibri" pitchFamily="34" charset="0"/>
-                <a:ea typeface="Calibri" pitchFamily="34" charset="-122"/>
-                <a:cs typeface="Calibri" pitchFamily="34" charset="-120"/>
+                  <a:srgbClr val="8B95A5"/>
+                </a:solidFill>
+                <a:latin typeface="Verdana" pitchFamily="34" charset="0"/>
+                <a:ea typeface="Verdana" pitchFamily="34" charset="-122"/>
+                <a:cs typeface="Verdana" pitchFamily="34" charset="-120"/>
               </a:rPr>
               <a:t>Checks linting</a:t>
             </a:r>
@@ -10914,11 +10914,11 @@
             <a:r>
               <a:rPr lang="en-US" sz="2200" dirty="0">
                 <a:solidFill>
-                  <a:srgbClr val="94A3B8"/>
-                </a:solidFill>
-                <a:latin typeface="Calibri" pitchFamily="34" charset="0"/>
-                <a:ea typeface="Calibri" pitchFamily="34" charset="-122"/>
-                <a:cs typeface="Calibri" pitchFamily="34" charset="-120"/>
+                  <a:srgbClr val="8B95A5"/>
+                </a:solidFill>
+                <a:latin typeface="Verdana" pitchFamily="34" charset="0"/>
+                <a:ea typeface="Verdana" pitchFamily="34" charset="-122"/>
+                <a:cs typeface="Verdana" pitchFamily="34" charset="-120"/>
               </a:rPr>
               <a:t>Iterates until passing</a:t>
             </a:r>
@@ -10943,7 +10943,7 @@
           <a:noFill/>
           <a:ln w="12700">
             <a:solidFill>
-              <a:srgbClr val="00B4D8"/>
+              <a:srgbClr val="635BFF"/>
             </a:solidFill>
             <a:prstDash val="solid"/>
           </a:ln>
@@ -11015,11 +11015,11 @@
             <a:r>
               <a:rPr lang="en-US" sz="2200" dirty="0">
                 <a:solidFill>
-                  <a:srgbClr val="94A3B8"/>
-                </a:solidFill>
-                <a:latin typeface="Calibri" pitchFamily="34" charset="0"/>
-                <a:ea typeface="Calibri" pitchFamily="34" charset="-122"/>
-                <a:cs typeface="Calibri" pitchFamily="34" charset="-120"/>
+                  <a:srgbClr val="8B95A5"/>
+                </a:solidFill>
+                <a:latin typeface="Verdana" pitchFamily="34" charset="0"/>
+                <a:ea typeface="Verdana" pitchFamily="34" charset="-122"/>
+                <a:cs typeface="Verdana" pitchFamily="34" charset="-120"/>
               </a:rPr>
               <a:t>Solves the problem?</a:t>
             </a:r>
@@ -11032,11 +11032,11 @@
             <a:r>
               <a:rPr lang="en-US" sz="2200" dirty="0">
                 <a:solidFill>
-                  <a:srgbClr val="94A3B8"/>
-                </a:solidFill>
-                <a:latin typeface="Calibri" pitchFamily="34" charset="0"/>
-                <a:ea typeface="Calibri" pitchFamily="34" charset="-122"/>
-                <a:cs typeface="Calibri" pitchFamily="34" charset="-120"/>
+                  <a:srgbClr val="8B95A5"/>
+                </a:solidFill>
+                <a:latin typeface="Verdana" pitchFamily="34" charset="0"/>
+                <a:ea typeface="Verdana" pitchFamily="34" charset="-122"/>
+                <a:cs typeface="Verdana" pitchFamily="34" charset="-120"/>
               </a:rPr>
               <a:t>Meets requirements?</a:t>
             </a:r>
@@ -11049,11 +11049,11 @@
             <a:r>
               <a:rPr lang="en-US" sz="2200" dirty="0">
                 <a:solidFill>
-                  <a:srgbClr val="94A3B8"/>
-                </a:solidFill>
-                <a:latin typeface="Calibri" pitchFamily="34" charset="0"/>
-                <a:ea typeface="Calibri" pitchFamily="34" charset="-122"/>
-                <a:cs typeface="Calibri" pitchFamily="34" charset="-120"/>
+                  <a:srgbClr val="8B95A5"/>
+                </a:solidFill>
+                <a:latin typeface="Verdana" pitchFamily="34" charset="0"/>
+                <a:ea typeface="Verdana" pitchFamily="34" charset="-122"/>
+                <a:cs typeface="Verdana" pitchFamily="34" charset="-120"/>
               </a:rPr>
               <a:t>Architecturally sound?</a:t>
             </a:r>
@@ -11075,7 +11075,7 @@
     <p:bg>
       <p:bgPr>
         <a:solidFill>
-          <a:srgbClr val="0F0F1A"/>
+          <a:srgbClr val="0A2540"/>
         </a:solidFill>
       </p:bgPr>
     </p:bg>
@@ -11108,7 +11108,7 @@
             <a:avLst/>
           </a:prstGeom>
           <a:solidFill>
-            <a:srgbClr val="00B4D8">
+            <a:srgbClr val="635BFF">
               <a:alpha val="4000"/>
             </a:srgbClr>
           </a:solidFill>
@@ -11181,11 +11181,11 @@
             <a:r>
               <a:rPr lang="en-US" sz="2800" i="1" dirty="0">
                 <a:solidFill>
-                  <a:srgbClr val="00B4D8"/>
-                </a:solidFill>
-                <a:latin typeface="Calibri" pitchFamily="34" charset="0"/>
-                <a:ea typeface="Calibri" pitchFamily="34" charset="-122"/>
-                <a:cs typeface="Calibri" pitchFamily="34" charset="-120"/>
+                  <a:srgbClr val="635BFF"/>
+                </a:solidFill>
+                <a:latin typeface="Verdana" pitchFamily="34" charset="0"/>
+                <a:ea typeface="Verdana" pitchFamily="34" charset="-122"/>
+                <a:cs typeface="Verdana" pitchFamily="34" charset="-120"/>
               </a:rPr>
               <a:t>The foundation</a:t>
             </a:r>
@@ -11207,7 +11207,7 @@
     <p:bg>
       <p:bgPr>
         <a:solidFill>
-          <a:srgbClr val="0F0F1A"/>
+          <a:srgbClr val="0A2540"/>
         </a:solidFill>
       </p:bgPr>
     </p:bg>
@@ -11240,7 +11240,7 @@
             <a:avLst/>
           </a:prstGeom>
           <a:solidFill>
-            <a:srgbClr val="00B4D8">
+            <a:srgbClr val="635BFF">
               <a:alpha val="4000"/>
             </a:srgbClr>
           </a:solidFill>
@@ -11313,11 +11313,11 @@
             <a:r>
               <a:rPr lang="en-US" sz="2800" dirty="0">
                 <a:solidFill>
-                  <a:srgbClr val="94A3B8"/>
-                </a:solidFill>
-                <a:latin typeface="Calibri" pitchFamily="34" charset="0"/>
-                <a:ea typeface="Calibri" pitchFamily="34" charset="-122"/>
-                <a:cs typeface="Calibri" pitchFamily="34" charset="-120"/>
+                  <a:srgbClr val="8B95A5"/>
+                </a:solidFill>
+                <a:latin typeface="Verdana" pitchFamily="34" charset="0"/>
+                <a:ea typeface="Verdana" pitchFamily="34" charset="-122"/>
+                <a:cs typeface="Verdana" pitchFamily="34" charset="-120"/>
               </a:rPr>
               <a:t>Live docs at prompt time.</a:t>
             </a:r>
@@ -11330,11 +11330,11 @@
             <a:r>
               <a:rPr lang="en-US" sz="2800" dirty="0">
                 <a:solidFill>
-                  <a:srgbClr val="94A3B8"/>
-                </a:solidFill>
-                <a:latin typeface="Calibri" pitchFamily="34" charset="0"/>
-                <a:ea typeface="Calibri" pitchFamily="34" charset="-122"/>
-                <a:cs typeface="Calibri" pitchFamily="34" charset="-120"/>
+                  <a:srgbClr val="8B95A5"/>
+                </a:solidFill>
+                <a:latin typeface="Verdana" pitchFamily="34" charset="0"/>
+                <a:ea typeface="Verdana" pitchFamily="34" charset="-122"/>
+                <a:cs typeface="Verdana" pitchFamily="34" charset="-120"/>
               </a:rPr>
               <a:t>No hallucinated APIs.</a:t>
             </a:r>
@@ -11369,11 +11369,11 @@
             <a:r>
               <a:rPr lang="en-US" sz="1600" i="1" dirty="0">
                 <a:solidFill>
-                  <a:srgbClr val="00B4D8"/>
-                </a:solidFill>
-                <a:latin typeface="Calibri" pitchFamily="34" charset="0"/>
-                <a:ea typeface="Calibri" pitchFamily="34" charset="-122"/>
-                <a:cs typeface="Calibri" pitchFamily="34" charset="-120"/>
+                  <a:srgbClr val="635BFF"/>
+                </a:solidFill>
+                <a:latin typeface="Verdana" pitchFamily="34" charset="0"/>
+                <a:ea typeface="Verdana" pitchFamily="34" charset="-122"/>
+                <a:cs typeface="Verdana" pitchFamily="34" charset="-120"/>
               </a:rPr>
               <a:t>perfect context</a:t>
             </a:r>
@@ -11395,7 +11395,7 @@
     <p:bg>
       <p:bgPr>
         <a:solidFill>
-          <a:srgbClr val="0F0F1A"/>
+          <a:srgbClr val="0A2540"/>
         </a:solidFill>
       </p:bgPr>
     </p:bg>
@@ -11428,7 +11428,7 @@
             <a:avLst/>
           </a:prstGeom>
           <a:solidFill>
-            <a:srgbClr val="00B4D8">
+            <a:srgbClr val="635BFF">
               <a:alpha val="4000"/>
             </a:srgbClr>
           </a:solidFill>
@@ -11501,11 +11501,11 @@
             <a:r>
               <a:rPr lang="en-US" sz="2800" dirty="0">
                 <a:solidFill>
-                  <a:srgbClr val="94A3B8"/>
-                </a:solidFill>
-                <a:latin typeface="Calibri" pitchFamily="34" charset="0"/>
-                <a:ea typeface="Calibri" pitchFamily="34" charset="-122"/>
-                <a:cs typeface="Calibri" pitchFamily="34" charset="-120"/>
+                  <a:srgbClr val="8B95A5"/>
+                </a:solidFill>
+                <a:latin typeface="Verdana" pitchFamily="34" charset="0"/>
+                <a:ea typeface="Verdana" pitchFamily="34" charset="-122"/>
+                <a:cs typeface="Verdana" pitchFamily="34" charset="-120"/>
               </a:rPr>
               <a:t>Compiler-level code navigation.</a:t>
             </a:r>
@@ -11518,11 +11518,11 @@
             <a:r>
               <a:rPr lang="en-US" sz="2800" dirty="0">
                 <a:solidFill>
-                  <a:srgbClr val="94A3B8"/>
-                </a:solidFill>
-                <a:latin typeface="Calibri" pitchFamily="34" charset="0"/>
-                <a:ea typeface="Calibri" pitchFamily="34" charset="-122"/>
-                <a:cs typeface="Calibri" pitchFamily="34" charset="-120"/>
+                  <a:srgbClr val="8B95A5"/>
+                </a:solidFill>
+                <a:latin typeface="Verdana" pitchFamily="34" charset="0"/>
+                <a:ea typeface="Verdana" pitchFamily="34" charset="-122"/>
+                <a:cs typeface="Verdana" pitchFamily="34" charset="-120"/>
               </a:rPr>
               <a:t>Not grep.</a:t>
             </a:r>
@@ -11557,11 +11557,11 @@
             <a:r>
               <a:rPr lang="en-US" sz="1600" i="1" dirty="0">
                 <a:solidFill>
-                  <a:srgbClr val="00B4D8"/>
-                </a:solidFill>
-                <a:latin typeface="Calibri" pitchFamily="34" charset="0"/>
-                <a:ea typeface="Calibri" pitchFamily="34" charset="-122"/>
-                <a:cs typeface="Calibri" pitchFamily="34" charset="-120"/>
+                  <a:srgbClr val="635BFF"/>
+                </a:solidFill>
+                <a:latin typeface="Verdana" pitchFamily="34" charset="0"/>
+                <a:ea typeface="Verdana" pitchFamily="34" charset="-122"/>
+                <a:cs typeface="Verdana" pitchFamily="34" charset="-120"/>
               </a:rPr>
               <a:t>perfect context</a:t>
             </a:r>
@@ -11583,7 +11583,7 @@
     <p:bg>
       <p:bgPr>
         <a:solidFill>
-          <a:srgbClr val="0F0F1A"/>
+          <a:srgbClr val="0A2540"/>
         </a:solidFill>
       </p:bgPr>
     </p:bg>
@@ -11616,7 +11616,7 @@
             <a:avLst/>
           </a:prstGeom>
           <a:solidFill>
-            <a:srgbClr val="00B4D8">
+            <a:srgbClr val="635BFF">
               <a:alpha val="4000"/>
             </a:srgbClr>
           </a:solidFill>
@@ -11689,11 +11689,11 @@
             <a:r>
               <a:rPr lang="en-US" sz="2800" dirty="0">
                 <a:solidFill>
-                  <a:srgbClr val="94A3B8"/>
-                </a:solidFill>
-                <a:latin typeface="Calibri" pitchFamily="34" charset="0"/>
-                <a:ea typeface="Calibri" pitchFamily="34" charset="-122"/>
-                <a:cs typeface="Calibri" pitchFamily="34" charset="-120"/>
+                  <a:srgbClr val="8B95A5"/>
+                </a:solidFill>
+                <a:latin typeface="Verdana" pitchFamily="34" charset="0"/>
+                <a:ea typeface="Verdana" pitchFamily="34" charset="-122"/>
+                <a:cs typeface="Verdana" pitchFamily="34" charset="-120"/>
               </a:rPr>
               <a:t>Reliable web access.</a:t>
             </a:r>
@@ -11706,11 +11706,11 @@
             <a:r>
               <a:rPr lang="en-US" sz="2800" dirty="0">
                 <a:solidFill>
-                  <a:srgbClr val="94A3B8"/>
-                </a:solidFill>
-                <a:latin typeface="Calibri" pitchFamily="34" charset="0"/>
-                <a:ea typeface="Calibri" pitchFamily="34" charset="-122"/>
-                <a:cs typeface="Calibri" pitchFamily="34" charset="-120"/>
+                  <a:srgbClr val="8B95A5"/>
+                </a:solidFill>
+                <a:latin typeface="Verdana" pitchFamily="34" charset="0"/>
+                <a:ea typeface="Verdana" pitchFamily="34" charset="-122"/>
+                <a:cs typeface="Verdana" pitchFamily="34" charset="-120"/>
               </a:rPr>
               <a:t>No silent failures.</a:t>
             </a:r>
@@ -11745,11 +11745,11 @@
             <a:r>
               <a:rPr lang="en-US" sz="1600" i="1" dirty="0">
                 <a:solidFill>
-                  <a:srgbClr val="00B4D8"/>
-                </a:solidFill>
-                <a:latin typeface="Calibri" pitchFamily="34" charset="0"/>
-                <a:ea typeface="Calibri" pitchFamily="34" charset="-122"/>
-                <a:cs typeface="Calibri" pitchFamily="34" charset="-120"/>
+                  <a:srgbClr val="635BFF"/>
+                </a:solidFill>
+                <a:latin typeface="Verdana" pitchFamily="34" charset="0"/>
+                <a:ea typeface="Verdana" pitchFamily="34" charset="-122"/>
+                <a:cs typeface="Verdana" pitchFamily="34" charset="-120"/>
               </a:rPr>
               <a:t>no hidden failures</a:t>
             </a:r>
@@ -11771,7 +11771,7 @@
     <p:bg>
       <p:bgPr>
         <a:solidFill>
-          <a:srgbClr val="0F0F1A"/>
+          <a:srgbClr val="0A2540"/>
         </a:solidFill>
       </p:bgPr>
     </p:bg>
@@ -11804,7 +11804,7 @@
             <a:avLst/>
           </a:prstGeom>
           <a:solidFill>
-            <a:srgbClr val="00B4D8">
+            <a:srgbClr val="635BFF">
               <a:alpha val="4000"/>
             </a:srgbClr>
           </a:solidFill>
@@ -11877,11 +11877,11 @@
             <a:r>
               <a:rPr lang="en-US" sz="2800" dirty="0">
                 <a:solidFill>
-                  <a:srgbClr val="94A3B8"/>
-                </a:solidFill>
-                <a:latin typeface="Calibri" pitchFamily="34" charset="0"/>
-                <a:ea typeface="Calibri" pitchFamily="34" charset="-122"/>
-                <a:cs typeface="Calibri" pitchFamily="34" charset="-120"/>
+                  <a:srgbClr val="8B95A5"/>
+                </a:solidFill>
+                <a:latin typeface="Verdana" pitchFamily="34" charset="0"/>
+                <a:ea typeface="Verdana" pitchFamily="34" charset="-122"/>
+                <a:cs typeface="Verdana" pitchFamily="34" charset="-120"/>
               </a:rPr>
               <a:t>of GitHub code is now AI-generated</a:t>
             </a:r>
@@ -11916,11 +11916,11 @@
             <a:r>
               <a:rPr lang="en-US" sz="1100" u="sng" dirty="0">
                 <a:solidFill>
-                  <a:srgbClr val="94A3B8"/>
-                </a:solidFill>
-                <a:latin typeface="Calibri" pitchFamily="34" charset="0"/>
-                <a:ea typeface="Calibri" pitchFamily="34" charset="-122"/>
-                <a:cs typeface="Calibri" pitchFamily="34" charset="-120"/>
+                  <a:srgbClr val="8B95A5"/>
+                </a:solidFill>
+                <a:latin typeface="Verdana" pitchFamily="34" charset="0"/>
+                <a:ea typeface="Verdana" pitchFamily="34" charset="-122"/>
+                <a:cs typeface="Verdana" pitchFamily="34" charset="-120"/>
                 <a:hlinkClick r:id="rId1" invalidUrl="" action="" tgtFrame="" tooltip="" history="1" highlightClick="0" endSnd="0">
                   <a:extLst>
                     <a:ext uri="{A12FA001-AC4F-418D-AE19-62706E023703}">
@@ -11949,7 +11949,7 @@
     <p:bg>
       <p:bgPr>
         <a:solidFill>
-          <a:srgbClr val="0F0F1A"/>
+          <a:srgbClr val="0A2540"/>
         </a:solidFill>
       </p:bgPr>
     </p:bg>
@@ -11982,7 +11982,7 @@
             <a:avLst/>
           </a:prstGeom>
           <a:solidFill>
-            <a:srgbClr val="00B4D8">
+            <a:srgbClr val="635BFF">
               <a:alpha val="4000"/>
             </a:srgbClr>
           </a:solidFill>
@@ -12055,11 +12055,11 @@
             <a:r>
               <a:rPr lang="en-US" sz="2800" dirty="0">
                 <a:solidFill>
-                  <a:srgbClr val="94A3B8"/>
-                </a:solidFill>
-                <a:latin typeface="Calibri" pitchFamily="34" charset="0"/>
-                <a:ea typeface="Calibri" pitchFamily="34" charset="-122"/>
-                <a:cs typeface="Calibri" pitchFamily="34" charset="-120"/>
+                  <a:srgbClr val="8B95A5"/>
+                </a:solidFill>
+                <a:latin typeface="Verdana" pitchFamily="34" charset="0"/>
+                <a:ea typeface="Verdana" pitchFamily="34" charset="-122"/>
+                <a:cs typeface="Verdana" pitchFamily="34" charset="-120"/>
               </a:rPr>
               <a:t>TDD. Systematic debugging.</a:t>
             </a:r>
@@ -12072,11 +12072,11 @@
             <a:r>
               <a:rPr lang="en-US" sz="2800" dirty="0">
                 <a:solidFill>
-                  <a:srgbClr val="94A3B8"/>
-                </a:solidFill>
-                <a:latin typeface="Calibri" pitchFamily="34" charset="0"/>
-                <a:ea typeface="Calibri" pitchFamily="34" charset="-122"/>
-                <a:cs typeface="Calibri" pitchFamily="34" charset="-120"/>
+                  <a:srgbClr val="8B95A5"/>
+                </a:solidFill>
+                <a:latin typeface="Verdana" pitchFamily="34" charset="0"/>
+                <a:ea typeface="Verdana" pitchFamily="34" charset="-122"/>
+                <a:cs typeface="Verdana" pitchFamily="34" charset="-120"/>
               </a:rPr>
               <a:t>Verification before completion.</a:t>
             </a:r>
@@ -12111,11 +12111,11 @@
             <a:r>
               <a:rPr lang="en-US" sz="1600" i="1" dirty="0">
                 <a:solidFill>
-                  <a:srgbClr val="00B4D8"/>
-                </a:solidFill>
-                <a:latin typeface="Calibri" pitchFamily="34" charset="0"/>
-                <a:ea typeface="Calibri" pitchFamily="34" charset="-122"/>
-                <a:cs typeface="Calibri" pitchFamily="34" charset="-120"/>
+                  <a:srgbClr val="635BFF"/>
+                </a:solidFill>
+                <a:latin typeface="Verdana" pitchFamily="34" charset="0"/>
+                <a:ea typeface="Verdana" pitchFamily="34" charset="-122"/>
+                <a:cs typeface="Verdana" pitchFamily="34" charset="-120"/>
               </a:rPr>
               <a:t>gated workflow</a:t>
             </a:r>
@@ -12137,7 +12137,7 @@
     <p:bg>
       <p:bgPr>
         <a:solidFill>
-          <a:srgbClr val="0F0F1A"/>
+          <a:srgbClr val="0A2540"/>
         </a:solidFill>
       </p:bgPr>
     </p:bg>
@@ -12170,7 +12170,7 @@
             <a:avLst/>
           </a:prstGeom>
           <a:solidFill>
-            <a:srgbClr val="00B4D8">
+            <a:srgbClr val="635BFF">
               <a:alpha val="4000"/>
             </a:srgbClr>
           </a:solidFill>
@@ -12247,7 +12247,7 @@
     <p:bg>
       <p:bgPr>
         <a:solidFill>
-          <a:srgbClr val="0F0F1A"/>
+          <a:srgbClr val="0A2540"/>
         </a:solidFill>
       </p:bgPr>
     </p:bg>
@@ -12280,7 +12280,7 @@
             <a:avLst/>
           </a:prstGeom>
           <a:solidFill>
-            <a:srgbClr val="00B4D8">
+            <a:srgbClr val="635BFF">
               <a:alpha val="4000"/>
             </a:srgbClr>
           </a:solidFill>
@@ -12353,11 +12353,11 @@
             <a:r>
               <a:rPr lang="en-US" sz="2800" i="1" dirty="0">
                 <a:solidFill>
-                  <a:srgbClr val="00B4D8"/>
-                </a:solidFill>
-                <a:latin typeface="Calibri" pitchFamily="34" charset="0"/>
-                <a:ea typeface="Calibri" pitchFamily="34" charset="-122"/>
-                <a:cs typeface="Calibri" pitchFamily="34" charset="-120"/>
+                  <a:srgbClr val="635BFF"/>
+                </a:solidFill>
+                <a:latin typeface="Verdana" pitchFamily="34" charset="0"/>
+                <a:ea typeface="Verdana" pitchFamily="34" charset="-122"/>
+                <a:cs typeface="Verdana" pitchFamily="34" charset="-120"/>
               </a:rPr>
               <a:t>Modular. Context-filtered. Always right.</a:t>
             </a:r>
@@ -12379,7 +12379,7 @@
     <p:bg>
       <p:bgPr>
         <a:solidFill>
-          <a:srgbClr val="0F0F1A"/>
+          <a:srgbClr val="0A2540"/>
         </a:solidFill>
       </p:bgPr>
     </p:bg>
@@ -12412,7 +12412,7 @@
             <a:avLst/>
           </a:prstGeom>
           <a:solidFill>
-            <a:srgbClr val="00B4D8">
+            <a:srgbClr val="635BFF">
               <a:alpha val="4000"/>
             </a:srgbClr>
           </a:solidFill>
@@ -12485,11 +12485,11 @@
             <a:r>
               <a:rPr lang="en-US" sz="2200" b="1" dirty="0">
                 <a:solidFill>
-                  <a:srgbClr val="00B4D8"/>
-                </a:solidFill>
-                <a:latin typeface="Calibri" pitchFamily="34" charset="0"/>
-                <a:ea typeface="Calibri" pitchFamily="34" charset="-122"/>
-                <a:cs typeface="Calibri" pitchFamily="34" charset="-120"/>
+                  <a:srgbClr val="635BFF"/>
+                </a:solidFill>
+                <a:latin typeface="Verdana" pitchFamily="34" charset="0"/>
+                <a:ea typeface="Verdana" pitchFamily="34" charset="-122"/>
+                <a:cs typeface="Verdana" pitchFamily="34" charset="-120"/>
               </a:rPr>
               <a:t>Tool usage</a:t>
             </a:r>
@@ -12502,11 +12502,11 @@
             <a:r>
               <a:rPr lang="en-US" sz="2200" dirty="0">
                 <a:solidFill>
-                  <a:srgbClr val="94A3B8"/>
-                </a:solidFill>
-                <a:latin typeface="Calibri" pitchFamily="34" charset="0"/>
-                <a:ea typeface="Calibri" pitchFamily="34" charset="-122"/>
-                <a:cs typeface="Calibri" pitchFamily="34" charset="-120"/>
+                  <a:srgbClr val="8B95A5"/>
+                </a:solidFill>
+                <a:latin typeface="Verdana" pitchFamily="34" charset="0"/>
+                <a:ea typeface="Verdana" pitchFamily="34" charset="-122"/>
+                <a:cs typeface="Verdana" pitchFamily="34" charset="-120"/>
               </a:rPr>
               <a:t>  fetch docs first, never WebFetch</a:t>
             </a:r>
@@ -12519,11 +12519,11 @@
             <a:r>
               <a:rPr lang="en-US" sz="2200" b="1" dirty="0">
                 <a:solidFill>
-                  <a:srgbClr val="00B4D8"/>
-                </a:solidFill>
-                <a:latin typeface="Calibri" pitchFamily="34" charset="0"/>
-                <a:ea typeface="Calibri" pitchFamily="34" charset="-122"/>
-                <a:cs typeface="Calibri" pitchFamily="34" charset="-120"/>
+                  <a:srgbClr val="635BFF"/>
+                </a:solidFill>
+                <a:latin typeface="Verdana" pitchFamily="34" charset="0"/>
+                <a:ea typeface="Verdana" pitchFamily="34" charset="-122"/>
+                <a:cs typeface="Verdana" pitchFamily="34" charset="-120"/>
               </a:rPr>
               <a:t>Communication</a:t>
             </a:r>
@@ -12536,11 +12536,11 @@
             <a:r>
               <a:rPr lang="en-US" sz="2200" dirty="0">
                 <a:solidFill>
-                  <a:srgbClr val="94A3B8"/>
-                </a:solidFill>
-                <a:latin typeface="Calibri" pitchFamily="34" charset="0"/>
-                <a:ea typeface="Calibri" pitchFamily="34" charset="-122"/>
-                <a:cs typeface="Calibri" pitchFamily="34" charset="-120"/>
+                  <a:srgbClr val="8B95A5"/>
+                </a:solidFill>
+                <a:latin typeface="Verdana" pitchFamily="34" charset="0"/>
+                <a:ea typeface="Verdana" pitchFamily="34" charset="-122"/>
+                <a:cs typeface="Verdana" pitchFamily="34" charset="-120"/>
               </a:rPr>
               <a:t>  radically honest, never guess</a:t>
             </a:r>
@@ -12553,11 +12553,11 @@
             <a:r>
               <a:rPr lang="en-US" sz="2200" b="1" dirty="0">
                 <a:solidFill>
-                  <a:srgbClr val="00B4D8"/>
-                </a:solidFill>
-                <a:latin typeface="Calibri" pitchFamily="34" charset="0"/>
-                <a:ea typeface="Calibri" pitchFamily="34" charset="-122"/>
-                <a:cs typeface="Calibri" pitchFamily="34" charset="-120"/>
+                  <a:srgbClr val="635BFF"/>
+                </a:solidFill>
+                <a:latin typeface="Verdana" pitchFamily="34" charset="0"/>
+                <a:ea typeface="Verdana" pitchFamily="34" charset="-122"/>
+                <a:cs typeface="Verdana" pitchFamily="34" charset="-120"/>
               </a:rPr>
               <a:t>Coding</a:t>
             </a:r>
@@ -12570,11 +12570,11 @@
             <a:r>
               <a:rPr lang="en-US" sz="2200" dirty="0">
                 <a:solidFill>
-                  <a:srgbClr val="94A3B8"/>
-                </a:solidFill>
-                <a:latin typeface="Calibri" pitchFamily="34" charset="0"/>
-                <a:ea typeface="Calibri" pitchFamily="34" charset="-122"/>
-                <a:cs typeface="Calibri" pitchFamily="34" charset="-120"/>
+                  <a:srgbClr val="8B95A5"/>
+                </a:solidFill>
+                <a:latin typeface="Verdana" pitchFamily="34" charset="0"/>
+                <a:ea typeface="Verdana" pitchFamily="34" charset="-122"/>
+                <a:cs typeface="Verdana" pitchFamily="34" charset="-120"/>
               </a:rPr>
               <a:t>  TDD, SOLID, self-describing code</a:t>
             </a:r>
@@ -12587,11 +12587,11 @@
             <a:r>
               <a:rPr lang="en-US" sz="2200" b="1" dirty="0">
                 <a:solidFill>
-                  <a:srgbClr val="00B4D8"/>
-                </a:solidFill>
-                <a:latin typeface="Calibri" pitchFamily="34" charset="0"/>
-                <a:ea typeface="Calibri" pitchFamily="34" charset="-122"/>
-                <a:cs typeface="Calibri" pitchFamily="34" charset="-120"/>
+                  <a:srgbClr val="635BFF"/>
+                </a:solidFill>
+                <a:latin typeface="Verdana" pitchFamily="34" charset="0"/>
+                <a:ea typeface="Verdana" pitchFamily="34" charset="-122"/>
+                <a:cs typeface="Verdana" pitchFamily="34" charset="-120"/>
               </a:rPr>
               <a:t>Git workflow</a:t>
             </a:r>
@@ -12604,11 +12604,11 @@
             <a:r>
               <a:rPr lang="en-US" sz="2200" dirty="0">
                 <a:solidFill>
-                  <a:srgbClr val="94A3B8"/>
-                </a:solidFill>
-                <a:latin typeface="Calibri" pitchFamily="34" charset="0"/>
-                <a:ea typeface="Calibri" pitchFamily="34" charset="-122"/>
-                <a:cs typeface="Calibri" pitchFamily="34" charset="-120"/>
+                  <a:srgbClr val="8B95A5"/>
+                </a:solidFill>
+                <a:latin typeface="Verdana" pitchFamily="34" charset="0"/>
+                <a:ea typeface="Verdana" pitchFamily="34" charset="-122"/>
+                <a:cs typeface="Verdana" pitchFamily="34" charset="-120"/>
               </a:rPr>
               <a:t>  branch naming, PR closes issue</a:t>
             </a:r>
@@ -12621,11 +12621,11 @@
             <a:r>
               <a:rPr lang="en-US" sz="2200" b="1" dirty="0">
                 <a:solidFill>
-                  <a:srgbClr val="00B4D8"/>
-                </a:solidFill>
-                <a:latin typeface="Calibri" pitchFamily="34" charset="0"/>
-                <a:ea typeface="Calibri" pitchFamily="34" charset="-122"/>
-                <a:cs typeface="Calibri" pitchFamily="34" charset="-120"/>
+                  <a:srgbClr val="635BFF"/>
+                </a:solidFill>
+                <a:latin typeface="Verdana" pitchFamily="34" charset="0"/>
+                <a:ea typeface="Verdana" pitchFamily="34" charset="-122"/>
+                <a:cs typeface="Verdana" pitchFamily="34" charset="-120"/>
               </a:rPr>
               <a:t>Language-specific</a:t>
             </a:r>
@@ -12638,11 +12638,11 @@
             <a:r>
               <a:rPr lang="en-US" sz="2200" dirty="0">
                 <a:solidFill>
-                  <a:srgbClr val="94A3B8"/>
-                </a:solidFill>
-                <a:latin typeface="Calibri" pitchFamily="34" charset="0"/>
-                <a:ea typeface="Calibri" pitchFamily="34" charset="-122"/>
-                <a:cs typeface="Calibri" pitchFamily="34" charset="-120"/>
+                  <a:srgbClr val="8B95A5"/>
+                </a:solidFill>
+                <a:latin typeface="Verdana" pitchFamily="34" charset="0"/>
+                <a:ea typeface="Verdana" pitchFamily="34" charset="-122"/>
+                <a:cs typeface="Verdana" pitchFamily="34" charset="-120"/>
               </a:rPr>
               <a:t>  filtered by file extension</a:t>
             </a:r>
@@ -12664,7 +12664,7 @@
     <p:bg>
       <p:bgPr>
         <a:solidFill>
-          <a:srgbClr val="0F0F1A"/>
+          <a:srgbClr val="0A2540"/>
         </a:solidFill>
       </p:bgPr>
     </p:bg>
@@ -12697,7 +12697,7 @@
             <a:avLst/>
           </a:prstGeom>
           <a:solidFill>
-            <a:srgbClr val="00B4D8">
+            <a:srgbClr val="635BFF">
               <a:alpha val="4000"/>
             </a:srgbClr>
           </a:solidFill>
@@ -12791,7 +12791,7 @@
     <p:bg>
       <p:bgPr>
         <a:solidFill>
-          <a:srgbClr val="0F0F1A"/>
+          <a:srgbClr val="0A2540"/>
         </a:solidFill>
       </p:bgPr>
     </p:bg>
@@ -12824,7 +12824,7 @@
             <a:avLst/>
           </a:prstGeom>
           <a:solidFill>
-            <a:srgbClr val="00B4D8">
+            <a:srgbClr val="635BFF">
               <a:alpha val="4000"/>
             </a:srgbClr>
           </a:solidFill>
@@ -12858,7 +12858,7 @@
             <a:r>
               <a:rPr lang="en-US" sz="4400" b="1" dirty="0">
                 <a:solidFill>
-                  <a:srgbClr val="00B4D8"/>
+                  <a:srgbClr val="635BFF"/>
                 </a:solidFill>
                 <a:latin typeface="Georgia" pitchFamily="34" charset="0"/>
                 <a:ea typeface="Georgia" pitchFamily="34" charset="-122"/>
@@ -12875,7 +12875,7 @@
             <a:r>
               <a:rPr lang="en-US" sz="4400" b="1" dirty="0">
                 <a:solidFill>
-                  <a:srgbClr val="00B4D8"/>
+                  <a:srgbClr val="635BFF"/>
                 </a:solidFill>
                 <a:latin typeface="Georgia" pitchFamily="34" charset="0"/>
                 <a:ea typeface="Georgia" pitchFamily="34" charset="-122"/>
@@ -12901,7 +12901,7 @@
     <p:bg>
       <p:bgPr>
         <a:solidFill>
-          <a:srgbClr val="0F0F1A"/>
+          <a:srgbClr val="0A2540"/>
         </a:solidFill>
       </p:bgPr>
     </p:bg>
@@ -12934,7 +12934,7 @@
             <a:avLst/>
           </a:prstGeom>
           <a:solidFill>
-            <a:srgbClr val="00B4D8">
+            <a:srgbClr val="635BFF">
               <a:alpha val="4000"/>
             </a:srgbClr>
           </a:solidFill>
@@ -13007,11 +13007,11 @@
             <a:r>
               <a:rPr lang="en-US" sz="2800" i="1" dirty="0">
                 <a:solidFill>
-                  <a:srgbClr val="00B4D8"/>
-                </a:solidFill>
-                <a:latin typeface="Calibri" pitchFamily="34" charset="0"/>
-                <a:ea typeface="Calibri" pitchFamily="34" charset="-122"/>
-                <a:cs typeface="Calibri" pitchFamily="34" charset="-120"/>
+                  <a:srgbClr val="635BFF"/>
+                </a:solidFill>
+                <a:latin typeface="Verdana" pitchFamily="34" charset="0"/>
+                <a:ea typeface="Verdana" pitchFamily="34" charset="-122"/>
+                <a:cs typeface="Verdana" pitchFamily="34" charset="-120"/>
               </a:rPr>
               <a:t>On-demand. Compounding.</a:t>
             </a:r>
@@ -13033,7 +13033,7 @@
     <p:bg>
       <p:bgPr>
         <a:solidFill>
-          <a:srgbClr val="0F0F1A"/>
+          <a:srgbClr val="0A2540"/>
         </a:solidFill>
       </p:bgPr>
     </p:bg>
@@ -13066,7 +13066,7 @@
             <a:avLst/>
           </a:prstGeom>
           <a:solidFill>
-            <a:srgbClr val="00B4D8">
+            <a:srgbClr val="635BFF">
               <a:alpha val="4000"/>
             </a:srgbClr>
           </a:solidFill>
@@ -13100,7 +13100,7 @@
             <a:r>
               <a:rPr lang="en-US" sz="3600" b="1" dirty="0">
                 <a:solidFill>
-                  <a:srgbClr val="00B4D8"/>
+                  <a:srgbClr val="635BFF"/>
                 </a:solidFill>
                 <a:latin typeface="Georgia" pitchFamily="34" charset="0"/>
                 <a:ea typeface="Georgia" pitchFamily="34" charset="-122"/>
@@ -13139,11 +13139,11 @@
             <a:r>
               <a:rPr lang="en-US" sz="2200" dirty="0">
                 <a:solidFill>
-                  <a:srgbClr val="94A3B8"/>
-                </a:solidFill>
-                <a:latin typeface="Calibri" pitchFamily="34" charset="0"/>
-                <a:ea typeface="Calibri" pitchFamily="34" charset="-122"/>
-                <a:cs typeface="Calibri" pitchFamily="34" charset="-120"/>
+                  <a:srgbClr val="8B95A5"/>
+                </a:solidFill>
+                <a:latin typeface="Verdana" pitchFamily="34" charset="0"/>
+                <a:ea typeface="Verdana" pitchFamily="34" charset="-122"/>
+                <a:cs typeface="Verdana" pitchFamily="34" charset="-120"/>
               </a:rPr>
               <a:t>Always available</a:t>
             </a:r>
@@ -13156,11 +13156,11 @@
             <a:r>
               <a:rPr lang="en-US" sz="2200" dirty="0">
                 <a:solidFill>
-                  <a:srgbClr val="94A3B8"/>
-                </a:solidFill>
-                <a:latin typeface="Calibri" pitchFamily="34" charset="0"/>
-                <a:ea typeface="Calibri" pitchFamily="34" charset="-122"/>
-                <a:cs typeface="Calibri" pitchFamily="34" charset="-120"/>
+                  <a:srgbClr val="8B95A5"/>
+                </a:solidFill>
+                <a:latin typeface="Verdana" pitchFamily="34" charset="0"/>
+                <a:ea typeface="Verdana" pitchFamily="34" charset="-122"/>
+                <a:cs typeface="Verdana" pitchFamily="34" charset="-120"/>
               </a:rPr>
               <a:t>Low-level access</a:t>
             </a:r>
@@ -13173,11 +13173,11 @@
             <a:r>
               <a:rPr lang="en-US" sz="2200" dirty="0">
                 <a:solidFill>
-                  <a:srgbClr val="94A3B8"/>
-                </a:solidFill>
-                <a:latin typeface="Calibri" pitchFamily="34" charset="0"/>
-                <a:ea typeface="Calibri" pitchFamily="34" charset="-122"/>
-                <a:cs typeface="Calibri" pitchFamily="34" charset="-120"/>
+                  <a:srgbClr val="8B95A5"/>
+                </a:solidFill>
+                <a:latin typeface="Verdana" pitchFamily="34" charset="0"/>
+                <a:ea typeface="Verdana" pitchFamily="34" charset="-122"/>
+                <a:cs typeface="Verdana" pitchFamily="34" charset="-120"/>
               </a:rPr>
               <a:t>Docs, navigation, web</a:t>
             </a:r>
@@ -13202,7 +13202,7 @@
           <a:noFill/>
           <a:ln w="12700">
             <a:solidFill>
-              <a:srgbClr val="00B4D8"/>
+              <a:srgbClr val="635BFF"/>
             </a:solidFill>
             <a:prstDash val="solid"/>
           </a:ln>
@@ -13274,11 +13274,11 @@
             <a:r>
               <a:rPr lang="en-US" sz="2200" dirty="0">
                 <a:solidFill>
-                  <a:srgbClr val="94A3B8"/>
-                </a:solidFill>
-                <a:latin typeface="Calibri" pitchFamily="34" charset="0"/>
-                <a:ea typeface="Calibri" pitchFamily="34" charset="-122"/>
-                <a:cs typeface="Calibri" pitchFamily="34" charset="-120"/>
+                  <a:srgbClr val="8B95A5"/>
+                </a:solidFill>
+                <a:latin typeface="Verdana" pitchFamily="34" charset="0"/>
+                <a:ea typeface="Verdana" pitchFamily="34" charset="-122"/>
+                <a:cs typeface="Verdana" pitchFamily="34" charset="-120"/>
               </a:rPr>
               <a:t>On-demand</a:t>
             </a:r>
@@ -13291,11 +13291,11 @@
             <a:r>
               <a:rPr lang="en-US" sz="2200" dirty="0">
                 <a:solidFill>
-                  <a:srgbClr val="94A3B8"/>
-                </a:solidFill>
-                <a:latin typeface="Calibri" pitchFamily="34" charset="0"/>
-                <a:ea typeface="Calibri" pitchFamily="34" charset="-122"/>
-                <a:cs typeface="Calibri" pitchFamily="34" charset="-120"/>
+                  <a:srgbClr val="8B95A5"/>
+                </a:solidFill>
+                <a:latin typeface="Verdana" pitchFamily="34" charset="0"/>
+                <a:ea typeface="Verdana" pitchFamily="34" charset="-122"/>
+                <a:cs typeface="Verdana" pitchFamily="34" charset="-120"/>
               </a:rPr>
               <a:t>Higher-level workflows</a:t>
             </a:r>
@@ -13308,11 +13308,11 @@
             <a:r>
               <a:rPr lang="en-US" sz="2200" dirty="0">
                 <a:solidFill>
-                  <a:srgbClr val="94A3B8"/>
-                </a:solidFill>
-                <a:latin typeface="Calibri" pitchFamily="34" charset="0"/>
-                <a:ea typeface="Calibri" pitchFamily="34" charset="-122"/>
-                <a:cs typeface="Calibri" pitchFamily="34" charset="-120"/>
+                  <a:srgbClr val="8B95A5"/>
+                </a:solidFill>
+                <a:latin typeface="Verdana" pitchFamily="34" charset="0"/>
+                <a:ea typeface="Verdana" pitchFamily="34" charset="-122"/>
+                <a:cs typeface="Verdana" pitchFamily="34" charset="-120"/>
               </a:rPr>
               <a:t>Loaded when needed</a:t>
             </a:r>
@@ -13334,7 +13334,7 @@
     <p:bg>
       <p:bgPr>
         <a:solidFill>
-          <a:srgbClr val="0F0F1A"/>
+          <a:srgbClr val="0A2540"/>
         </a:solidFill>
       </p:bgPr>
     </p:bg>
@@ -13367,7 +13367,7 @@
             <a:avLst/>
           </a:prstGeom>
           <a:solidFill>
-            <a:srgbClr val="00B4D8">
+            <a:srgbClr val="635BFF">
               <a:alpha val="4000"/>
             </a:srgbClr>
           </a:solidFill>
@@ -13444,7 +13444,7 @@
     <p:bg>
       <p:bgPr>
         <a:solidFill>
-          <a:srgbClr val="0F0F1A"/>
+          <a:srgbClr val="0A2540"/>
         </a:solidFill>
       </p:bgPr>
     </p:bg>
@@ -13477,7 +13477,7 @@
             <a:avLst/>
           </a:prstGeom>
           <a:solidFill>
-            <a:srgbClr val="00B4D8">
+            <a:srgbClr val="635BFF">
               <a:alpha val="4000"/>
             </a:srgbClr>
           </a:solidFill>
@@ -13550,11 +13550,11 @@
             <a:r>
               <a:rPr lang="en-US" sz="2800" dirty="0">
                 <a:solidFill>
-                  <a:srgbClr val="94A3B8"/>
-                </a:solidFill>
-                <a:latin typeface="Calibri" pitchFamily="34" charset="0"/>
-                <a:ea typeface="Calibri" pitchFamily="34" charset="-122"/>
-                <a:cs typeface="Calibri" pitchFamily="34" charset="-120"/>
+                  <a:srgbClr val="8B95A5"/>
+                </a:solidFill>
+                <a:latin typeface="Verdana" pitchFamily="34" charset="0"/>
+                <a:ea typeface="Verdana" pitchFamily="34" charset="-122"/>
+                <a:cs typeface="Verdana" pitchFamily="34" charset="-120"/>
               </a:rPr>
               <a:t>of your time building skills</a:t>
             </a:r>
@@ -13567,11 +13567,11 @@
             <a:r>
               <a:rPr lang="en-US" sz="2800" dirty="0">
                 <a:solidFill>
-                  <a:srgbClr val="94A3B8"/>
-                </a:solidFill>
-                <a:latin typeface="Calibri" pitchFamily="34" charset="0"/>
-                <a:ea typeface="Calibri" pitchFamily="34" charset="-122"/>
-                <a:cs typeface="Calibri" pitchFamily="34" charset="-120"/>
+                  <a:srgbClr val="8B95A5"/>
+                </a:solidFill>
+                <a:latin typeface="Verdana" pitchFamily="34" charset="0"/>
+                <a:ea typeface="Verdana" pitchFamily="34" charset="-122"/>
+                <a:cs typeface="Verdana" pitchFamily="34" charset="-120"/>
               </a:rPr>
               <a:t>from today’s pain points</a:t>
             </a:r>
@@ -13593,7 +13593,7 @@
     <p:bg>
       <p:bgPr>
         <a:solidFill>
-          <a:srgbClr val="0F0F1A"/>
+          <a:srgbClr val="0A2540"/>
         </a:solidFill>
       </p:bgPr>
     </p:bg>
@@ -13626,7 +13626,7 @@
             <a:avLst/>
           </a:prstGeom>
           <a:solidFill>
-            <a:srgbClr val="00B4D8">
+            <a:srgbClr val="635BFF">
               <a:alpha val="4000"/>
             </a:srgbClr>
           </a:solidFill>
@@ -13699,11 +13699,11 @@
             <a:r>
               <a:rPr lang="en-US" sz="2800" dirty="0">
                 <a:solidFill>
-                  <a:srgbClr val="94A3B8"/>
-                </a:solidFill>
-                <a:latin typeface="Calibri" pitchFamily="34" charset="0"/>
-                <a:ea typeface="Calibri" pitchFamily="34" charset="-122"/>
-                <a:cs typeface="Calibri" pitchFamily="34" charset="-120"/>
+                  <a:srgbClr val="8B95A5"/>
+                </a:solidFill>
+                <a:latin typeface="Verdana" pitchFamily="34" charset="0"/>
+                <a:ea typeface="Verdana" pitchFamily="34" charset="-122"/>
+                <a:cs typeface="Verdana" pitchFamily="34" charset="-120"/>
               </a:rPr>
               <a:t>Karpathy tweet to Collins Word of the Year</a:t>
             </a:r>
@@ -13716,11 +13716,11 @@
             <a:r>
               <a:rPr lang="en-US" sz="2800" dirty="0">
                 <a:solidFill>
-                  <a:srgbClr val="94A3B8"/>
-                </a:solidFill>
-                <a:latin typeface="Calibri" pitchFamily="34" charset="0"/>
-                <a:ea typeface="Calibri" pitchFamily="34" charset="-122"/>
-                <a:cs typeface="Calibri" pitchFamily="34" charset="-120"/>
+                  <a:srgbClr val="8B95A5"/>
+                </a:solidFill>
+                <a:latin typeface="Verdana" pitchFamily="34" charset="0"/>
+                <a:ea typeface="Verdana" pitchFamily="34" charset="-122"/>
+                <a:cs typeface="Verdana" pitchFamily="34" charset="-120"/>
               </a:rPr>
               <a:t>in 9 months.</a:t>
             </a:r>
@@ -13742,7 +13742,7 @@
     <p:bg>
       <p:bgPr>
         <a:solidFill>
-          <a:srgbClr val="0F0F1A"/>
+          <a:srgbClr val="0A2540"/>
         </a:solidFill>
       </p:bgPr>
     </p:bg>
@@ -13775,7 +13775,7 @@
             <a:avLst/>
           </a:prstGeom>
           <a:solidFill>
-            <a:srgbClr val="00B4D8">
+            <a:srgbClr val="635BFF">
               <a:alpha val="4000"/>
             </a:srgbClr>
           </a:solidFill>
@@ -13849,11 +13849,11 @@
             <a:r>
               <a:rPr lang="en-US" sz="2400" dirty="0">
                 <a:solidFill>
-                  <a:srgbClr val="94A3B8"/>
-                </a:solidFill>
-                <a:latin typeface="Calibri" pitchFamily="34" charset="0"/>
-                <a:ea typeface="Calibri" pitchFamily="34" charset="-122"/>
-                <a:cs typeface="Calibri" pitchFamily="34" charset="-120"/>
+                  <a:srgbClr val="8B95A5"/>
+                </a:solidFill>
+                <a:latin typeface="Verdana" pitchFamily="34" charset="0"/>
+                <a:ea typeface="Verdana" pitchFamily="34" charset="-122"/>
+                <a:cs typeface="Verdana" pitchFamily="34" charset="-120"/>
               </a:rPr>
               <a:t>Agent circled on docker postgres → skill</a:t>
             </a:r>
@@ -13867,11 +13867,11 @@
             <a:r>
               <a:rPr lang="en-US" sz="2400" dirty="0">
                 <a:solidFill>
-                  <a:srgbClr val="94A3B8"/>
-                </a:solidFill>
-                <a:latin typeface="Calibri" pitchFamily="34" charset="0"/>
-                <a:ea typeface="Calibri" pitchFamily="34" charset="-122"/>
-                <a:cs typeface="Calibri" pitchFamily="34" charset="-120"/>
+                  <a:srgbClr val="8B95A5"/>
+                </a:solidFill>
+                <a:latin typeface="Verdana" pitchFamily="34" charset="0"/>
+                <a:ea typeface="Verdana" pitchFamily="34" charset="-122"/>
+                <a:cs typeface="Verdana" pitchFamily="34" charset="-120"/>
               </a:rPr>
               <a:t>Connected to test GCP service → skill</a:t>
             </a:r>
@@ -13885,11 +13885,11 @@
             <a:r>
               <a:rPr lang="en-US" sz="2400" dirty="0">
                 <a:solidFill>
-                  <a:srgbClr val="94A3B8"/>
-                </a:solidFill>
-                <a:latin typeface="Calibri" pitchFamily="34" charset="0"/>
-                <a:ea typeface="Calibri" pitchFamily="34" charset="-122"/>
-                <a:cs typeface="Calibri" pitchFamily="34" charset="-120"/>
+                  <a:srgbClr val="8B95A5"/>
+                </a:solidFill>
+                <a:latin typeface="Verdana" pitchFamily="34" charset="0"/>
+                <a:ea typeface="Verdana" pitchFamily="34" charset="-122"/>
+                <a:cs typeface="Verdana" pitchFamily="34" charset="-120"/>
               </a:rPr>
               <a:t>Pulled a feature ticket via CLI → skill</a:t>
             </a:r>
@@ -13903,11 +13903,11 @@
             <a:r>
               <a:rPr lang="en-US" sz="2400" dirty="0">
                 <a:solidFill>
-                  <a:srgbClr val="94A3B8"/>
-                </a:solidFill>
-                <a:latin typeface="Calibri" pitchFamily="34" charset="0"/>
-                <a:ea typeface="Calibri" pitchFamily="34" charset="-122"/>
-                <a:cs typeface="Calibri" pitchFamily="34" charset="-120"/>
+                  <a:srgbClr val="8B95A5"/>
+                </a:solidFill>
+                <a:latin typeface="Verdana" pitchFamily="34" charset="0"/>
+                <a:ea typeface="Verdana" pitchFamily="34" charset="-122"/>
+                <a:cs typeface="Verdana" pitchFamily="34" charset="-120"/>
               </a:rPr>
               <a:t>Analyzed a crash log → skill</a:t>
             </a:r>
@@ -13929,7 +13929,7 @@
     <p:bg>
       <p:bgPr>
         <a:solidFill>
-          <a:srgbClr val="0F0F1A"/>
+          <a:srgbClr val="0A2540"/>
         </a:solidFill>
       </p:bgPr>
     </p:bg>
@@ -13962,7 +13962,7 @@
             <a:avLst/>
           </a:prstGeom>
           <a:solidFill>
-            <a:srgbClr val="00B4D8">
+            <a:srgbClr val="635BFF">
               <a:alpha val="4000"/>
             </a:srgbClr>
           </a:solidFill>
@@ -13996,7 +13996,7 @@
             <a:r>
               <a:rPr lang="en-US" sz="4400" b="1" dirty="0">
                 <a:solidFill>
-                  <a:srgbClr val="00B4D8"/>
+                  <a:srgbClr val="635BFF"/>
                 </a:solidFill>
                 <a:latin typeface="Georgia" pitchFamily="34" charset="0"/>
                 <a:ea typeface="Georgia" pitchFamily="34" charset="-122"/>
@@ -14013,7 +14013,7 @@
             <a:r>
               <a:rPr lang="en-US" sz="4400" b="1" dirty="0">
                 <a:solidFill>
-                  <a:srgbClr val="00B4D8"/>
+                  <a:srgbClr val="635BFF"/>
                 </a:solidFill>
                 <a:latin typeface="Georgia" pitchFamily="34" charset="0"/>
                 <a:ea typeface="Georgia" pitchFamily="34" charset="-122"/>
@@ -14039,7 +14039,7 @@
     <p:bg>
       <p:bgPr>
         <a:solidFill>
-          <a:srgbClr val="0F0F1A"/>
+          <a:srgbClr val="0A2540"/>
         </a:solidFill>
       </p:bgPr>
     </p:bg>
@@ -14072,7 +14072,7 @@
             <a:avLst/>
           </a:prstGeom>
           <a:solidFill>
-            <a:srgbClr val="00B4D8">
+            <a:srgbClr val="635BFF">
               <a:alpha val="4000"/>
             </a:srgbClr>
           </a:solidFill>
@@ -14145,11 +14145,11 @@
             <a:r>
               <a:rPr lang="en-US" sz="2800" i="1" dirty="0">
                 <a:solidFill>
-                  <a:srgbClr val="00B4D8"/>
-                </a:solidFill>
-                <a:latin typeface="Calibri" pitchFamily="34" charset="0"/>
-                <a:ea typeface="Calibri" pitchFamily="34" charset="-122"/>
-                <a:cs typeface="Calibri" pitchFamily="34" charset="-120"/>
+                  <a:srgbClr val="635BFF"/>
+                </a:solidFill>
+                <a:latin typeface="Verdana" pitchFamily="34" charset="0"/>
+                <a:ea typeface="Verdana" pitchFamily="34" charset="-122"/>
+                <a:cs typeface="Verdana" pitchFamily="34" charset="-120"/>
               </a:rPr>
               <a:t>Parallel. Isolated. Full visibility.</a:t>
             </a:r>
@@ -14171,7 +14171,7 @@
     <p:bg>
       <p:bgPr>
         <a:solidFill>
-          <a:srgbClr val="0F0F1A"/>
+          <a:srgbClr val="0A2540"/>
         </a:solidFill>
       </p:bgPr>
     </p:bg>
@@ -14204,7 +14204,7 @@
             <a:avLst/>
           </a:prstGeom>
           <a:solidFill>
-            <a:srgbClr val="00B4D8">
+            <a:srgbClr val="635BFF">
               <a:alpha val="4000"/>
             </a:srgbClr>
           </a:solidFill>
@@ -14228,11 +14228,11 @@
             </a:avLst>
           </a:prstGeom>
           <a:solidFill>
-            <a:srgbClr val="0F0F1A"/>
+            <a:srgbClr val="0A2540"/>
           </a:solidFill>
           <a:ln w="19050">
             <a:solidFill>
-              <a:srgbClr val="00B4D8"/>
+              <a:srgbClr val="635BFF"/>
             </a:solidFill>
             <a:prstDash val="solid"/>
           </a:ln>
@@ -14265,11 +14265,11 @@
             <a:r>
               <a:rPr lang="en-US" sz="1600" dirty="0">
                 <a:solidFill>
-                  <a:srgbClr val="00B4D8"/>
-                </a:solidFill>
-                <a:latin typeface="Calibri" pitchFamily="34" charset="0"/>
-                <a:ea typeface="Calibri" pitchFamily="34" charset="-122"/>
-                <a:cs typeface="Calibri" pitchFamily="34" charset="-120"/>
+                  <a:srgbClr val="635BFF"/>
+                </a:solidFill>
+                <a:latin typeface="Verdana" pitchFamily="34" charset="0"/>
+                <a:ea typeface="Verdana" pitchFamily="34" charset="-122"/>
+                <a:cs typeface="Verdana" pitchFamily="34" charset="-120"/>
               </a:rPr>
               <a:t>Tab</a:t>
             </a:r>
@@ -14304,11 +14304,11 @@
             <a:r>
               <a:rPr lang="en-US" sz="2000" dirty="0">
                 <a:solidFill>
-                  <a:srgbClr val="94A3B8"/>
-                </a:solidFill>
-                <a:latin typeface="Calibri" pitchFamily="34" charset="0"/>
-                <a:ea typeface="Calibri" pitchFamily="34" charset="-122"/>
-                <a:cs typeface="Calibri" pitchFamily="34" charset="-120"/>
+                  <a:srgbClr val="8B95A5"/>
+                </a:solidFill>
+                <a:latin typeface="Verdana" pitchFamily="34" charset="0"/>
+                <a:ea typeface="Verdana" pitchFamily="34" charset="-122"/>
+                <a:cs typeface="Verdana" pitchFamily="34" charset="-120"/>
               </a:rPr>
               <a:t>↓</a:t>
             </a:r>
@@ -14333,11 +14333,11 @@
             </a:avLst>
           </a:prstGeom>
           <a:solidFill>
-            <a:srgbClr val="0F0F1A"/>
+            <a:srgbClr val="0A2540"/>
           </a:solidFill>
           <a:ln w="12700">
             <a:solidFill>
-              <a:srgbClr val="94A3B8"/>
+              <a:srgbClr val="8B95A5"/>
             </a:solidFill>
             <a:prstDash val="solid"/>
           </a:ln>
@@ -14370,11 +14370,11 @@
             <a:r>
               <a:rPr lang="en-US" sz="1600" dirty="0">
                 <a:solidFill>
-                  <a:srgbClr val="94A3B8"/>
-                </a:solidFill>
-                <a:latin typeface="Calibri" pitchFamily="34" charset="0"/>
-                <a:ea typeface="Calibri" pitchFamily="34" charset="-122"/>
-                <a:cs typeface="Calibri" pitchFamily="34" charset="-120"/>
+                  <a:srgbClr val="8B95A5"/>
+                </a:solidFill>
+                <a:latin typeface="Verdana" pitchFamily="34" charset="0"/>
+                <a:ea typeface="Verdana" pitchFamily="34" charset="-122"/>
+                <a:cs typeface="Verdana" pitchFamily="34" charset="-120"/>
               </a:rPr>
               <a:t>Worktree</a:t>
             </a:r>
@@ -14409,11 +14409,11 @@
             <a:r>
               <a:rPr lang="en-US" sz="2000" dirty="0">
                 <a:solidFill>
-                  <a:srgbClr val="94A3B8"/>
-                </a:solidFill>
-                <a:latin typeface="Calibri" pitchFamily="34" charset="0"/>
-                <a:ea typeface="Calibri" pitchFamily="34" charset="-122"/>
-                <a:cs typeface="Calibri" pitchFamily="34" charset="-120"/>
+                  <a:srgbClr val="8B95A5"/>
+                </a:solidFill>
+                <a:latin typeface="Verdana" pitchFamily="34" charset="0"/>
+                <a:ea typeface="Verdana" pitchFamily="34" charset="-122"/>
+                <a:cs typeface="Verdana" pitchFamily="34" charset="-120"/>
               </a:rPr>
               <a:t>↓</a:t>
             </a:r>
@@ -14438,11 +14438,11 @@
             </a:avLst>
           </a:prstGeom>
           <a:solidFill>
-            <a:srgbClr val="0F0F1A"/>
+            <a:srgbClr val="0A2540"/>
           </a:solidFill>
           <a:ln w="12700">
             <a:solidFill>
-              <a:srgbClr val="94A3B8"/>
+              <a:srgbClr val="8B95A5"/>
             </a:solidFill>
             <a:prstDash val="solid"/>
           </a:ln>
@@ -14475,11 +14475,11 @@
             <a:r>
               <a:rPr lang="en-US" sz="1600" dirty="0">
                 <a:solidFill>
-                  <a:srgbClr val="94A3B8"/>
-                </a:solidFill>
-                <a:latin typeface="Calibri" pitchFamily="34" charset="0"/>
-                <a:ea typeface="Calibri" pitchFamily="34" charset="-122"/>
-                <a:cs typeface="Calibri" pitchFamily="34" charset="-120"/>
+                  <a:srgbClr val="8B95A5"/>
+                </a:solidFill>
+                <a:latin typeface="Verdana" pitchFamily="34" charset="0"/>
+                <a:ea typeface="Verdana" pitchFamily="34" charset="-122"/>
+                <a:cs typeface="Verdana" pitchFamily="34" charset="-120"/>
               </a:rPr>
               <a:t>Containers + DB</a:t>
             </a:r>
@@ -14516,9 +14516,9 @@
                 <a:solidFill>
                   <a:srgbClr val="FFFFFF"/>
                 </a:solidFill>
-                <a:latin typeface="Calibri" pitchFamily="34" charset="0"/>
-                <a:ea typeface="Calibri" pitchFamily="34" charset="-122"/>
-                <a:cs typeface="Calibri" pitchFamily="34" charset="-120"/>
+                <a:latin typeface="Verdana" pitchFamily="34" charset="0"/>
+                <a:ea typeface="Verdana" pitchFamily="34" charset="-122"/>
+                <a:cs typeface="Verdana" pitchFamily="34" charset="-120"/>
               </a:rPr>
               <a:t>Feature A</a:t>
             </a:r>
@@ -14543,11 +14543,11 @@
             </a:avLst>
           </a:prstGeom>
           <a:solidFill>
-            <a:srgbClr val="0F0F1A"/>
+            <a:srgbClr val="0A2540"/>
           </a:solidFill>
           <a:ln w="19050">
             <a:solidFill>
-              <a:srgbClr val="00B4D8"/>
+              <a:srgbClr val="635BFF"/>
             </a:solidFill>
             <a:prstDash val="solid"/>
           </a:ln>
@@ -14580,11 +14580,11 @@
             <a:r>
               <a:rPr lang="en-US" sz="1600" dirty="0">
                 <a:solidFill>
-                  <a:srgbClr val="00B4D8"/>
-                </a:solidFill>
-                <a:latin typeface="Calibri" pitchFamily="34" charset="0"/>
-                <a:ea typeface="Calibri" pitchFamily="34" charset="-122"/>
-                <a:cs typeface="Calibri" pitchFamily="34" charset="-120"/>
+                  <a:srgbClr val="635BFF"/>
+                </a:solidFill>
+                <a:latin typeface="Verdana" pitchFamily="34" charset="0"/>
+                <a:ea typeface="Verdana" pitchFamily="34" charset="-122"/>
+                <a:cs typeface="Verdana" pitchFamily="34" charset="-120"/>
               </a:rPr>
               <a:t>Tab</a:t>
             </a:r>
@@ -14619,11 +14619,11 @@
             <a:r>
               <a:rPr lang="en-US" sz="2000" dirty="0">
                 <a:solidFill>
-                  <a:srgbClr val="94A3B8"/>
-                </a:solidFill>
-                <a:latin typeface="Calibri" pitchFamily="34" charset="0"/>
-                <a:ea typeface="Calibri" pitchFamily="34" charset="-122"/>
-                <a:cs typeface="Calibri" pitchFamily="34" charset="-120"/>
+                  <a:srgbClr val="8B95A5"/>
+                </a:solidFill>
+                <a:latin typeface="Verdana" pitchFamily="34" charset="0"/>
+                <a:ea typeface="Verdana" pitchFamily="34" charset="-122"/>
+                <a:cs typeface="Verdana" pitchFamily="34" charset="-120"/>
               </a:rPr>
               <a:t>↓</a:t>
             </a:r>
@@ -14648,11 +14648,11 @@
             </a:avLst>
           </a:prstGeom>
           <a:solidFill>
-            <a:srgbClr val="0F0F1A"/>
+            <a:srgbClr val="0A2540"/>
           </a:solidFill>
           <a:ln w="12700">
             <a:solidFill>
-              <a:srgbClr val="94A3B8"/>
+              <a:srgbClr val="8B95A5"/>
             </a:solidFill>
             <a:prstDash val="solid"/>
           </a:ln>
@@ -14685,11 +14685,11 @@
             <a:r>
               <a:rPr lang="en-US" sz="1600" dirty="0">
                 <a:solidFill>
-                  <a:srgbClr val="94A3B8"/>
-                </a:solidFill>
-                <a:latin typeface="Calibri" pitchFamily="34" charset="0"/>
-                <a:ea typeface="Calibri" pitchFamily="34" charset="-122"/>
-                <a:cs typeface="Calibri" pitchFamily="34" charset="-120"/>
+                  <a:srgbClr val="8B95A5"/>
+                </a:solidFill>
+                <a:latin typeface="Verdana" pitchFamily="34" charset="0"/>
+                <a:ea typeface="Verdana" pitchFamily="34" charset="-122"/>
+                <a:cs typeface="Verdana" pitchFamily="34" charset="-120"/>
               </a:rPr>
               <a:t>Worktree</a:t>
             </a:r>
@@ -14724,11 +14724,11 @@
             <a:r>
               <a:rPr lang="en-US" sz="2000" dirty="0">
                 <a:solidFill>
-                  <a:srgbClr val="94A3B8"/>
-                </a:solidFill>
-                <a:latin typeface="Calibri" pitchFamily="34" charset="0"/>
-                <a:ea typeface="Calibri" pitchFamily="34" charset="-122"/>
-                <a:cs typeface="Calibri" pitchFamily="34" charset="-120"/>
+                  <a:srgbClr val="8B95A5"/>
+                </a:solidFill>
+                <a:latin typeface="Verdana" pitchFamily="34" charset="0"/>
+                <a:ea typeface="Verdana" pitchFamily="34" charset="-122"/>
+                <a:cs typeface="Verdana" pitchFamily="34" charset="-120"/>
               </a:rPr>
               <a:t>↓</a:t>
             </a:r>
@@ -14753,11 +14753,11 @@
             </a:avLst>
           </a:prstGeom>
           <a:solidFill>
-            <a:srgbClr val="0F0F1A"/>
+            <a:srgbClr val="0A2540"/>
           </a:solidFill>
           <a:ln w="12700">
             <a:solidFill>
-              <a:srgbClr val="94A3B8"/>
+              <a:srgbClr val="8B95A5"/>
             </a:solidFill>
             <a:prstDash val="solid"/>
           </a:ln>
@@ -14790,11 +14790,11 @@
             <a:r>
               <a:rPr lang="en-US" sz="1600" dirty="0">
                 <a:solidFill>
-                  <a:srgbClr val="94A3B8"/>
-                </a:solidFill>
-                <a:latin typeface="Calibri" pitchFamily="34" charset="0"/>
-                <a:ea typeface="Calibri" pitchFamily="34" charset="-122"/>
-                <a:cs typeface="Calibri" pitchFamily="34" charset="-120"/>
+                  <a:srgbClr val="8B95A5"/>
+                </a:solidFill>
+                <a:latin typeface="Verdana" pitchFamily="34" charset="0"/>
+                <a:ea typeface="Verdana" pitchFamily="34" charset="-122"/>
+                <a:cs typeface="Verdana" pitchFamily="34" charset="-120"/>
               </a:rPr>
               <a:t>Containers + DB</a:t>
             </a:r>
@@ -14831,9 +14831,9 @@
                 <a:solidFill>
                   <a:srgbClr val="FFFFFF"/>
                 </a:solidFill>
-                <a:latin typeface="Calibri" pitchFamily="34" charset="0"/>
-                <a:ea typeface="Calibri" pitchFamily="34" charset="-122"/>
-                <a:cs typeface="Calibri" pitchFamily="34" charset="-120"/>
+                <a:latin typeface="Verdana" pitchFamily="34" charset="0"/>
+                <a:ea typeface="Verdana" pitchFamily="34" charset="-122"/>
+                <a:cs typeface="Verdana" pitchFamily="34" charset="-120"/>
               </a:rPr>
               <a:t>Feature B</a:t>
             </a:r>
@@ -14858,11 +14858,11 @@
             </a:avLst>
           </a:prstGeom>
           <a:solidFill>
-            <a:srgbClr val="0F0F1A"/>
+            <a:srgbClr val="0A2540"/>
           </a:solidFill>
           <a:ln w="19050">
             <a:solidFill>
-              <a:srgbClr val="00B4D8"/>
+              <a:srgbClr val="635BFF"/>
             </a:solidFill>
             <a:prstDash val="solid"/>
           </a:ln>
@@ -14895,11 +14895,11 @@
             <a:r>
               <a:rPr lang="en-US" sz="1600" dirty="0">
                 <a:solidFill>
-                  <a:srgbClr val="00B4D8"/>
-                </a:solidFill>
-                <a:latin typeface="Calibri" pitchFamily="34" charset="0"/>
-                <a:ea typeface="Calibri" pitchFamily="34" charset="-122"/>
-                <a:cs typeface="Calibri" pitchFamily="34" charset="-120"/>
+                  <a:srgbClr val="635BFF"/>
+                </a:solidFill>
+                <a:latin typeface="Verdana" pitchFamily="34" charset="0"/>
+                <a:ea typeface="Verdana" pitchFamily="34" charset="-122"/>
+                <a:cs typeface="Verdana" pitchFamily="34" charset="-120"/>
               </a:rPr>
               <a:t>Tab</a:t>
             </a:r>
@@ -14934,11 +14934,11 @@
             <a:r>
               <a:rPr lang="en-US" sz="2000" dirty="0">
                 <a:solidFill>
-                  <a:srgbClr val="94A3B8"/>
-                </a:solidFill>
-                <a:latin typeface="Calibri" pitchFamily="34" charset="0"/>
-                <a:ea typeface="Calibri" pitchFamily="34" charset="-122"/>
-                <a:cs typeface="Calibri" pitchFamily="34" charset="-120"/>
+                  <a:srgbClr val="8B95A5"/>
+                </a:solidFill>
+                <a:latin typeface="Verdana" pitchFamily="34" charset="0"/>
+                <a:ea typeface="Verdana" pitchFamily="34" charset="-122"/>
+                <a:cs typeface="Verdana" pitchFamily="34" charset="-120"/>
               </a:rPr>
               <a:t>↓</a:t>
             </a:r>
@@ -14963,11 +14963,11 @@
             </a:avLst>
           </a:prstGeom>
           <a:solidFill>
-            <a:srgbClr val="0F0F1A"/>
+            <a:srgbClr val="0A2540"/>
           </a:solidFill>
           <a:ln w="12700">
             <a:solidFill>
-              <a:srgbClr val="94A3B8"/>
+              <a:srgbClr val="8B95A5"/>
             </a:solidFill>
             <a:prstDash val="solid"/>
           </a:ln>
@@ -15000,11 +15000,11 @@
             <a:r>
               <a:rPr lang="en-US" sz="1600" dirty="0">
                 <a:solidFill>
-                  <a:srgbClr val="94A3B8"/>
-                </a:solidFill>
-                <a:latin typeface="Calibri" pitchFamily="34" charset="0"/>
-                <a:ea typeface="Calibri" pitchFamily="34" charset="-122"/>
-                <a:cs typeface="Calibri" pitchFamily="34" charset="-120"/>
+                  <a:srgbClr val="8B95A5"/>
+                </a:solidFill>
+                <a:latin typeface="Verdana" pitchFamily="34" charset="0"/>
+                <a:ea typeface="Verdana" pitchFamily="34" charset="-122"/>
+                <a:cs typeface="Verdana" pitchFamily="34" charset="-120"/>
               </a:rPr>
               <a:t>Worktree</a:t>
             </a:r>
@@ -15039,11 +15039,11 @@
             <a:r>
               <a:rPr lang="en-US" sz="2000" dirty="0">
                 <a:solidFill>
-                  <a:srgbClr val="94A3B8"/>
-                </a:solidFill>
-                <a:latin typeface="Calibri" pitchFamily="34" charset="0"/>
-                <a:ea typeface="Calibri" pitchFamily="34" charset="-122"/>
-                <a:cs typeface="Calibri" pitchFamily="34" charset="-120"/>
+                  <a:srgbClr val="8B95A5"/>
+                </a:solidFill>
+                <a:latin typeface="Verdana" pitchFamily="34" charset="0"/>
+                <a:ea typeface="Verdana" pitchFamily="34" charset="-122"/>
+                <a:cs typeface="Verdana" pitchFamily="34" charset="-120"/>
               </a:rPr>
               <a:t>↓</a:t>
             </a:r>
@@ -15068,11 +15068,11 @@
             </a:avLst>
           </a:prstGeom>
           <a:solidFill>
-            <a:srgbClr val="0F0F1A"/>
+            <a:srgbClr val="0A2540"/>
           </a:solidFill>
           <a:ln w="12700">
             <a:solidFill>
-              <a:srgbClr val="94A3B8"/>
+              <a:srgbClr val="8B95A5"/>
             </a:solidFill>
             <a:prstDash val="solid"/>
           </a:ln>
@@ -15105,11 +15105,11 @@
             <a:r>
               <a:rPr lang="en-US" sz="1600" dirty="0">
                 <a:solidFill>
-                  <a:srgbClr val="94A3B8"/>
-                </a:solidFill>
-                <a:latin typeface="Calibri" pitchFamily="34" charset="0"/>
-                <a:ea typeface="Calibri" pitchFamily="34" charset="-122"/>
-                <a:cs typeface="Calibri" pitchFamily="34" charset="-120"/>
+                  <a:srgbClr val="8B95A5"/>
+                </a:solidFill>
+                <a:latin typeface="Verdana" pitchFamily="34" charset="0"/>
+                <a:ea typeface="Verdana" pitchFamily="34" charset="-122"/>
+                <a:cs typeface="Verdana" pitchFamily="34" charset="-120"/>
               </a:rPr>
               <a:t>Containers + DB</a:t>
             </a:r>
@@ -15146,9 +15146,9 @@
                 <a:solidFill>
                   <a:srgbClr val="FFFFFF"/>
                 </a:solidFill>
-                <a:latin typeface="Calibri" pitchFamily="34" charset="0"/>
-                <a:ea typeface="Calibri" pitchFamily="34" charset="-122"/>
-                <a:cs typeface="Calibri" pitchFamily="34" charset="-120"/>
+                <a:latin typeface="Verdana" pitchFamily="34" charset="0"/>
+                <a:ea typeface="Verdana" pitchFamily="34" charset="-122"/>
+                <a:cs typeface="Verdana" pitchFamily="34" charset="-120"/>
               </a:rPr>
               <a:t>Feature C</a:t>
             </a:r>
@@ -15183,11 +15183,11 @@
             <a:r>
               <a:rPr lang="en-US" sz="2200" dirty="0">
                 <a:solidFill>
-                  <a:srgbClr val="94A3B8"/>
-                </a:solidFill>
-                <a:latin typeface="Calibri" pitchFamily="34" charset="0"/>
-                <a:ea typeface="Calibri" pitchFamily="34" charset="-122"/>
-                <a:cs typeface="Calibri" pitchFamily="34" charset="-120"/>
+                  <a:srgbClr val="8B95A5"/>
+                </a:solidFill>
+                <a:latin typeface="Verdana" pitchFamily="34" charset="0"/>
+                <a:ea typeface="Verdana" pitchFamily="34" charset="-122"/>
+                <a:cs typeface="Verdana" pitchFamily="34" charset="-120"/>
               </a:rPr>
               <a:t>3 sessions. 3 databases. Zero interference.</a:t>
             </a:r>
@@ -15209,7 +15209,7 @@
     <p:bg>
       <p:bgPr>
         <a:solidFill>
-          <a:srgbClr val="0F0F1A"/>
+          <a:srgbClr val="0A2540"/>
         </a:solidFill>
       </p:bgPr>
     </p:bg>
@@ -15242,7 +15242,7 @@
             <a:avLst/>
           </a:prstGeom>
           <a:solidFill>
-            <a:srgbClr val="00B4D8">
+            <a:srgbClr val="635BFF">
               <a:alpha val="4000"/>
             </a:srgbClr>
           </a:solidFill>
@@ -15319,7 +15319,7 @@
     <p:bg>
       <p:bgPr>
         <a:solidFill>
-          <a:srgbClr val="0F0F1A"/>
+          <a:srgbClr val="0A2540"/>
         </a:solidFill>
       </p:bgPr>
     </p:bg>
@@ -15352,7 +15352,7 @@
             <a:avLst/>
           </a:prstGeom>
           <a:solidFill>
-            <a:srgbClr val="00B4D8">
+            <a:srgbClr val="635BFF">
               <a:alpha val="4000"/>
             </a:srgbClr>
           </a:solidFill>
@@ -15425,11 +15425,11 @@
             <a:r>
               <a:rPr lang="en-US" sz="2800" dirty="0">
                 <a:solidFill>
-                  <a:srgbClr val="94A3B8"/>
-                </a:solidFill>
-                <a:latin typeface="Calibri" pitchFamily="34" charset="0"/>
-                <a:ea typeface="Calibri" pitchFamily="34" charset="-122"/>
-                <a:cs typeface="Calibri" pitchFamily="34" charset="-120"/>
+                  <a:srgbClr val="8B95A5"/>
+                </a:solidFill>
+                <a:latin typeface="Verdana" pitchFamily="34" charset="0"/>
+                <a:ea typeface="Verdana" pitchFamily="34" charset="-122"/>
+                <a:cs typeface="Verdana" pitchFamily="34" charset="-120"/>
               </a:rPr>
               <a:t>productivity gains for AI agents</a:t>
             </a:r>
@@ -15442,11 +15442,11 @@
             <a:r>
               <a:rPr lang="en-US" sz="2800" dirty="0">
                 <a:solidFill>
-                  <a:srgbClr val="94A3B8"/>
-                </a:solidFill>
-                <a:latin typeface="Calibri" pitchFamily="34" charset="0"/>
-                <a:ea typeface="Calibri" pitchFamily="34" charset="-122"/>
-                <a:cs typeface="Calibri" pitchFamily="34" charset="-120"/>
+                  <a:srgbClr val="8B95A5"/>
+                </a:solidFill>
+                <a:latin typeface="Verdana" pitchFamily="34" charset="0"/>
+                <a:ea typeface="Verdana" pitchFamily="34" charset="-122"/>
+                <a:cs typeface="Verdana" pitchFamily="34" charset="-120"/>
               </a:rPr>
               <a:t>in monorepos</a:t>
             </a:r>
@@ -15481,11 +15481,11 @@
             <a:r>
               <a:rPr lang="en-US" sz="1100" u="sng" dirty="0">
                 <a:solidFill>
-                  <a:srgbClr val="94A3B8"/>
-                </a:solidFill>
-                <a:latin typeface="Calibri" pitchFamily="34" charset="0"/>
-                <a:ea typeface="Calibri" pitchFamily="34" charset="-122"/>
-                <a:cs typeface="Calibri" pitchFamily="34" charset="-120"/>
+                  <a:srgbClr val="8B95A5"/>
+                </a:solidFill>
+                <a:latin typeface="Verdana" pitchFamily="34" charset="0"/>
+                <a:ea typeface="Verdana" pitchFamily="34" charset="-122"/>
+                <a:cs typeface="Verdana" pitchFamily="34" charset="-120"/>
                 <a:hlinkClick r:id="rId1" invalidUrl="" action="" tgtFrame="" tooltip="" history="1" highlightClick="0" endSnd="0">
                   <a:extLst>
                     <a:ext uri="{A12FA001-AC4F-418D-AE19-62706E023703}">
@@ -15514,7 +15514,7 @@
     <p:bg>
       <p:bgPr>
         <a:solidFill>
-          <a:srgbClr val="0F0F1A"/>
+          <a:srgbClr val="0A2540"/>
         </a:solidFill>
       </p:bgPr>
     </p:bg>
@@ -15547,7 +15547,7 @@
             <a:avLst/>
           </a:prstGeom>
           <a:solidFill>
-            <a:srgbClr val="00B4D8">
+            <a:srgbClr val="635BFF">
               <a:alpha val="4000"/>
             </a:srgbClr>
           </a:solidFill>
@@ -15624,7 +15624,7 @@
     <p:bg>
       <p:bgPr>
         <a:solidFill>
-          <a:srgbClr val="0F0F1A"/>
+          <a:srgbClr val="0A2540"/>
         </a:solidFill>
       </p:bgPr>
     </p:bg>
@@ -15657,7 +15657,7 @@
             <a:avLst/>
           </a:prstGeom>
           <a:solidFill>
-            <a:srgbClr val="00B4D8">
+            <a:srgbClr val="635BFF">
               <a:alpha val="4000"/>
             </a:srgbClr>
           </a:solidFill>
@@ -15691,7 +15691,7 @@
             <a:r>
               <a:rPr lang="en-US" sz="3600" b="1" dirty="0">
                 <a:solidFill>
-                  <a:srgbClr val="00B4D8"/>
+                  <a:srgbClr val="635BFF"/>
                 </a:solidFill>
                 <a:latin typeface="Georgia" pitchFamily="34" charset="0"/>
                 <a:ea typeface="Georgia" pitchFamily="34" charset="-122"/>
@@ -15730,11 +15730,11 @@
             <a:r>
               <a:rPr lang="en-US" sz="2200" dirty="0">
                 <a:solidFill>
-                  <a:srgbClr val="94A3B8"/>
-                </a:solidFill>
-                <a:latin typeface="Calibri" pitchFamily="34" charset="0"/>
-                <a:ea typeface="Calibri" pitchFamily="34" charset="-122"/>
-                <a:cs typeface="Calibri" pitchFamily="34" charset="-120"/>
+                  <a:srgbClr val="8B95A5"/>
+                </a:solidFill>
+                <a:latin typeface="Verdana" pitchFamily="34" charset="0"/>
+                <a:ea typeface="Verdana" pitchFamily="34" charset="-122"/>
+                <a:cs typeface="Verdana" pitchFamily="34" charset="-120"/>
               </a:rPr>
               <a:t>Latest features.</a:t>
             </a:r>
@@ -15747,11 +15747,11 @@
             <a:r>
               <a:rPr lang="en-US" sz="2200" dirty="0">
                 <a:solidFill>
-                  <a:srgbClr val="94A3B8"/>
-                </a:solidFill>
-                <a:latin typeface="Calibri" pitchFamily="34" charset="0"/>
-                <a:ea typeface="Calibri" pitchFamily="34" charset="-122"/>
-                <a:cs typeface="Calibri" pitchFamily="34" charset="-120"/>
+                  <a:srgbClr val="8B95A5"/>
+                </a:solidFill>
+                <a:latin typeface="Verdana" pitchFamily="34" charset="0"/>
+                <a:ea typeface="Verdana" pitchFamily="34" charset="-122"/>
+                <a:cs typeface="Verdana" pitchFamily="34" charset="-120"/>
               </a:rPr>
               <a:t>Always ahead</a:t>
             </a:r>
@@ -15764,11 +15764,11 @@
             <a:r>
               <a:rPr lang="en-US" sz="2200" dirty="0">
                 <a:solidFill>
-                  <a:srgbClr val="94A3B8"/>
-                </a:solidFill>
-                <a:latin typeface="Calibri" pitchFamily="34" charset="0"/>
-                <a:ea typeface="Calibri" pitchFamily="34" charset="-122"/>
-                <a:cs typeface="Calibri" pitchFamily="34" charset="-120"/>
+                  <a:srgbClr val="8B95A5"/>
+                </a:solidFill>
+                <a:latin typeface="Verdana" pitchFamily="34" charset="0"/>
+                <a:ea typeface="Verdana" pitchFamily="34" charset="-122"/>
+                <a:cs typeface="Verdana" pitchFamily="34" charset="-120"/>
               </a:rPr>
               <a:t>of the plugin.</a:t>
             </a:r>
@@ -15793,7 +15793,7 @@
           <a:noFill/>
           <a:ln w="12700">
             <a:solidFill>
-              <a:srgbClr val="00B4D8"/>
+              <a:srgbClr val="635BFF"/>
             </a:solidFill>
             <a:prstDash val="solid"/>
           </a:ln>
@@ -15826,7 +15826,7 @@
             <a:r>
               <a:rPr lang="en-US" sz="3600" b="1" dirty="0">
                 <a:solidFill>
-                  <a:srgbClr val="00B4D8"/>
+                  <a:srgbClr val="635BFF"/>
                 </a:solidFill>
                 <a:latin typeface="Georgia" pitchFamily="34" charset="0"/>
                 <a:ea typeface="Georgia" pitchFamily="34" charset="-122"/>
@@ -15865,11 +15865,11 @@
             <a:r>
               <a:rPr lang="en-US" sz="2200" dirty="0">
                 <a:solidFill>
-                  <a:srgbClr val="94A3B8"/>
-                </a:solidFill>
-                <a:latin typeface="Calibri" pitchFamily="34" charset="0"/>
-                <a:ea typeface="Calibri" pitchFamily="34" charset="-122"/>
-                <a:cs typeface="Calibri" pitchFamily="34" charset="-120"/>
+                  <a:srgbClr val="8B95A5"/>
+                </a:solidFill>
+                <a:latin typeface="Verdana" pitchFamily="34" charset="0"/>
+                <a:ea typeface="Verdana" pitchFamily="34" charset="-122"/>
+                <a:cs typeface="Verdana" pitchFamily="34" charset="-120"/>
               </a:rPr>
               <a:t>Parallel sessions.</a:t>
             </a:r>
@@ -15882,11 +15882,11 @@
             <a:r>
               <a:rPr lang="en-US" sz="2200" dirty="0">
                 <a:solidFill>
-                  <a:srgbClr val="94A3B8"/>
-                </a:solidFill>
-                <a:latin typeface="Calibri" pitchFamily="34" charset="0"/>
-                <a:ea typeface="Calibri" pitchFamily="34" charset="-122"/>
-                <a:cs typeface="Calibri" pitchFamily="34" charset="-120"/>
+                  <a:srgbClr val="8B95A5"/>
+                </a:solidFill>
+                <a:latin typeface="Verdana" pitchFamily="34" charset="0"/>
+                <a:ea typeface="Verdana" pitchFamily="34" charset="-122"/>
+                <a:cs typeface="Verdana" pitchFamily="34" charset="-120"/>
               </a:rPr>
               <a:t>One tab</a:t>
             </a:r>
@@ -15899,11 +15899,11 @@
             <a:r>
               <a:rPr lang="en-US" sz="2200" dirty="0">
                 <a:solidFill>
-                  <a:srgbClr val="94A3B8"/>
-                </a:solidFill>
-                <a:latin typeface="Calibri" pitchFamily="34" charset="0"/>
-                <a:ea typeface="Calibri" pitchFamily="34" charset="-122"/>
-                <a:cs typeface="Calibri" pitchFamily="34" charset="-120"/>
+                  <a:srgbClr val="8B95A5"/>
+                </a:solidFill>
+                <a:latin typeface="Verdana" pitchFamily="34" charset="0"/>
+                <a:ea typeface="Verdana" pitchFamily="34" charset="-122"/>
+                <a:cs typeface="Verdana" pitchFamily="34" charset="-120"/>
               </a:rPr>
               <a:t>per worktree.</a:t>
             </a:r>
@@ -15925,7 +15925,7 @@
     <p:bg>
       <p:bgPr>
         <a:solidFill>
-          <a:srgbClr val="0F0F1A"/>
+          <a:srgbClr val="0A2540"/>
         </a:solidFill>
       </p:bgPr>
     </p:bg>
@@ -15958,7 +15958,7 @@
             <a:avLst/>
           </a:prstGeom>
           <a:solidFill>
-            <a:srgbClr val="00B4D8">
+            <a:srgbClr val="635BFF">
               <a:alpha val="4000"/>
             </a:srgbClr>
           </a:solidFill>
@@ -16006,7 +16006,7 @@
             <a:r>
               <a:rPr lang="en-US" sz="10000" b="1" dirty="0">
                 <a:solidFill>
-                  <a:srgbClr val="94A3B8"/>
+                  <a:srgbClr val="8B95A5"/>
                 </a:solidFill>
                 <a:latin typeface="Georgia" pitchFamily="34" charset="0"/>
                 <a:ea typeface="Georgia" pitchFamily="34" charset="-122"/>
@@ -16020,7 +16020,7 @@
             <a:r>
               <a:rPr lang="en-US" sz="10000" b="1" dirty="0">
                 <a:solidFill>
-                  <a:srgbClr val="00B4D8"/>
+                  <a:srgbClr val="635BFF"/>
                 </a:solidFill>
                 <a:latin typeface="Georgia" pitchFamily="34" charset="0"/>
                 <a:ea typeface="Georgia" pitchFamily="34" charset="-122"/>
@@ -16059,11 +16059,11 @@
             <a:r>
               <a:rPr lang="en-US" sz="2800" dirty="0">
                 <a:solidFill>
-                  <a:srgbClr val="94A3B8"/>
-                </a:solidFill>
-                <a:latin typeface="Calibri" pitchFamily="34" charset="0"/>
-                <a:ea typeface="Calibri" pitchFamily="34" charset="-122"/>
-                <a:cs typeface="Calibri" pitchFamily="34" charset="-120"/>
+                  <a:srgbClr val="8B95A5"/>
+                </a:solidFill>
+                <a:latin typeface="Verdana" pitchFamily="34" charset="0"/>
+                <a:ea typeface="Verdana" pitchFamily="34" charset="-122"/>
+                <a:cs typeface="Verdana" pitchFamily="34" charset="-120"/>
               </a:rPr>
               <a:t>product engineering / building the machine</a:t>
             </a:r>
@@ -16085,7 +16085,7 @@
     <p:bg>
       <p:bgPr>
         <a:solidFill>
-          <a:srgbClr val="0F0F1A"/>
+          <a:srgbClr val="0A2540"/>
         </a:solidFill>
       </p:bgPr>
     </p:bg>
@@ -16118,7 +16118,7 @@
             <a:avLst/>
           </a:prstGeom>
           <a:solidFill>
-            <a:srgbClr val="00B4D8">
+            <a:srgbClr val="635BFF">
               <a:alpha val="4000"/>
             </a:srgbClr>
           </a:solidFill>
@@ -16208,11 +16208,11 @@
             <a:r>
               <a:rPr lang="en-US" sz="2800" dirty="0">
                 <a:solidFill>
-                  <a:srgbClr val="94A3B8"/>
-                </a:solidFill>
-                <a:latin typeface="Calibri" pitchFamily="34" charset="0"/>
-                <a:ea typeface="Calibri" pitchFamily="34" charset="-122"/>
-                <a:cs typeface="Calibri" pitchFamily="34" charset="-120"/>
+                  <a:srgbClr val="8B95A5"/>
+                </a:solidFill>
+                <a:latin typeface="Verdana" pitchFamily="34" charset="0"/>
+                <a:ea typeface="Verdana" pitchFamily="34" charset="-122"/>
+                <a:cs typeface="Verdana" pitchFamily="34" charset="-120"/>
               </a:rPr>
               <a:t>Best tool. Best model. Always.</a:t>
             </a:r>
@@ -16234,7 +16234,7 @@
     <p:bg>
       <p:bgPr>
         <a:solidFill>
-          <a:srgbClr val="0F0F1A"/>
+          <a:srgbClr val="0A2540"/>
         </a:solidFill>
       </p:bgPr>
     </p:bg>
@@ -16267,7 +16267,7 @@
             <a:avLst/>
           </a:prstGeom>
           <a:solidFill>
-            <a:srgbClr val="00B4D8">
+            <a:srgbClr val="635BFF">
               <a:alpha val="4000"/>
             </a:srgbClr>
           </a:solidFill>
@@ -16340,11 +16340,11 @@
             <a:r>
               <a:rPr lang="en-US" sz="2800" dirty="0">
                 <a:solidFill>
-                  <a:srgbClr val="94A3B8"/>
-                </a:solidFill>
-                <a:latin typeface="Calibri" pitchFamily="34" charset="0"/>
-                <a:ea typeface="Calibri" pitchFamily="34" charset="-122"/>
-                <a:cs typeface="Calibri" pitchFamily="34" charset="-120"/>
+                  <a:srgbClr val="8B95A5"/>
+                </a:solidFill>
+                <a:latin typeface="Verdana" pitchFamily="34" charset="0"/>
+                <a:ea typeface="Verdana" pitchFamily="34" charset="-122"/>
+                <a:cs typeface="Verdana" pitchFamily="34" charset="-120"/>
               </a:rPr>
               <a:t>of Claude Code is written</a:t>
             </a:r>
@@ -16357,11 +16357,11 @@
             <a:r>
               <a:rPr lang="en-US" sz="2800" dirty="0">
                 <a:solidFill>
-                  <a:srgbClr val="94A3B8"/>
-                </a:solidFill>
-                <a:latin typeface="Calibri" pitchFamily="34" charset="0"/>
-                <a:ea typeface="Calibri" pitchFamily="34" charset="-122"/>
-                <a:cs typeface="Calibri" pitchFamily="34" charset="-120"/>
+                  <a:srgbClr val="8B95A5"/>
+                </a:solidFill>
+                <a:latin typeface="Verdana" pitchFamily="34" charset="0"/>
+                <a:ea typeface="Verdana" pitchFamily="34" charset="-122"/>
+                <a:cs typeface="Verdana" pitchFamily="34" charset="-120"/>
               </a:rPr>
               <a:t>by Claude Code</a:t>
             </a:r>
@@ -16396,11 +16396,11 @@
             <a:r>
               <a:rPr lang="en-US" sz="1100" u="sng" dirty="0">
                 <a:solidFill>
-                  <a:srgbClr val="94A3B8"/>
-                </a:solidFill>
-                <a:latin typeface="Calibri" pitchFamily="34" charset="0"/>
-                <a:ea typeface="Calibri" pitchFamily="34" charset="-122"/>
-                <a:cs typeface="Calibri" pitchFamily="34" charset="-120"/>
+                  <a:srgbClr val="8B95A5"/>
+                </a:solidFill>
+                <a:latin typeface="Verdana" pitchFamily="34" charset="0"/>
+                <a:ea typeface="Verdana" pitchFamily="34" charset="-122"/>
+                <a:cs typeface="Verdana" pitchFamily="34" charset="-120"/>
                 <a:hlinkClick r:id="rId1" invalidUrl="" action="" tgtFrame="" tooltip="" history="1" highlightClick="0" endSnd="0">
                   <a:extLst>
                     <a:ext uri="{A12FA001-AC4F-418D-AE19-62706E023703}">
@@ -16429,7 +16429,7 @@
     <p:bg>
       <p:bgPr>
         <a:solidFill>
-          <a:srgbClr val="F8F9FA"/>
+          <a:srgbClr val="FFFFFF"/>
         </a:solidFill>
       </p:bgPr>
     </p:bg>
@@ -16474,7 +16474,7 @@
             <a:r>
               <a:rPr lang="en-US" sz="3600" b="1" dirty="0">
                 <a:solidFill>
-                  <a:srgbClr val="00B4D8"/>
+                  <a:srgbClr val="635BFF"/>
                 </a:solidFill>
                 <a:latin typeface="Georgia" pitchFamily="34" charset="0"/>
                 <a:ea typeface="Georgia" pitchFamily="34" charset="-122"/>
@@ -16513,11 +16513,11 @@
             <a:r>
               <a:rPr lang="en-US" sz="2200" dirty="0">
                 <a:solidFill>
-                  <a:srgbClr val="1E293B"/>
-                </a:solidFill>
-                <a:latin typeface="Calibri" pitchFamily="34" charset="0"/>
-                <a:ea typeface="Calibri" pitchFamily="34" charset="-122"/>
-                <a:cs typeface="Calibri" pitchFamily="34" charset="-120"/>
+                  <a:srgbClr val="1A1F36"/>
+                </a:solidFill>
+                <a:latin typeface="Verdana" pitchFamily="34" charset="0"/>
+                <a:ea typeface="Verdana" pitchFamily="34" charset="-122"/>
+                <a:cs typeface="Verdana" pitchFamily="34" charset="-120"/>
               </a:rPr>
               <a:t>Claude Code via Anthropic</a:t>
             </a:r>
@@ -16530,11 +16530,11 @@
             <a:r>
               <a:rPr lang="en-US" sz="2200" dirty="0">
                 <a:solidFill>
-                  <a:srgbClr val="1E293B"/>
-                </a:solidFill>
-                <a:latin typeface="Calibri" pitchFamily="34" charset="0"/>
-                <a:ea typeface="Calibri" pitchFamily="34" charset="-122"/>
-                <a:cs typeface="Calibri" pitchFamily="34" charset="-120"/>
+                  <a:srgbClr val="1A1F36"/>
+                </a:solidFill>
+                <a:latin typeface="Verdana" pitchFamily="34" charset="0"/>
+                <a:ea typeface="Verdana" pitchFamily="34" charset="-122"/>
+                <a:cs typeface="Verdana" pitchFamily="34" charset="-120"/>
               </a:rPr>
               <a:t>Latest models, best features</a:t>
             </a:r>
@@ -16547,11 +16547,11 @@
             <a:r>
               <a:rPr lang="en-US" sz="2200" dirty="0">
                 <a:solidFill>
-                  <a:srgbClr val="1E293B"/>
-                </a:solidFill>
-                <a:latin typeface="Calibri" pitchFamily="34" charset="0"/>
-                <a:ea typeface="Calibri" pitchFamily="34" charset="-122"/>
-                <a:cs typeface="Calibri" pitchFamily="34" charset="-120"/>
+                  <a:srgbClr val="1A1F36"/>
+                </a:solidFill>
+                <a:latin typeface="Verdana" pitchFamily="34" charset="0"/>
+                <a:ea typeface="Verdana" pitchFamily="34" charset="-122"/>
+                <a:cs typeface="Verdana" pitchFamily="34" charset="-120"/>
               </a:rPr>
               <a:t>All general coding</a:t>
             </a:r>
@@ -16576,7 +16576,7 @@
           <a:noFill/>
           <a:ln w="12700">
             <a:solidFill>
-              <a:srgbClr val="94A3B8"/>
+              <a:srgbClr val="8B95A5"/>
             </a:solidFill>
             <a:prstDash val="solid"/>
           </a:ln>
@@ -16609,7 +16609,7 @@
             <a:r>
               <a:rPr lang="en-US" sz="3600" b="1" dirty="0">
                 <a:solidFill>
-                  <a:srgbClr val="E63946"/>
+                  <a:srgbClr val="FF6B8A"/>
                 </a:solidFill>
                 <a:latin typeface="Georgia" pitchFamily="34" charset="0"/>
                 <a:ea typeface="Georgia" pitchFamily="34" charset="-122"/>
@@ -16648,11 +16648,11 @@
             <a:r>
               <a:rPr lang="en-US" sz="2200" dirty="0">
                 <a:solidFill>
-                  <a:srgbClr val="1E293B"/>
-                </a:solidFill>
-                <a:latin typeface="Calibri" pitchFamily="34" charset="0"/>
-                <a:ea typeface="Calibri" pitchFamily="34" charset="-122"/>
-                <a:cs typeface="Calibri" pitchFamily="34" charset="-120"/>
+                  <a:srgbClr val="1A1F36"/>
+                </a:solidFill>
+                <a:latin typeface="Verdana" pitchFamily="34" charset="0"/>
+                <a:ea typeface="Verdana" pitchFamily="34" charset="-122"/>
+                <a:cs typeface="Verdana" pitchFamily="34" charset="-120"/>
               </a:rPr>
               <a:t>Claude Code via GCP</a:t>
             </a:r>
@@ -16665,11 +16665,11 @@
             <a:r>
               <a:rPr lang="en-US" sz="2200" dirty="0">
                 <a:solidFill>
-                  <a:srgbClr val="1E293B"/>
-                </a:solidFill>
-                <a:latin typeface="Calibri" pitchFamily="34" charset="0"/>
-                <a:ea typeface="Calibri" pitchFamily="34" charset="-122"/>
-                <a:cs typeface="Calibri" pitchFamily="34" charset="-120"/>
+                  <a:srgbClr val="1A1F36"/>
+                </a:solidFill>
+                <a:latin typeface="Verdana" pitchFamily="34" charset="0"/>
+                <a:ea typeface="Verdana" pitchFamily="34" charset="-122"/>
+                <a:cs typeface="Verdana" pitchFamily="34" charset="-120"/>
               </a:rPr>
               <a:t>EU region models</a:t>
             </a:r>
@@ -16682,11 +16682,11 @@
             <a:r>
               <a:rPr lang="en-US" sz="2200" dirty="0">
                 <a:solidFill>
-                  <a:srgbClr val="1E293B"/>
-                </a:solidFill>
-                <a:latin typeface="Calibri" pitchFamily="34" charset="0"/>
-                <a:ea typeface="Calibri" pitchFamily="34" charset="-122"/>
-                <a:cs typeface="Calibri" pitchFamily="34" charset="-120"/>
+                  <a:srgbClr val="1A1F36"/>
+                </a:solidFill>
+                <a:latin typeface="Verdana" pitchFamily="34" charset="0"/>
+                <a:ea typeface="Verdana" pitchFamily="34" charset="-122"/>
+                <a:cs typeface="Verdana" pitchFamily="34" charset="-120"/>
               </a:rPr>
               <a:t>Managed tool calls</a:t>
             </a:r>
@@ -16699,11 +16699,11 @@
             <a:r>
               <a:rPr lang="en-US" sz="2200" dirty="0">
                 <a:solidFill>
-                  <a:srgbClr val="1E293B"/>
-                </a:solidFill>
-                <a:latin typeface="Calibri" pitchFamily="34" charset="0"/>
-                <a:ea typeface="Calibri" pitchFamily="34" charset="-122"/>
-                <a:cs typeface="Calibri" pitchFamily="34" charset="-120"/>
+                  <a:srgbClr val="1A1F36"/>
+                </a:solidFill>
+                <a:latin typeface="Verdana" pitchFamily="34" charset="0"/>
+                <a:ea typeface="Verdana" pitchFamily="34" charset="-122"/>
+                <a:cs typeface="Verdana" pitchFamily="34" charset="-120"/>
               </a:rPr>
               <a:t>Production logs, user data</a:t>
             </a:r>
@@ -16725,7 +16725,7 @@
     <p:bg>
       <p:bgPr>
         <a:solidFill>
-          <a:srgbClr val="0F0F1A"/>
+          <a:srgbClr val="0A2540"/>
         </a:solidFill>
       </p:bgPr>
     </p:bg>
@@ -16758,7 +16758,7 @@
             <a:avLst/>
           </a:prstGeom>
           <a:solidFill>
-            <a:srgbClr val="00B4D8">
+            <a:srgbClr val="635BFF">
               <a:alpha val="4000"/>
             </a:srgbClr>
           </a:solidFill>
@@ -16792,7 +16792,7 @@
             <a:r>
               <a:rPr lang="en-US" sz="4400" b="1" dirty="0">
                 <a:solidFill>
-                  <a:srgbClr val="00B4D8"/>
+                  <a:srgbClr val="635BFF"/>
                 </a:solidFill>
                 <a:latin typeface="Georgia" pitchFamily="34" charset="0"/>
                 <a:ea typeface="Georgia" pitchFamily="34" charset="-122"/>
@@ -16809,7 +16809,7 @@
             <a:r>
               <a:rPr lang="en-US" sz="4400" b="1" dirty="0">
                 <a:solidFill>
-                  <a:srgbClr val="00B4D8"/>
+                  <a:srgbClr val="635BFF"/>
                 </a:solidFill>
                 <a:latin typeface="Georgia" pitchFamily="34" charset="0"/>
                 <a:ea typeface="Georgia" pitchFamily="34" charset="-122"/>
@@ -16835,7 +16835,7 @@
     <p:bg>
       <p:bgPr>
         <a:solidFill>
-          <a:srgbClr val="0F0F1A"/>
+          <a:srgbClr val="0A2540"/>
         </a:solidFill>
       </p:bgPr>
     </p:bg>
@@ -16868,7 +16868,7 @@
             <a:avLst/>
           </a:prstGeom>
           <a:solidFill>
-            <a:srgbClr val="00B4D8">
+            <a:srgbClr val="635BFF">
               <a:alpha val="4000"/>
             </a:srgbClr>
           </a:solidFill>
@@ -16902,7 +16902,7 @@
             <a:r>
               <a:rPr lang="en-US" sz="2800" i="1" dirty="0">
                 <a:solidFill>
-                  <a:srgbClr val="00B4D8"/>
+                  <a:srgbClr val="635BFF"/>
                 </a:solidFill>
                 <a:latin typeface="Georgia" pitchFamily="34" charset="0"/>
                 <a:ea typeface="Georgia" pitchFamily="34" charset="-122"/>
@@ -16919,7 +16919,7 @@
             <a:r>
               <a:rPr lang="en-US" sz="2800" i="1" dirty="0">
                 <a:solidFill>
-                  <a:srgbClr val="00B4D8"/>
+                  <a:srgbClr val="635BFF"/>
                 </a:solidFill>
                 <a:latin typeface="Georgia" pitchFamily="34" charset="0"/>
                 <a:ea typeface="Georgia" pitchFamily="34" charset="-122"/>
@@ -16945,7 +16945,7 @@
     <p:bg>
       <p:bgPr>
         <a:solidFill>
-          <a:srgbClr val="0F0F1A"/>
+          <a:srgbClr val="0A2540"/>
         </a:solidFill>
       </p:bgPr>
     </p:bg>
@@ -16978,7 +16978,7 @@
             <a:avLst/>
           </a:prstGeom>
           <a:solidFill>
-            <a:srgbClr val="00B4D8">
+            <a:srgbClr val="635BFF">
               <a:alpha val="4000"/>
             </a:srgbClr>
           </a:solidFill>
@@ -17051,11 +17051,11 @@
             <a:r>
               <a:rPr lang="en-US" sz="2400" b="1" dirty="0">
                 <a:solidFill>
-                  <a:srgbClr val="00B4D8"/>
-                </a:solidFill>
-                <a:latin typeface="Calibri" pitchFamily="34" charset="0"/>
-                <a:ea typeface="Calibri" pitchFamily="34" charset="-122"/>
-                <a:cs typeface="Calibri" pitchFamily="34" charset="-120"/>
+                  <a:srgbClr val="635BFF"/>
+                </a:solidFill>
+                <a:latin typeface="Verdana" pitchFamily="34" charset="0"/>
+                <a:ea typeface="Verdana" pitchFamily="34" charset="-122"/>
+                <a:cs typeface="Verdana" pitchFamily="34" charset="-120"/>
               </a:rPr>
               <a:t>Perfect context</a:t>
             </a:r>
@@ -17068,11 +17068,11 @@
             <a:r>
               <a:rPr lang="en-US" sz="2400" dirty="0">
                 <a:solidFill>
-                  <a:srgbClr val="94A3B8"/>
-                </a:solidFill>
-                <a:latin typeface="Calibri" pitchFamily="34" charset="0"/>
-                <a:ea typeface="Calibri" pitchFamily="34" charset="-122"/>
-                <a:cs typeface="Calibri" pitchFamily="34" charset="-120"/>
+                  <a:srgbClr val="8B95A5"/>
+                </a:solidFill>
+                <a:latin typeface="Verdana" pitchFamily="34" charset="0"/>
+                <a:ea typeface="Verdana" pitchFamily="34" charset="-122"/>
+                <a:cs typeface="Verdana" pitchFamily="34" charset="-120"/>
               </a:rPr>
               <a:t>  Context7, Language Servers, Rules, Monorepo</a:t>
             </a:r>
@@ -17091,11 +17091,11 @@
             <a:r>
               <a:rPr lang="en-US" sz="2400" b="1" dirty="0">
                 <a:solidFill>
-                  <a:srgbClr val="00B4D8"/>
-                </a:solidFill>
-                <a:latin typeface="Calibri" pitchFamily="34" charset="0"/>
-                <a:ea typeface="Calibri" pitchFamily="34" charset="-122"/>
-                <a:cs typeface="Calibri" pitchFamily="34" charset="-120"/>
+                  <a:srgbClr val="635BFF"/>
+                </a:solidFill>
+                <a:latin typeface="Verdana" pitchFamily="34" charset="0"/>
+                <a:ea typeface="Verdana" pitchFamily="34" charset="-122"/>
+                <a:cs typeface="Verdana" pitchFamily="34" charset="-120"/>
               </a:rPr>
               <a:t>No hidden failures</a:t>
             </a:r>
@@ -17108,11 +17108,11 @@
             <a:r>
               <a:rPr lang="en-US" sz="2400" dirty="0">
                 <a:solidFill>
-                  <a:srgbClr val="94A3B8"/>
-                </a:solidFill>
-                <a:latin typeface="Calibri" pitchFamily="34" charset="0"/>
-                <a:ea typeface="Calibri" pitchFamily="34" charset="-122"/>
-                <a:cs typeface="Calibri" pitchFamily="34" charset="-120"/>
+                  <a:srgbClr val="8B95A5"/>
+                </a:solidFill>
+                <a:latin typeface="Verdana" pitchFamily="34" charset="0"/>
+                <a:ea typeface="Verdana" pitchFamily="34" charset="-122"/>
+                <a:cs typeface="Verdana" pitchFamily="34" charset="-120"/>
               </a:rPr>
               <a:t>  Firecrawl, Tool usage rules</a:t>
             </a:r>
@@ -17131,11 +17131,11 @@
             <a:r>
               <a:rPr lang="en-US" sz="2400" b="1" dirty="0">
                 <a:solidFill>
-                  <a:srgbClr val="00B4D8"/>
-                </a:solidFill>
-                <a:latin typeface="Calibri" pitchFamily="34" charset="0"/>
-                <a:ea typeface="Calibri" pitchFamily="34" charset="-122"/>
-                <a:cs typeface="Calibri" pitchFamily="34" charset="-120"/>
+                  <a:srgbClr val="635BFF"/>
+                </a:solidFill>
+                <a:latin typeface="Verdana" pitchFamily="34" charset="0"/>
+                <a:ea typeface="Verdana" pitchFamily="34" charset="-122"/>
+                <a:cs typeface="Verdana" pitchFamily="34" charset="-120"/>
               </a:rPr>
               <a:t>Gated workflow</a:t>
             </a:r>
@@ -17148,11 +17148,11 @@
             <a:r>
               <a:rPr lang="en-US" sz="2400" dirty="0">
                 <a:solidFill>
-                  <a:srgbClr val="94A3B8"/>
-                </a:solidFill>
-                <a:latin typeface="Calibri" pitchFamily="34" charset="0"/>
-                <a:ea typeface="Calibri" pitchFamily="34" charset="-122"/>
-                <a:cs typeface="Calibri" pitchFamily="34" charset="-120"/>
+                  <a:srgbClr val="8B95A5"/>
+                </a:solidFill>
+                <a:latin typeface="Verdana" pitchFamily="34" charset="0"/>
+                <a:ea typeface="Verdana" pitchFamily="34" charset="-122"/>
+                <a:cs typeface="Verdana" pitchFamily="34" charset="-120"/>
               </a:rPr>
               <a:t>  Superpowers, Two-layer verification, CI/CD</a:t>
             </a:r>
@@ -17174,7 +17174,7 @@
     <p:bg>
       <p:bgPr>
         <a:solidFill>
-          <a:srgbClr val="0F0F1A"/>
+          <a:srgbClr val="0A2540"/>
         </a:solidFill>
       </p:bgPr>
     </p:bg>
@@ -17207,7 +17207,7 @@
             <a:avLst/>
           </a:prstGeom>
           <a:solidFill>
-            <a:srgbClr val="00B4D8">
+            <a:srgbClr val="635BFF">
               <a:alpha val="4000"/>
             </a:srgbClr>
           </a:solidFill>
@@ -17284,7 +17284,7 @@
     <p:bg>
       <p:bgPr>
         <a:solidFill>
-          <a:srgbClr val="0F0F1A"/>
+          <a:srgbClr val="0A2540"/>
         </a:solidFill>
       </p:bgPr>
     </p:bg>
@@ -17317,7 +17317,7 @@
             <a:avLst/>
           </a:prstGeom>
           <a:solidFill>
-            <a:srgbClr val="00B4D8">
+            <a:srgbClr val="635BFF">
               <a:alpha val="4000"/>
             </a:srgbClr>
           </a:solidFill>
@@ -17351,7 +17351,7 @@
             <a:r>
               <a:rPr lang="en-US" sz="5400" b="1" dirty="0">
                 <a:solidFill>
-                  <a:srgbClr val="00B4D8"/>
+                  <a:srgbClr val="635BFF"/>
                 </a:solidFill>
                 <a:latin typeface="Georgia" pitchFamily="34" charset="0"/>
                 <a:ea typeface="Georgia" pitchFamily="34" charset="-122"/>
@@ -17368,7 +17368,7 @@
             <a:r>
               <a:rPr lang="en-US" sz="5400" b="1" dirty="0">
                 <a:solidFill>
-                  <a:srgbClr val="00B4D8"/>
+                  <a:srgbClr val="635BFF"/>
                 </a:solidFill>
                 <a:latin typeface="Georgia" pitchFamily="34" charset="0"/>
                 <a:ea typeface="Georgia" pitchFamily="34" charset="-122"/>
@@ -17394,7 +17394,7 @@
     <p:bg>
       <p:bgPr>
         <a:solidFill>
-          <a:srgbClr val="0F0F1A"/>
+          <a:srgbClr val="0A2540"/>
         </a:solidFill>
       </p:bgPr>
     </p:bg>
@@ -17427,7 +17427,7 @@
             <a:avLst/>
           </a:prstGeom>
           <a:solidFill>
-            <a:srgbClr val="00B4D8">
+            <a:srgbClr val="635BFF">
               <a:alpha val="4000"/>
             </a:srgbClr>
           </a:solidFill>
@@ -17461,7 +17461,7 @@
             <a:r>
               <a:rPr lang="en-US" sz="2800" i="1" dirty="0">
                 <a:solidFill>
-                  <a:srgbClr val="00B4D8"/>
+                  <a:srgbClr val="635BFF"/>
                 </a:solidFill>
                 <a:latin typeface="Georgia" pitchFamily="34" charset="0"/>
                 <a:ea typeface="Georgia" pitchFamily="34" charset="-122"/>
@@ -17487,7 +17487,7 @@
     <p:bg>
       <p:bgPr>
         <a:solidFill>
-          <a:srgbClr val="0F0F1A"/>
+          <a:srgbClr val="0A2540"/>
         </a:solidFill>
       </p:bgPr>
     </p:bg>
@@ -17520,7 +17520,7 @@
             <a:avLst/>
           </a:prstGeom>
           <a:solidFill>
-            <a:srgbClr val="00B4D8">
+            <a:srgbClr val="635BFF">
               <a:alpha val="4000"/>
             </a:srgbClr>
           </a:solidFill>
@@ -17554,7 +17554,7 @@
             <a:r>
               <a:rPr lang="en-US" sz="8000" b="1" dirty="0">
                 <a:solidFill>
-                  <a:srgbClr val="E63946"/>
+                  <a:srgbClr val="FF6B8A"/>
                 </a:solidFill>
                 <a:latin typeface="Georgia" pitchFamily="34" charset="0"/>
                 <a:ea typeface="Georgia" pitchFamily="34" charset="-122"/>
@@ -17571,7 +17571,7 @@
             <a:r>
               <a:rPr lang="en-US" sz="8000" b="1" dirty="0">
                 <a:solidFill>
-                  <a:srgbClr val="E63946"/>
+                  <a:srgbClr val="FF6B8A"/>
                 </a:solidFill>
                 <a:latin typeface="Georgia" pitchFamily="34" charset="0"/>
                 <a:ea typeface="Georgia" pitchFamily="34" charset="-122"/>
@@ -17610,11 +17610,11 @@
             <a:r>
               <a:rPr lang="en-US" sz="2800" dirty="0">
                 <a:solidFill>
-                  <a:srgbClr val="94A3B8"/>
-                </a:solidFill>
-                <a:latin typeface="Calibri" pitchFamily="34" charset="0"/>
-                <a:ea typeface="Calibri" pitchFamily="34" charset="-122"/>
-                <a:cs typeface="Calibri" pitchFamily="34" charset="-120"/>
+                  <a:srgbClr val="8B95A5"/>
+                </a:solidFill>
+                <a:latin typeface="Verdana" pitchFamily="34" charset="0"/>
+                <a:ea typeface="Verdana" pitchFamily="34" charset="-122"/>
+                <a:cs typeface="Verdana" pitchFamily="34" charset="-120"/>
               </a:rPr>
               <a:t>when developers rely on AI</a:t>
             </a:r>
@@ -17627,11 +17627,11 @@
             <a:r>
               <a:rPr lang="en-US" sz="2800" dirty="0">
                 <a:solidFill>
-                  <a:srgbClr val="94A3B8"/>
-                </a:solidFill>
-                <a:latin typeface="Calibri" pitchFamily="34" charset="0"/>
-                <a:ea typeface="Calibri" pitchFamily="34" charset="-122"/>
-                <a:cs typeface="Calibri" pitchFamily="34" charset="-120"/>
+                  <a:srgbClr val="8B95A5"/>
+                </a:solidFill>
+                <a:latin typeface="Verdana" pitchFamily="34" charset="0"/>
+                <a:ea typeface="Verdana" pitchFamily="34" charset="-122"/>
+                <a:cs typeface="Verdana" pitchFamily="34" charset="-120"/>
               </a:rPr>
               <a:t>without understanding it</a:t>
             </a:r>
@@ -17666,11 +17666,11 @@
             <a:r>
               <a:rPr lang="en-US" sz="1100" u="sng" dirty="0">
                 <a:solidFill>
-                  <a:srgbClr val="94A3B8"/>
-                </a:solidFill>
-                <a:latin typeface="Calibri" pitchFamily="34" charset="0"/>
-                <a:ea typeface="Calibri" pitchFamily="34" charset="-122"/>
-                <a:cs typeface="Calibri" pitchFamily="34" charset="-120"/>
+                  <a:srgbClr val="8B95A5"/>
+                </a:solidFill>
+                <a:latin typeface="Verdana" pitchFamily="34" charset="0"/>
+                <a:ea typeface="Verdana" pitchFamily="34" charset="-122"/>
+                <a:cs typeface="Verdana" pitchFamily="34" charset="-120"/>
                 <a:hlinkClick r:id="rId1" invalidUrl="" action="" tgtFrame="" tooltip="" history="1" highlightClick="0" endSnd="0">
                   <a:extLst>
                     <a:ext uri="{A12FA001-AC4F-418D-AE19-62706E023703}">
@@ -17699,7 +17699,7 @@
     <p:bg>
       <p:bgPr>
         <a:solidFill>
-          <a:srgbClr val="0F0F1A"/>
+          <a:srgbClr val="0A2540"/>
         </a:solidFill>
       </p:bgPr>
     </p:bg>
@@ -17732,7 +17732,7 @@
             <a:avLst/>
           </a:prstGeom>
           <a:solidFill>
-            <a:srgbClr val="00B4D8">
+            <a:srgbClr val="635BFF">
               <a:alpha val="4000"/>
             </a:srgbClr>
           </a:solidFill>
@@ -17766,7 +17766,7 @@
             <a:r>
               <a:rPr lang="en-US" sz="12000" b="1" dirty="0">
                 <a:solidFill>
-                  <a:srgbClr val="E63946"/>
+                  <a:srgbClr val="FF6B8A"/>
                 </a:solidFill>
                 <a:latin typeface="Georgia" pitchFamily="34" charset="0"/>
                 <a:ea typeface="Georgia" pitchFamily="34" charset="-122"/>
@@ -17805,11 +17805,11 @@
             <a:r>
               <a:rPr lang="en-US" sz="2800" dirty="0">
                 <a:solidFill>
-                  <a:srgbClr val="94A3B8"/>
-                </a:solidFill>
-                <a:latin typeface="Calibri" pitchFamily="34" charset="0"/>
-                <a:ea typeface="Calibri" pitchFamily="34" charset="-122"/>
-                <a:cs typeface="Calibri" pitchFamily="34" charset="-120"/>
+                  <a:srgbClr val="8B95A5"/>
+                </a:solidFill>
+                <a:latin typeface="Verdana" pitchFamily="34" charset="0"/>
+                <a:ea typeface="Verdana" pitchFamily="34" charset="-122"/>
+                <a:cs typeface="Verdana" pitchFamily="34" charset="-120"/>
               </a:rPr>
               <a:t>more issues than human-written code</a:t>
             </a:r>
@@ -17844,11 +17844,11 @@
             <a:r>
               <a:rPr lang="en-US" sz="1100" u="sng" dirty="0">
                 <a:solidFill>
-                  <a:srgbClr val="94A3B8"/>
-                </a:solidFill>
-                <a:latin typeface="Calibri" pitchFamily="34" charset="0"/>
-                <a:ea typeface="Calibri" pitchFamily="34" charset="-122"/>
-                <a:cs typeface="Calibri" pitchFamily="34" charset="-120"/>
+                  <a:srgbClr val="8B95A5"/>
+                </a:solidFill>
+                <a:latin typeface="Verdana" pitchFamily="34" charset="0"/>
+                <a:ea typeface="Verdana" pitchFamily="34" charset="-122"/>
+                <a:cs typeface="Verdana" pitchFamily="34" charset="-120"/>
                 <a:hlinkClick r:id="rId1" invalidUrl="" action="" tgtFrame="" tooltip="" history="1" highlightClick="0" endSnd="0">
                   <a:extLst>
                     <a:ext uri="{A12FA001-AC4F-418D-AE19-62706E023703}">
@@ -17877,7 +17877,7 @@
     <p:bg>
       <p:bgPr>
         <a:solidFill>
-          <a:srgbClr val="0F0F1A"/>
+          <a:srgbClr val="0A2540"/>
         </a:solidFill>
       </p:bgPr>
     </p:bg>
@@ -17910,7 +17910,7 @@
             <a:avLst/>
           </a:prstGeom>
           <a:solidFill>
-            <a:srgbClr val="00B4D8">
+            <a:srgbClr val="635BFF">
               <a:alpha val="4000"/>
             </a:srgbClr>
           </a:solidFill>
@@ -17944,7 +17944,7 @@
             <a:r>
               <a:rPr lang="en-US" sz="12000" b="1" dirty="0">
                 <a:solidFill>
-                  <a:srgbClr val="E63946"/>
+                  <a:srgbClr val="FF6B8A"/>
                 </a:solidFill>
                 <a:latin typeface="Georgia" pitchFamily="34" charset="0"/>
                 <a:ea typeface="Georgia" pitchFamily="34" charset="-122"/>
@@ -17983,11 +17983,11 @@
             <a:r>
               <a:rPr lang="en-US" sz="2800" dirty="0">
                 <a:solidFill>
-                  <a:srgbClr val="94A3B8"/>
-                </a:solidFill>
-                <a:latin typeface="Calibri" pitchFamily="34" charset="0"/>
-                <a:ea typeface="Calibri" pitchFamily="34" charset="-122"/>
-                <a:cs typeface="Calibri" pitchFamily="34" charset="-120"/>
+                  <a:srgbClr val="8B95A5"/>
+                </a:solidFill>
+                <a:latin typeface="Verdana" pitchFamily="34" charset="0"/>
+                <a:ea typeface="Verdana" pitchFamily="34" charset="-122"/>
+                <a:cs typeface="Verdana" pitchFamily="34" charset="-120"/>
               </a:rPr>
               <a:t>of AI-generated code</a:t>
             </a:r>
@@ -18000,11 +18000,11 @@
             <a:r>
               <a:rPr lang="en-US" sz="2800" dirty="0">
                 <a:solidFill>
-                  <a:srgbClr val="94A3B8"/>
-                </a:solidFill>
-                <a:latin typeface="Calibri" pitchFamily="34" charset="0"/>
-                <a:ea typeface="Calibri" pitchFamily="34" charset="-122"/>
-                <a:cs typeface="Calibri" pitchFamily="34" charset="-120"/>
+                  <a:srgbClr val="8B95A5"/>
+                </a:solidFill>
+                <a:latin typeface="Verdana" pitchFamily="34" charset="0"/>
+                <a:ea typeface="Verdana" pitchFamily="34" charset="-122"/>
+                <a:cs typeface="Verdana" pitchFamily="34" charset="-120"/>
               </a:rPr>
               <a:t>fails security tests</a:t>
             </a:r>
@@ -18039,11 +18039,11 @@
             <a:r>
               <a:rPr lang="en-US" sz="1100" u="sng" dirty="0">
                 <a:solidFill>
-                  <a:srgbClr val="94A3B8"/>
-                </a:solidFill>
-                <a:latin typeface="Calibri" pitchFamily="34" charset="0"/>
-                <a:ea typeface="Calibri" pitchFamily="34" charset="-122"/>
-                <a:cs typeface="Calibri" pitchFamily="34" charset="-120"/>
+                  <a:srgbClr val="8B95A5"/>
+                </a:solidFill>
+                <a:latin typeface="Verdana" pitchFamily="34" charset="0"/>
+                <a:ea typeface="Verdana" pitchFamily="34" charset="-122"/>
+                <a:cs typeface="Verdana" pitchFamily="34" charset="-120"/>
                 <a:hlinkClick r:id="rId1" invalidUrl="" action="" tgtFrame="" tooltip="" history="1" highlightClick="0" endSnd="0">
                   <a:extLst>
                     <a:ext uri="{A12FA001-AC4F-418D-AE19-62706E023703}">

--- a/decks/builder/builder.pptx
+++ b/decks/builder/builder.pptx
@@ -8270,8 +8270,8 @@
         </p:nvSpPr>
         <p:spPr>
           <a:xfrm>
-            <a:off x="457200" y="1463040"/>
-            <a:ext cx="1097280" cy="640080"/>
+            <a:off x="192024" y="1463040"/>
+            <a:ext cx="1188720" cy="640080"/>
           </a:xfrm>
           <a:prstGeom prst="roundRect">
             <a:avLst>
@@ -8283,7 +8283,7 @@
               <a:alpha val="50000"/>
             </a:srgbClr>
           </a:solidFill>
-          <a:ln w="12700">
+          <a:ln w="19050">
             <a:solidFill>
               <a:srgbClr val="8B95A5"/>
             </a:solidFill>
@@ -8299,8 +8299,8 @@
         </p:nvSpPr>
         <p:spPr>
           <a:xfrm>
-            <a:off x="457200" y="1463040"/>
-            <a:ext cx="1097280" cy="640080"/>
+            <a:off x="192024" y="1463040"/>
+            <a:ext cx="1188720" cy="640080"/>
           </a:xfrm>
           <a:prstGeom prst="rect">
             <a:avLst/>
@@ -8309,14 +8309,16 @@
           <a:ln/>
         </p:spPr>
         <p:txBody>
-          <a:bodyPr wrap="square" lIns="0" tIns="0" rIns="0" bIns="0" rtlCol="0" anchor="ctr"/>
-          <a:lstStyle/>
-          <a:p>
-            <a:pPr algn="ctr" indent="0" marL="0">
-              <a:buNone/>
-            </a:pPr>
-            <a:r>
-              <a:rPr lang="en-US" sz="1200" b="1" dirty="0">
+          <a:bodyPr wrap="square" lIns="0" tIns="0" rIns="0" bIns="0" rtlCol="0" anchor="ctr">
+            <a:normAutofit/>
+          </a:bodyPr>
+          <a:lstStyle/>
+          <a:p>
+            <a:pPr algn="ctr" indent="0" marL="0">
+              <a:buNone/>
+            </a:pPr>
+            <a:r>
+              <a:rPr lang="en-US" sz="1100" b="1" dirty="0">
                 <a:solidFill>
                   <a:srgbClr val="8B95A5"/>
                 </a:solidFill>
@@ -8326,7 +8328,7 @@
               </a:rPr>
               <a:t>Skeptic</a:t>
             </a:r>
-            <a:endParaRPr lang="en-US" sz="1200" dirty="0"/>
+            <a:endParaRPr lang="en-US" sz="1100" dirty="0"/>
           </a:p>
         </p:txBody>
       </p:sp>
@@ -8338,8 +8340,8 @@
         </p:nvSpPr>
         <p:spPr>
           <a:xfrm>
-            <a:off x="1554480" y="1463040"/>
-            <a:ext cx="91440" cy="640080"/>
+            <a:off x="1380744" y="1463040"/>
+            <a:ext cx="73152" cy="640080"/>
           </a:xfrm>
           <a:prstGeom prst="rect">
             <a:avLst/>
@@ -8377,8 +8379,8 @@
         </p:nvSpPr>
         <p:spPr>
           <a:xfrm>
-            <a:off x="1645920" y="1463040"/>
-            <a:ext cx="1097280" cy="640080"/>
+            <a:off x="1453896" y="1463040"/>
+            <a:ext cx="1188720" cy="640080"/>
           </a:xfrm>
           <a:prstGeom prst="roundRect">
             <a:avLst>
@@ -8390,7 +8392,7 @@
               <a:alpha val="50000"/>
             </a:srgbClr>
           </a:solidFill>
-          <a:ln w="12700">
+          <a:ln w="19050">
             <a:solidFill>
               <a:srgbClr val="8B95A5"/>
             </a:solidFill>
@@ -8406,8 +8408,8 @@
         </p:nvSpPr>
         <p:spPr>
           <a:xfrm>
-            <a:off x="1645920" y="1463040"/>
-            <a:ext cx="1097280" cy="640080"/>
+            <a:off x="1453896" y="1463040"/>
+            <a:ext cx="1188720" cy="640080"/>
           </a:xfrm>
           <a:prstGeom prst="rect">
             <a:avLst/>
@@ -8416,14 +8418,16 @@
           <a:ln/>
         </p:spPr>
         <p:txBody>
-          <a:bodyPr wrap="square" lIns="0" tIns="0" rIns="0" bIns="0" rtlCol="0" anchor="ctr"/>
-          <a:lstStyle/>
-          <a:p>
-            <a:pPr algn="ctr" indent="0" marL="0">
-              <a:buNone/>
-            </a:pPr>
-            <a:r>
-              <a:rPr lang="en-US" sz="1200" b="1" dirty="0">
+          <a:bodyPr wrap="square" lIns="0" tIns="0" rIns="0" bIns="0" rtlCol="0" anchor="ctr">
+            <a:normAutofit/>
+          </a:bodyPr>
+          <a:lstStyle/>
+          <a:p>
+            <a:pPr algn="ctr" indent="0" marL="0">
+              <a:buNone/>
+            </a:pPr>
+            <a:r>
+              <a:rPr lang="en-US" sz="1100" b="1" dirty="0">
                 <a:solidFill>
                   <a:srgbClr val="8B95A5"/>
                 </a:solidFill>
@@ -8433,7 +8437,7 @@
               </a:rPr>
               <a:t>Explorer</a:t>
             </a:r>
-            <a:endParaRPr lang="en-US" sz="1200" dirty="0"/>
+            <a:endParaRPr lang="en-US" sz="1100" dirty="0"/>
           </a:p>
         </p:txBody>
       </p:sp>
@@ -8445,8 +8449,8 @@
         </p:nvSpPr>
         <p:spPr>
           <a:xfrm>
-            <a:off x="2743200" y="1463040"/>
-            <a:ext cx="91440" cy="640080"/>
+            <a:off x="2642616" y="1463040"/>
+            <a:ext cx="73152" cy="640080"/>
           </a:xfrm>
           <a:prstGeom prst="rect">
             <a:avLst/>
@@ -8484,8 +8488,8 @@
         </p:nvSpPr>
         <p:spPr>
           <a:xfrm>
-            <a:off x="2834640" y="1463040"/>
-            <a:ext cx="1097280" cy="640080"/>
+            <a:off x="2715768" y="1463040"/>
+            <a:ext cx="1188720" cy="640080"/>
           </a:xfrm>
           <a:prstGeom prst="roundRect">
             <a:avLst>
@@ -8497,7 +8501,7 @@
               <a:alpha val="50000"/>
             </a:srgbClr>
           </a:solidFill>
-          <a:ln w="12700">
+          <a:ln w="19050">
             <a:solidFill>
               <a:srgbClr val="8B95A5"/>
             </a:solidFill>
@@ -8513,8 +8517,8 @@
         </p:nvSpPr>
         <p:spPr>
           <a:xfrm>
-            <a:off x="2834640" y="1463040"/>
-            <a:ext cx="1097280" cy="640080"/>
+            <a:off x="2715768" y="1463040"/>
+            <a:ext cx="1188720" cy="640080"/>
           </a:xfrm>
           <a:prstGeom prst="rect">
             <a:avLst/>
@@ -8523,14 +8527,16 @@
           <a:ln/>
         </p:spPr>
         <p:txBody>
-          <a:bodyPr wrap="square" lIns="0" tIns="0" rIns="0" bIns="0" rtlCol="0" anchor="ctr"/>
-          <a:lstStyle/>
-          <a:p>
-            <a:pPr algn="ctr" indent="0" marL="0">
-              <a:buNone/>
-            </a:pPr>
-            <a:r>
-              <a:rPr lang="en-US" sz="1200" b="1" dirty="0">
+          <a:bodyPr wrap="square" lIns="0" tIns="0" rIns="0" bIns="0" rtlCol="0" anchor="ctr">
+            <a:normAutofit/>
+          </a:bodyPr>
+          <a:lstStyle/>
+          <a:p>
+            <a:pPr algn="ctr" indent="0" marL="0">
+              <a:buNone/>
+            </a:pPr>
+            <a:r>
+              <a:rPr lang="en-US" sz="1100" b="1" dirty="0">
                 <a:solidFill>
                   <a:srgbClr val="8B95A5"/>
                 </a:solidFill>
@@ -8540,7 +8546,7 @@
               </a:rPr>
               <a:t>Whisperer</a:t>
             </a:r>
-            <a:endParaRPr lang="en-US" sz="1200" dirty="0"/>
+            <a:endParaRPr lang="en-US" sz="1100" dirty="0"/>
           </a:p>
         </p:txBody>
       </p:sp>
@@ -8552,8 +8558,8 @@
         </p:nvSpPr>
         <p:spPr>
           <a:xfrm>
-            <a:off x="3931920" y="1463040"/>
-            <a:ext cx="91440" cy="640080"/>
+            <a:off x="3904488" y="1463040"/>
+            <a:ext cx="73152" cy="640080"/>
           </a:xfrm>
           <a:prstGeom prst="rect">
             <a:avLst/>
@@ -8591,8 +8597,8 @@
         </p:nvSpPr>
         <p:spPr>
           <a:xfrm>
-            <a:off x="4023360" y="1463040"/>
-            <a:ext cx="1097280" cy="640080"/>
+            <a:off x="3977640" y="1463040"/>
+            <a:ext cx="1188720" cy="640080"/>
           </a:xfrm>
           <a:prstGeom prst="roundRect">
             <a:avLst>
@@ -8604,7 +8610,7 @@
               <a:alpha val="50000"/>
             </a:srgbClr>
           </a:solidFill>
-          <a:ln w="12700">
+          <a:ln w="19050">
             <a:solidFill>
               <a:srgbClr val="8B95A5"/>
             </a:solidFill>
@@ -8620,8 +8626,8 @@
         </p:nvSpPr>
         <p:spPr>
           <a:xfrm>
-            <a:off x="4023360" y="1463040"/>
-            <a:ext cx="1097280" cy="640080"/>
+            <a:off x="3977640" y="1463040"/>
+            <a:ext cx="1188720" cy="640080"/>
           </a:xfrm>
           <a:prstGeom prst="rect">
             <a:avLst/>
@@ -8630,14 +8636,16 @@
           <a:ln/>
         </p:spPr>
         <p:txBody>
-          <a:bodyPr wrap="square" lIns="0" tIns="0" rIns="0" bIns="0" rtlCol="0" anchor="ctr"/>
-          <a:lstStyle/>
-          <a:p>
-            <a:pPr algn="ctr" indent="0" marL="0">
-              <a:buNone/>
-            </a:pPr>
-            <a:r>
-              <a:rPr lang="en-US" sz="1200" b="1" dirty="0">
+          <a:bodyPr wrap="square" lIns="0" tIns="0" rIns="0" bIns="0" rtlCol="0" anchor="ctr">
+            <a:normAutofit/>
+          </a:bodyPr>
+          <a:lstStyle/>
+          <a:p>
+            <a:pPr algn="ctr" indent="0" marL="0">
+              <a:buNone/>
+            </a:pPr>
+            <a:r>
+              <a:rPr lang="en-US" sz="1100" b="1" dirty="0">
                 <a:solidFill>
                   <a:srgbClr val="8B95A5"/>
                 </a:solidFill>
@@ -8647,7 +8655,7 @@
               </a:rPr>
               <a:t>Strategist</a:t>
             </a:r>
-            <a:endParaRPr lang="en-US" sz="1200" dirty="0"/>
+            <a:endParaRPr lang="en-US" sz="1100" dirty="0"/>
           </a:p>
         </p:txBody>
       </p:sp>
@@ -8659,8 +8667,8 @@
         </p:nvSpPr>
         <p:spPr>
           <a:xfrm>
-            <a:off x="5120640" y="1463040"/>
-            <a:ext cx="91440" cy="640080"/>
+            <a:off x="5166360" y="1463040"/>
+            <a:ext cx="73152" cy="640080"/>
           </a:xfrm>
           <a:prstGeom prst="rect">
             <a:avLst/>
@@ -8698,8 +8706,8 @@
         </p:nvSpPr>
         <p:spPr>
           <a:xfrm>
-            <a:off x="5212080" y="1463040"/>
-            <a:ext cx="1097280" cy="640080"/>
+            <a:off x="5239512" y="1463040"/>
+            <a:ext cx="1188720" cy="640080"/>
           </a:xfrm>
           <a:prstGeom prst="roundRect">
             <a:avLst>
@@ -8711,7 +8719,7 @@
               <a:alpha val="50000"/>
             </a:srgbClr>
           </a:solidFill>
-          <a:ln w="12700">
+          <a:ln w="19050">
             <a:solidFill>
               <a:srgbClr val="8B95A5"/>
             </a:solidFill>
@@ -8727,8 +8735,8 @@
         </p:nvSpPr>
         <p:spPr>
           <a:xfrm>
-            <a:off x="5212080" y="1463040"/>
-            <a:ext cx="1097280" cy="640080"/>
+            <a:off x="5239512" y="1463040"/>
+            <a:ext cx="1188720" cy="640080"/>
           </a:xfrm>
           <a:prstGeom prst="rect">
             <a:avLst/>
@@ -8737,14 +8745,16 @@
           <a:ln/>
         </p:spPr>
         <p:txBody>
-          <a:bodyPr wrap="square" lIns="0" tIns="0" rIns="0" bIns="0" rtlCol="0" anchor="ctr"/>
-          <a:lstStyle/>
-          <a:p>
-            <a:pPr algn="ctr" indent="0" marL="0">
-              <a:buNone/>
-            </a:pPr>
-            <a:r>
-              <a:rPr lang="en-US" sz="1200" b="1" dirty="0">
+          <a:bodyPr wrap="square" lIns="0" tIns="0" rIns="0" bIns="0" rtlCol="0" anchor="ctr">
+            <a:normAutofit/>
+          </a:bodyPr>
+          <a:lstStyle/>
+          <a:p>
+            <a:pPr algn="ctr" indent="0" marL="0">
+              <a:buNone/>
+            </a:pPr>
+            <a:r>
+              <a:rPr lang="en-US" sz="1100" b="1" dirty="0">
                 <a:solidFill>
                   <a:srgbClr val="8B95A5"/>
                 </a:solidFill>
@@ -8754,7 +8764,7 @@
               </a:rPr>
               <a:t>Operator</a:t>
             </a:r>
-            <a:endParaRPr lang="en-US" sz="1200" dirty="0"/>
+            <a:endParaRPr lang="en-US" sz="1100" dirty="0"/>
           </a:p>
         </p:txBody>
       </p:sp>
@@ -8766,8 +8776,8 @@
         </p:nvSpPr>
         <p:spPr>
           <a:xfrm>
-            <a:off x="6309360" y="1463040"/>
-            <a:ext cx="91440" cy="640080"/>
+            <a:off x="6428232" y="1463040"/>
+            <a:ext cx="73152" cy="640080"/>
           </a:xfrm>
           <a:prstGeom prst="rect">
             <a:avLst/>
@@ -8805,8 +8815,8 @@
         </p:nvSpPr>
         <p:spPr>
           <a:xfrm>
-            <a:off x="6400800" y="1463040"/>
-            <a:ext cx="1097280" cy="640080"/>
+            <a:off x="6501384" y="1463040"/>
+            <a:ext cx="1188720" cy="640080"/>
           </a:xfrm>
           <a:prstGeom prst="roundRect">
             <a:avLst>
@@ -8818,7 +8828,7 @@
               <a:alpha val="50000"/>
             </a:srgbClr>
           </a:solidFill>
-          <a:ln w="12700">
+          <a:ln w="19050">
             <a:solidFill>
               <a:srgbClr val="635BFF"/>
             </a:solidFill>
@@ -8834,8 +8844,8 @@
         </p:nvSpPr>
         <p:spPr>
           <a:xfrm>
-            <a:off x="6400800" y="1463040"/>
-            <a:ext cx="1097280" cy="640080"/>
+            <a:off x="6501384" y="1463040"/>
+            <a:ext cx="1188720" cy="640080"/>
           </a:xfrm>
           <a:prstGeom prst="rect">
             <a:avLst/>
@@ -8844,14 +8854,16 @@
           <a:ln/>
         </p:spPr>
         <p:txBody>
-          <a:bodyPr wrap="square" lIns="0" tIns="0" rIns="0" bIns="0" rtlCol="0" anchor="ctr"/>
-          <a:lstStyle/>
-          <a:p>
-            <a:pPr algn="ctr" indent="0" marL="0">
-              <a:buNone/>
-            </a:pPr>
-            <a:r>
-              <a:rPr lang="en-US" sz="1200" b="1" dirty="0">
+          <a:bodyPr wrap="square" lIns="0" tIns="0" rIns="0" bIns="0" rtlCol="0" anchor="ctr">
+            <a:normAutofit/>
+          </a:bodyPr>
+          <a:lstStyle/>
+          <a:p>
+            <a:pPr algn="ctr" indent="0" marL="0">
+              <a:buNone/>
+            </a:pPr>
+            <a:r>
+              <a:rPr lang="en-US" sz="1100" b="1" dirty="0">
                 <a:solidFill>
                   <a:srgbClr val="8B95A5"/>
                 </a:solidFill>
@@ -8861,7 +8873,7 @@
               </a:rPr>
               <a:t>Orchestrator</a:t>
             </a:r>
-            <a:endParaRPr lang="en-US" sz="1200" dirty="0"/>
+            <a:endParaRPr lang="en-US" sz="1100" dirty="0"/>
           </a:p>
         </p:txBody>
       </p:sp>
@@ -8873,8 +8885,8 @@
         </p:nvSpPr>
         <p:spPr>
           <a:xfrm>
-            <a:off x="7498080" y="1463040"/>
-            <a:ext cx="91440" cy="640080"/>
+            <a:off x="7690104" y="1463040"/>
+            <a:ext cx="73152" cy="640080"/>
           </a:xfrm>
           <a:prstGeom prst="rect">
             <a:avLst/>
@@ -8912,8 +8924,8 @@
         </p:nvSpPr>
         <p:spPr>
           <a:xfrm>
-            <a:off x="7589520" y="1463040"/>
-            <a:ext cx="1097280" cy="640080"/>
+            <a:off x="7763256" y="1463040"/>
+            <a:ext cx="1188720" cy="640080"/>
           </a:xfrm>
           <a:prstGeom prst="roundRect">
             <a:avLst>
@@ -8923,7 +8935,7 @@
           <a:solidFill>
             <a:srgbClr val="635BFF"/>
           </a:solidFill>
-          <a:ln w="25400">
+          <a:ln w="19050">
             <a:solidFill>
               <a:srgbClr val="635BFF"/>
             </a:solidFill>
@@ -8939,8 +8951,8 @@
         </p:nvSpPr>
         <p:spPr>
           <a:xfrm>
-            <a:off x="7589520" y="1463040"/>
-            <a:ext cx="1097280" cy="640080"/>
+            <a:off x="7763256" y="1463040"/>
+            <a:ext cx="1188720" cy="640080"/>
           </a:xfrm>
           <a:prstGeom prst="rect">
             <a:avLst/>
@@ -8949,14 +8961,16 @@
           <a:ln/>
         </p:spPr>
         <p:txBody>
-          <a:bodyPr wrap="square" lIns="0" tIns="0" rIns="0" bIns="0" rtlCol="0" anchor="ctr"/>
-          <a:lstStyle/>
-          <a:p>
-            <a:pPr algn="ctr" indent="0" marL="0">
-              <a:buNone/>
-            </a:pPr>
-            <a:r>
-              <a:rPr lang="en-US" sz="1200" b="1" dirty="0">
+          <a:bodyPr wrap="square" lIns="0" tIns="0" rIns="0" bIns="0" rtlCol="0" anchor="ctr">
+            <a:normAutofit/>
+          </a:bodyPr>
+          <a:lstStyle/>
+          <a:p>
+            <a:pPr algn="ctr" indent="0" marL="0">
+              <a:buNone/>
+            </a:pPr>
+            <a:r>
+              <a:rPr lang="en-US" sz="1100" b="1" dirty="0">
                 <a:solidFill>
                   <a:srgbClr val="FFFFFF"/>
                 </a:solidFill>
@@ -8966,7 +8980,7 @@
               </a:rPr>
               <a:t>Builder</a:t>
             </a:r>
-            <a:endParaRPr lang="en-US" sz="1200" dirty="0"/>
+            <a:endParaRPr lang="en-US" sz="1100" dirty="0"/>
           </a:p>
         </p:txBody>
       </p:sp>
@@ -8995,9 +9009,9 @@
               <a:buNone/>
             </a:pPr>
             <a:r>
-              <a:rPr lang="en-US" sz="2400" dirty="0">
-                <a:solidFill>
-                  <a:srgbClr val="8B95A5"/>
+              <a:rPr lang="en-US" sz="2400" b="1" dirty="0">
+                <a:solidFill>
+                  <a:srgbClr val="635BFF"/>
                 </a:solidFill>
                 <a:latin typeface="Georgia" pitchFamily="34" charset="0"/>
                 <a:ea typeface="Georgia" pitchFamily="34" charset="-122"/>

--- a/decks/builder/builder.pptx
+++ b/decks/builder/builder.pptx
@@ -2065,7 +2065,7 @@
           <a:p>
             <a:r>
               <a:rPr lang="en-US" dirty="0"/>
-              <a:t>Three principles — how quality keeps pace. Every tool that follows maps to one or more. Perfect context: right information, right time. No hidden failures: every error surfaced. Gated workflow: staged verification, nothing skipped.</a:t>
+              <a:t>Three principles — how quality keeps pace. Every tool that follows maps to one or more. Perfect context: right information, right time. Always grounded: two failure modes, same root cause — stale training data and silent retrieval failure. Context7 solves the first, Firecrawl solves the second. Gated workflow: staged verification, nothing skipped.</a:t>
             </a:r>
             <a:endParaRPr lang="en-US" dirty="0"/>
           </a:p>
@@ -2593,7 +2593,7 @@
           <a:p>
             <a:r>
               <a:rPr lang="en-US" dirty="0"/>
-              <a:t>Context7 fetches live, version-specific library documentation and injects it into context at prompt time. Instead of relying on stale training data, the agent works from real, current docs. Prevents hallucinated APIs, outdated patterns, wrong-version code.</a:t>
+              <a:t>Context7 fetches live, version-specific library documentation and injects it into context at prompt time. Instead of relying on stale training data, the agent works from real, current docs. Prevents hallucinated APIs, outdated patterns, wrong-version code. First half of ‘always grounded’ — live data, not training data.</a:t>
             </a:r>
             <a:endParaRPr lang="en-US" dirty="0"/>
           </a:p>
@@ -2769,7 +2769,7 @@
           <a:p>
             <a:r>
               <a:rPr lang="en-US" dirty="0"/>
-              <a:t>WebFetch gets rejected by sites, pages are too large and get truncated, content gets summarized in ways that lose critical detail — and none of this is obvious. Firecrawl handles all of this reliably.</a:t>
+              <a:t>WebFetch gets rejected by sites, pages are too large and get truncated, content gets summarized in ways that lose critical detail — and none of this is obvious. Firecrawl handles all of this reliably. Second half of ‘always grounded’ — reliable retrieval, not silent failure. Both Context7 and Firecrawl share this tag: solving the same root problem from two directions.</a:t>
             </a:r>
             <a:endParaRPr lang="en-US" dirty="0"/>
           </a:p>
@@ -5321,7 +5321,7 @@
           <a:p>
             <a:r>
               <a:rPr lang="en-US" dirty="0"/>
-              <a:t>Rapid-fire recap. Each tool maps to a principle. The gated workflow is the approach on top — powered by Superpowers, enforced through two-layer verification, backstopped by CI/CD. The audience should see the system as a whole — not individual pieces, but an integrated machine.</a:t>
+              <a:t>Rapid-fire recap. Each tool maps to a principle. ‘Always grounded’ groups Context7 and Firecrawl together — both prevent the agent from working on wrong information, from two directions. The gated workflow is the approach on top — powered by Superpowers, enforced through two-layer verification, backstopped by CI/CD.</a:t>
             </a:r>
             <a:endParaRPr lang="en-US" dirty="0"/>
           </a:p>
@@ -11271,7 +11271,7 @@
                 <a:ea typeface="Georgia" pitchFamily="34" charset="-122"/>
                 <a:cs typeface="Georgia" pitchFamily="34" charset="-120"/>
               </a:rPr>
-              <a:t>No Hidden Failures</a:t>
+              <a:t>Always Grounded</a:t>
             </a:r>
             <a:endParaRPr lang="en-US" sz="2800" dirty="0"/>
           </a:p>
@@ -11310,7 +11310,7 @@
                 <a:ea typeface="Verdana" pitchFamily="34" charset="-122"/>
                 <a:cs typeface="Verdana" pitchFamily="34" charset="-120"/>
               </a:rPr>
-              <a:t>Every failure</a:t>
+              <a:t>Live data.</a:t>
             </a:r>
             <a:endParaRPr lang="en-US" sz="2200" dirty="0"/>
           </a:p>
@@ -11327,7 +11327,7 @@
                 <a:ea typeface="Verdana" pitchFamily="34" charset="-122"/>
                 <a:cs typeface="Verdana" pitchFamily="34" charset="-120"/>
               </a:rPr>
-              <a:t>must be visible.</a:t>
+              <a:t>No silent gaps.</a:t>
             </a:r>
             <a:endParaRPr lang="en-US" sz="2200" dirty="0"/>
           </a:p>
@@ -12558,7 +12558,7 @@
                 <a:ea typeface="Verdana" pitchFamily="34" charset="-122"/>
                 <a:cs typeface="Verdana" pitchFamily="34" charset="-120"/>
               </a:rPr>
-              <a:t>perfect context</a:t>
+              <a:t>always grounded</a:t>
             </a:r>
             <a:endParaRPr lang="en-US" sz="1600" dirty="0"/>
           </a:p>
@@ -12895,7 +12895,7 @@
                 <a:ea typeface="Verdana" pitchFamily="34" charset="-122"/>
                 <a:cs typeface="Verdana" pitchFamily="34" charset="-120"/>
               </a:rPr>
-              <a:t>No silent failures.</a:t>
+              <a:t>No silent gaps.</a:t>
             </a:r>
             <a:endParaRPr lang="en-US" sz="2800" dirty="0"/>
           </a:p>
@@ -12934,7 +12934,7 @@
                 <a:ea typeface="Verdana" pitchFamily="34" charset="-122"/>
                 <a:cs typeface="Verdana" pitchFamily="34" charset="-120"/>
               </a:rPr>
-              <a:t>no hidden failures</a:t>
+              <a:t>always grounded</a:t>
             </a:r>
             <a:endParaRPr lang="en-US" sz="1600" dirty="0"/>
           </a:p>
@@ -19015,7 +19015,7 @@
                 <a:ea typeface="Verdana" pitchFamily="34" charset="-122"/>
                 <a:cs typeface="Verdana" pitchFamily="34" charset="-120"/>
               </a:rPr>
-              <a:t>  Context7, Language Servers, Rules, Monorepo</a:t>
+              <a:t>  Language Servers, Rules, Monorepo</a:t>
             </a:r>
             <a:endParaRPr lang="en-US" sz="2400" dirty="0"/>
           </a:p>
@@ -19038,7 +19038,7 @@
                 <a:ea typeface="Verdana" pitchFamily="34" charset="-122"/>
                 <a:cs typeface="Verdana" pitchFamily="34" charset="-120"/>
               </a:rPr>
-              <a:t>No hidden failures</a:t>
+              <a:t>Always grounded</a:t>
             </a:r>
             <a:endParaRPr lang="en-US" sz="2400" dirty="0"/>
           </a:p>
@@ -19055,7 +19055,7 @@
                 <a:ea typeface="Verdana" pitchFamily="34" charset="-122"/>
                 <a:cs typeface="Verdana" pitchFamily="34" charset="-120"/>
               </a:rPr>
-              <a:t>  Firecrawl, Tool usage rules</a:t>
+              <a:t>  Context7, Firecrawl, Tool usage rules</a:t>
             </a:r>
             <a:endParaRPr lang="en-US" sz="2400" dirty="0"/>
           </a:p>
